--- a/EF-Core-Secrets-10-Insights.pptx
+++ b/EF-Core-Secrets-10-Insights.pptx
@@ -5,7 +5,7 @@
     <p:sldMasterId id="2147483648" r:id="rId1"/>
   </p:sldMasterIdLst>
   <p:notesMasterIdLst>
-    <p:notesMasterId r:id="rId42"/>
+    <p:notesMasterId r:id="rId44"/>
   </p:notesMasterIdLst>
   <p:sldIdLst>
     <p:sldId id="294" r:id="rId2"/>
@@ -43,11 +43,13 @@
     <p:sldId id="287" r:id="rId34"/>
     <p:sldId id="288" r:id="rId35"/>
     <p:sldId id="289" r:id="rId36"/>
-    <p:sldId id="290" r:id="rId37"/>
-    <p:sldId id="291" r:id="rId38"/>
-    <p:sldId id="292" r:id="rId39"/>
-    <p:sldId id="293" r:id="rId40"/>
-    <p:sldId id="295" r:id="rId41"/>
+    <p:sldId id="339" r:id="rId37"/>
+    <p:sldId id="340" r:id="rId38"/>
+    <p:sldId id="290" r:id="rId39"/>
+    <p:sldId id="291" r:id="rId40"/>
+    <p:sldId id="292" r:id="rId41"/>
+    <p:sldId id="293" r:id="rId42"/>
+    <p:sldId id="295" r:id="rId43"/>
   </p:sldIdLst>
   <p:sldSz cx="12192000" cy="6858000"/>
   <p:notesSz cx="6858000" cy="12192000"/>
@@ -151,12 +153,33 @@
 </p:presentation>
 </file>
 
-<file path=ppt/revisionInfo.xml><?xml version="1.0" encoding="utf-8"?>
-<p1510:revInfo xmlns:a="http://schemas.openxmlformats.org/drawingml/2006/main" xmlns:r="http://schemas.openxmlformats.org/officeDocument/2006/relationships" xmlns:p1510="http://schemas.microsoft.com/office/powerpoint/2015/10/main">
-  <p1510:revLst>
-    <p1510:client id="{8619578A-3603-4C4E-9FD2-F5C8521EB292}" v="11" dt="2026-05-26T19:36:56.222"/>
-  </p1510:revLst>
-</p1510:revInfo>
+<file path=ppt/ink/ink1.xml><?xml version="1.0" encoding="utf-8"?>
+<inkml:ink xmlns:inkml="http://www.w3.org/2003/InkML">
+  <inkml:definitions>
+    <inkml:context xml:id="ctx0">
+      <inkml:inkSource xml:id="inkSrc0">
+        <inkml:traceFormat>
+          <inkml:channel name="X" type="integer" min="-2.14748E9" max="2.14748E9" units="cm"/>
+          <inkml:channel name="Y" type="integer" min="-2.14748E9" max="2.14748E9" units="cm"/>
+        </inkml:traceFormat>
+        <inkml:channelProperties>
+          <inkml:channelProperty channel="X" name="resolution" value="1000" units="1/cm"/>
+          <inkml:channelProperty channel="Y" name="resolution" value="1000" units="1/cm"/>
+        </inkml:channelProperties>
+      </inkml:inkSource>
+      <inkml:timestamp xml:id="ts0" timeString="2019-06-20T09:14:36.563"/>
+    </inkml:context>
+    <inkml:brush xml:id="br0">
+      <inkml:brushProperty name="width" value="0.3" units="cm"/>
+      <inkml:brushProperty name="height" value="0.6" units="cm"/>
+      <inkml:brushProperty name="color" value="#FFFC00"/>
+      <inkml:brushProperty name="tip" value="rectangle"/>
+      <inkml:brushProperty name="rasterOp" value="maskPen"/>
+      <inkml:brushProperty name="ignorePressure" value="1"/>
+    </inkml:brush>
+  </inkml:definitions>
+  <inkml:trace contextRef="#ctx0" brushRef="#br0">0 160,'933'0,"-785"5,24 10,115 5,162-20,-206-1,108 9,154-2,-305-7,-34 0,234 4,-292 6,96 22,27 2,-150-28,64-5,23 0,904 12,-722-14,-41-5,132 0,-272 9,-133-4,-1-1,15-4,40-4,486-17,-503 26,-9 1,55-8,-75 2,27-3,0 3,29 2,2245 7,-1399-3,-777-6,9 0,379 7,-530-1,1-2,-1 0,2-3,1 1,0 1,17 0,255 4,14 0,-204-6,27-1,-76 7,516-10,-148 6,-252 5,1033-1,-953 14,-25-1,-141-12,148 5,30 1,-237-4,0 2,0 2,3 1,1 1,0-2,12 0,121 1,53-10,-62 1,235 14,52 0,-142-13,81-1,-313-4,1-4,5-3,-69 10,51-5,0 2,3 3,0 1,51-10,-88 7,69-11,0 5,52 2,-134 8,245-4,207-30,-354 25,60 4,-6 4,2-8,37-10,27-14,-155 22,-17 2,7-5,-43 10,1 0,-1 2,1 1,21 3,-5-2,285 1,-311 0,0 0,9 3,28 3,-29-5,0 1,15 5,2 0,-20-5</inkml:trace>
+</inkml:ink>
 </file>
 
 <file path=ppt/notesMasters/notesMaster1.xml><?xml version="1.0" encoding="utf-8"?>
@@ -2701,7 +2724,7 @@
           <a:p>
             <a:fld id="{F7021451-1387-4CA6-816F-3879F97B5CBC}" type="slidenum">
               <a:rPr lang="en-US"/>
-              <a:t>36</a:t>
+              <a:t>38</a:t>
             </a:fld>
             <a:endParaRPr lang="en-US"/>
           </a:p>
@@ -2785,7 +2808,7 @@
           <a:p>
             <a:fld id="{F7021451-1387-4CA6-816F-3879F97B5CBC}" type="slidenum">
               <a:rPr lang="en-US"/>
-              <a:t>37</a:t>
+              <a:t>39</a:t>
             </a:fld>
             <a:endParaRPr lang="en-US"/>
           </a:p>
@@ -2869,7 +2892,7 @@
           <a:p>
             <a:fld id="{F7021451-1387-4CA6-816F-3879F97B5CBC}" type="slidenum">
               <a:rPr lang="en-US"/>
-              <a:t>38</a:t>
+              <a:t>40</a:t>
             </a:fld>
             <a:endParaRPr lang="en-US"/>
           </a:p>
@@ -2953,7 +2976,7 @@
           <a:p>
             <a:fld id="{F7021451-1387-4CA6-816F-3879F97B5CBC}" type="slidenum">
               <a:rPr lang="en-US"/>
-              <a:t>39</a:t>
+              <a:t>41</a:t>
             </a:fld>
             <a:endParaRPr lang="en-US"/>
           </a:p>
@@ -3061,7 +3084,7 @@
           <a:p>
             <a:fld id="{F7021451-1387-4CA6-816F-3879F97B5CBC}" type="slidenum">
               <a:rPr lang="en-US"/>
-              <a:t>40</a:t>
+              <a:t>42</a:t>
             </a:fld>
             <a:endParaRPr lang="en-US"/>
           </a:p>
@@ -3983,6 +4006,119 @@
 </p:sldLayout>
 </file>
 
+<file path=ppt/slideLayouts/slideLayout3.xml><?xml version="1.0" encoding="utf-8"?>
+<p:sldLayout xmlns:a="http://schemas.openxmlformats.org/drawingml/2006/main" xmlns:r="http://schemas.openxmlformats.org/officeDocument/2006/relationships" xmlns:p="http://schemas.openxmlformats.org/presentationml/2006/main" type="blank">
+  <p:cSld name="Blank">
+    <p:spTree>
+      <p:nvGrpSpPr>
+        <p:cNvPr id="1" name=""/>
+        <p:cNvGrpSpPr/>
+        <p:nvPr/>
+      </p:nvGrpSpPr>
+      <p:grpSpPr>
+        <a:xfrm>
+          <a:off x="0" y="0"/>
+          <a:ext cx="0" cy="0"/>
+          <a:chOff x="0" y="0"/>
+          <a:chExt cx="0" cy="0"/>
+        </a:xfrm>
+      </p:grpSpPr>
+      <p:sp>
+        <p:nvSpPr>
+          <p:cNvPr id="2" name="Date Placeholder 1">
+            <a:extLst>
+              <a:ext uri="{FF2B5EF4-FFF2-40B4-BE49-F238E27FC236}">
+                <a16:creationId xmlns:a16="http://schemas.microsoft.com/office/drawing/2014/main" id="{BD8F9BDF-EC61-4748-943F-2969A2C9D511}"/>
+              </a:ext>
+            </a:extLst>
+          </p:cNvPr>
+          <p:cNvSpPr>
+            <a:spLocks noGrp="1"/>
+          </p:cNvSpPr>
+          <p:nvPr>
+            <p:ph type="dt" sz="half" idx="10"/>
+          </p:nvPr>
+        </p:nvSpPr>
+        <p:spPr/>
+        <p:txBody>
+          <a:bodyPr/>
+          <a:lstStyle/>
+          <a:p>
+            <a:fld id="{6B028277-8844-4E5E-92A8-FCE82D200765}" type="datetimeFigureOut">
+              <a:rPr lang="en-US" smtClean="0"/>
+              <a:t>5/27/26</a:t>
+            </a:fld>
+            <a:endParaRPr lang="en-US"/>
+          </a:p>
+        </p:txBody>
+      </p:sp>
+      <p:sp>
+        <p:nvSpPr>
+          <p:cNvPr id="3" name="Footer Placeholder 2">
+            <a:extLst>
+              <a:ext uri="{FF2B5EF4-FFF2-40B4-BE49-F238E27FC236}">
+                <a16:creationId xmlns:a16="http://schemas.microsoft.com/office/drawing/2014/main" id="{173D36EB-8684-4588-9F05-D66670933FF3}"/>
+              </a:ext>
+            </a:extLst>
+          </p:cNvPr>
+          <p:cNvSpPr>
+            <a:spLocks noGrp="1"/>
+          </p:cNvSpPr>
+          <p:nvPr>
+            <p:ph type="ftr" sz="quarter" idx="11"/>
+          </p:nvPr>
+        </p:nvSpPr>
+        <p:spPr/>
+        <p:txBody>
+          <a:bodyPr/>
+          <a:lstStyle/>
+          <a:p>
+            <a:endParaRPr lang="en-US"/>
+          </a:p>
+        </p:txBody>
+      </p:sp>
+      <p:sp>
+        <p:nvSpPr>
+          <p:cNvPr id="4" name="Slide Number Placeholder 3">
+            <a:extLst>
+              <a:ext uri="{FF2B5EF4-FFF2-40B4-BE49-F238E27FC236}">
+                <a16:creationId xmlns:a16="http://schemas.microsoft.com/office/drawing/2014/main" id="{BA162DCB-8422-4AB3-BF0A-63343FF04B84}"/>
+              </a:ext>
+            </a:extLst>
+          </p:cNvPr>
+          <p:cNvSpPr>
+            <a:spLocks noGrp="1"/>
+          </p:cNvSpPr>
+          <p:nvPr>
+            <p:ph type="sldNum" sz="quarter" idx="12"/>
+          </p:nvPr>
+        </p:nvSpPr>
+        <p:spPr/>
+        <p:txBody>
+          <a:bodyPr/>
+          <a:lstStyle/>
+          <a:p>
+            <a:fld id="{7F3EE24A-3D7B-4903-B98E-DA4F30F56708}" type="slidenum">
+              <a:rPr lang="en-US" smtClean="0"/>
+              <a:t>‹#›</a:t>
+            </a:fld>
+            <a:endParaRPr lang="en-US"/>
+          </a:p>
+        </p:txBody>
+      </p:sp>
+    </p:spTree>
+    <p:extLst>
+      <p:ext uri="{BB962C8B-B14F-4D97-AF65-F5344CB8AC3E}">
+        <p14:creationId xmlns:p14="http://schemas.microsoft.com/office/powerpoint/2010/main" val="666557385"/>
+      </p:ext>
+    </p:extLst>
+  </p:cSld>
+  <p:clrMapOvr>
+    <a:masterClrMapping/>
+  </p:clrMapOvr>
+</p:sldLayout>
+</file>
+
 <file path=ppt/slideMasters/slideMaster1.xml><?xml version="1.0" encoding="utf-8"?>
 <p:sldMaster xmlns:a="http://schemas.openxmlformats.org/drawingml/2006/main" xmlns:r="http://schemas.openxmlformats.org/officeDocument/2006/relationships" xmlns:p="http://schemas.openxmlformats.org/presentationml/2006/main">
   <p:cSld>
@@ -4011,6 +4147,7 @@
   <p:sldLayoutIdLst>
     <p:sldLayoutId id="2147483649" r:id="rId1"/>
     <p:sldLayoutId id="2147483650" r:id="rId2"/>
+    <p:sldLayoutId id="2147483651" r:id="rId3"/>
   </p:sldLayoutIdLst>
   <p:hf sldNum="0" hdr="0" ftr="0" dt="0"/>
   <p:txStyles>
@@ -20241,7 +20378,7 @@
                 <a:ea typeface="Arial" pitchFamily="34" charset="-122"/>
                 <a:cs typeface="Arial" pitchFamily="34" charset="-120"/>
               </a:rPr>
-              <a:t>25+ years building .NET applications</a:t>
+              <a:t>20+ years building .NET applications</a:t>
             </a:r>
             <a:endParaRPr lang="en-US" sz="1600" dirty="0"/>
           </a:p>
@@ -20318,8 +20455,8 @@
         </p:nvSpPr>
         <p:spPr>
           <a:xfrm>
-            <a:off x="9144000" y="2834640"/>
-            <a:ext cx="2560320" cy="365760"/>
+            <a:off x="8622890" y="2834640"/>
+            <a:ext cx="3081430" cy="365760"/>
           </a:xfrm>
           <a:prstGeom prst="rect">
             <a:avLst/>
@@ -20357,8 +20494,8 @@
         </p:nvSpPr>
         <p:spPr>
           <a:xfrm>
-            <a:off x="9144000" y="3200400"/>
-            <a:ext cx="2560320" cy="1828800"/>
+            <a:off x="8622890" y="3200400"/>
+            <a:ext cx="3081430" cy="1828800"/>
           </a:xfrm>
           <a:prstGeom prst="rect">
             <a:avLst/>
@@ -20377,7 +20514,7 @@
               <a:buNone/>
             </a:pPr>
             <a:r>
-              <a:rPr lang="en-US" sz="1300" dirty="0">
+              <a:rPr lang="en-US" sz="1600" dirty="0">
                 <a:solidFill>
                   <a:srgbClr val="292929"/>
                 </a:solidFill>
@@ -20387,7 +20524,7 @@
               </a:rPr>
               <a:t>woodruff.dev</a:t>
             </a:r>
-            <a:endParaRPr lang="en-US" sz="1300" dirty="0"/>
+            <a:endParaRPr lang="en-US" sz="1600" dirty="0"/>
           </a:p>
           <a:p>
             <a:pPr marL="0" indent="0">
@@ -20397,7 +20534,7 @@
               <a:buNone/>
             </a:pPr>
             <a:r>
-              <a:rPr lang="en-US" sz="1300" dirty="0">
+              <a:rPr lang="en-US" sz="1600" dirty="0">
                 <a:solidFill>
                   <a:srgbClr val="292929"/>
                 </a:solidFill>
@@ -20407,7 +20544,7 @@
               </a:rPr>
               <a:t>linkedin.com/in/chriswoodruff</a:t>
             </a:r>
-            <a:endParaRPr lang="en-US" sz="1300" dirty="0"/>
+            <a:endParaRPr lang="en-US" sz="1600" dirty="0"/>
           </a:p>
           <a:p>
             <a:pPr marL="0" indent="0">
@@ -20417,7 +20554,7 @@
               <a:buNone/>
             </a:pPr>
             <a:r>
-              <a:rPr lang="en-US" sz="1300" dirty="0">
+              <a:rPr lang="en-US" sz="1600" dirty="0">
                 <a:solidFill>
                   <a:srgbClr val="292929"/>
                 </a:solidFill>
@@ -20427,7 +20564,7 @@
               </a:rPr>
               <a:t>bsky.app/profile/woodruff.dev</a:t>
             </a:r>
-            <a:endParaRPr lang="en-US" sz="1300" dirty="0"/>
+            <a:endParaRPr lang="en-US" sz="1600" dirty="0"/>
           </a:p>
           <a:p>
             <a:pPr marL="0" indent="0">
@@ -20437,7 +20574,7 @@
               <a:buNone/>
             </a:pPr>
             <a:r>
-              <a:rPr lang="en-US" sz="1300" dirty="0">
+              <a:rPr lang="en-US" sz="1600" dirty="0">
                 <a:solidFill>
                   <a:srgbClr val="292929"/>
                 </a:solidFill>
@@ -20447,7 +20584,7 @@
               </a:rPr>
               <a:t>cwoodruff@live.com</a:t>
             </a:r>
-            <a:endParaRPr lang="en-US" sz="1300" dirty="0"/>
+            <a:endParaRPr lang="en-US" sz="1600" dirty="0"/>
           </a:p>
         </p:txBody>
       </p:sp>
@@ -25750,6 +25887,2874 @@
 
 <file path=ppt/slides/slide36.xml><?xml version="1.0" encoding="utf-8"?>
 <p:sld xmlns:a="http://schemas.openxmlformats.org/drawingml/2006/main" xmlns:r="http://schemas.openxmlformats.org/officeDocument/2006/relationships" xmlns:p="http://schemas.openxmlformats.org/presentationml/2006/main">
+  <p:cSld>
+    <p:bg>
+      <p:bgPr>
+        <a:solidFill>
+          <a:schemeClr val="tx1"/>
+        </a:solidFill>
+        <a:effectLst/>
+      </p:bgPr>
+    </p:bg>
+    <p:spTree>
+      <p:nvGrpSpPr>
+        <p:cNvPr id="1" name=""/>
+        <p:cNvGrpSpPr/>
+        <p:nvPr/>
+      </p:nvGrpSpPr>
+      <p:grpSpPr>
+        <a:xfrm>
+          <a:off x="0" y="0"/>
+          <a:ext cx="0" cy="0"/>
+          <a:chOff x="0" y="0"/>
+          <a:chExt cx="0" cy="0"/>
+        </a:xfrm>
+      </p:grpSpPr>
+      <p:sp>
+        <p:nvSpPr>
+          <p:cNvPr id="4" name="Rectangle 3">
+            <a:extLst>
+              <a:ext uri="{FF2B5EF4-FFF2-40B4-BE49-F238E27FC236}">
+                <a16:creationId xmlns:a16="http://schemas.microsoft.com/office/drawing/2014/main" id="{D091D138-9D96-437E-9921-7AA17B61FA98}"/>
+              </a:ext>
+            </a:extLst>
+          </p:cNvPr>
+          <p:cNvSpPr/>
+          <p:nvPr/>
+        </p:nvSpPr>
+        <p:spPr>
+          <a:xfrm>
+            <a:off x="400787" y="142540"/>
+            <a:ext cx="11243920" cy="2862322"/>
+          </a:xfrm>
+          <a:prstGeom prst="rect">
+            <a:avLst/>
+          </a:prstGeom>
+        </p:spPr>
+        <p:txBody>
+          <a:bodyPr wrap="square">
+            <a:spAutoFit/>
+          </a:bodyPr>
+          <a:lstStyle/>
+          <a:p>
+            <a:pPr marL="0" marR="0" lvl="0" indent="0" algn="l" defTabSz="914400" rtl="0" eaLnBrk="1" fontAlgn="auto" latinLnBrk="0" hangingPunct="1">
+              <a:lnSpc>
+                <a:spcPct val="100000"/>
+              </a:lnSpc>
+              <a:spcBef>
+                <a:spcPts val="0"/>
+              </a:spcBef>
+              <a:spcAft>
+                <a:spcPts val="0"/>
+              </a:spcAft>
+              <a:buClrTx/>
+              <a:buSzTx/>
+              <a:buFontTx/>
+              <a:buNone/>
+              <a:tabLst/>
+              <a:defRPr/>
+            </a:pPr>
+            <a:r>
+              <a:rPr kumimoji="0" lang="en-US" sz="2000" b="0" i="0" u="none" strike="noStrike" kern="1200" cap="none" spc="0" normalizeH="0" baseline="0" noProof="0" dirty="0">
+                <a:ln>
+                  <a:noFill/>
+                </a:ln>
+                <a:solidFill>
+                  <a:prstClr val="white"/>
+                </a:solidFill>
+                <a:effectLst/>
+                <a:uLnTx/>
+                <a:uFillTx/>
+                <a:latin typeface="Market_Deco"/>
+                <a:ea typeface="+mn-ea"/>
+                <a:cs typeface="+mn-cs"/>
+              </a:rPr>
+              <a:t>SELECT </a:t>
+            </a:r>
+            <a:r>
+              <a:rPr kumimoji="0" lang="en-US" sz="2000" b="0" i="0" u="none" strike="noStrike" kern="1200" cap="none" spc="0" normalizeH="0" baseline="0" noProof="0" dirty="0" err="1">
+                <a:ln>
+                  <a:noFill/>
+                </a:ln>
+                <a:solidFill>
+                  <a:prstClr val="white"/>
+                </a:solidFill>
+                <a:effectLst/>
+                <a:uLnTx/>
+                <a:uFillTx/>
+                <a:latin typeface="Market_Deco"/>
+                <a:ea typeface="+mn-ea"/>
+                <a:cs typeface="+mn-cs"/>
+              </a:rPr>
+              <a:t>c.CustomerId</a:t>
+            </a:r>
+            <a:r>
+              <a:rPr kumimoji="0" lang="en-US" sz="2000" b="0" i="0" u="none" strike="noStrike" kern="1200" cap="none" spc="0" normalizeH="0" baseline="0" noProof="0" dirty="0">
+                <a:ln>
+                  <a:noFill/>
+                </a:ln>
+                <a:solidFill>
+                  <a:prstClr val="white"/>
+                </a:solidFill>
+                <a:effectLst/>
+                <a:uLnTx/>
+                <a:uFillTx/>
+                <a:latin typeface="Market_Deco"/>
+                <a:ea typeface="+mn-ea"/>
+                <a:cs typeface="+mn-cs"/>
+              </a:rPr>
+              <a:t>, </a:t>
+            </a:r>
+            <a:r>
+              <a:rPr kumimoji="0" lang="en-US" sz="2000" b="0" i="0" u="none" strike="noStrike" kern="1200" cap="none" spc="0" normalizeH="0" baseline="0" noProof="0" dirty="0" err="1">
+                <a:ln>
+                  <a:noFill/>
+                </a:ln>
+                <a:solidFill>
+                  <a:prstClr val="white"/>
+                </a:solidFill>
+                <a:effectLst/>
+                <a:uLnTx/>
+                <a:uFillTx/>
+                <a:latin typeface="Market_Deco"/>
+                <a:ea typeface="+mn-ea"/>
+                <a:cs typeface="+mn-cs"/>
+              </a:rPr>
+              <a:t>t.Name</a:t>
+            </a:r>
+            <a:r>
+              <a:rPr kumimoji="0" lang="en-US" sz="2000" b="0" i="0" u="none" strike="noStrike" kern="1200" cap="none" spc="0" normalizeH="0" baseline="0" noProof="0" dirty="0">
+                <a:ln>
+                  <a:noFill/>
+                </a:ln>
+                <a:solidFill>
+                  <a:prstClr val="white"/>
+                </a:solidFill>
+                <a:effectLst/>
+                <a:uLnTx/>
+                <a:uFillTx/>
+                <a:latin typeface="Market_Deco"/>
+                <a:ea typeface="+mn-ea"/>
+                <a:cs typeface="+mn-cs"/>
+              </a:rPr>
+              <a:t> AS </a:t>
+            </a:r>
+            <a:r>
+              <a:rPr kumimoji="0" lang="en-US" sz="2000" b="0" i="0" u="none" strike="noStrike" kern="1200" cap="none" spc="0" normalizeH="0" baseline="0" noProof="0" dirty="0" err="1">
+                <a:ln>
+                  <a:noFill/>
+                </a:ln>
+                <a:solidFill>
+                  <a:prstClr val="white"/>
+                </a:solidFill>
+                <a:effectLst/>
+                <a:uLnTx/>
+                <a:uFillTx/>
+                <a:latin typeface="Market_Deco"/>
+                <a:ea typeface="+mn-ea"/>
+                <a:cs typeface="+mn-cs"/>
+              </a:rPr>
+              <a:t>TrackName</a:t>
+            </a:r>
+            <a:r>
+              <a:rPr kumimoji="0" lang="en-US" sz="2000" b="0" i="0" u="none" strike="noStrike" kern="1200" cap="none" spc="0" normalizeH="0" baseline="0" noProof="0" dirty="0">
+                <a:ln>
+                  <a:noFill/>
+                </a:ln>
+                <a:solidFill>
+                  <a:prstClr val="white"/>
+                </a:solidFill>
+                <a:effectLst/>
+                <a:uLnTx/>
+                <a:uFillTx/>
+                <a:latin typeface="Market_Deco"/>
+                <a:ea typeface="+mn-ea"/>
+                <a:cs typeface="+mn-cs"/>
+              </a:rPr>
+              <a:t>, </a:t>
+            </a:r>
+            <a:r>
+              <a:rPr kumimoji="0" lang="en-US" sz="2000" b="0" i="0" u="none" strike="noStrike" kern="1200" cap="none" spc="0" normalizeH="0" baseline="0" noProof="0" dirty="0" err="1">
+                <a:ln>
+                  <a:noFill/>
+                </a:ln>
+                <a:solidFill>
+                  <a:prstClr val="white"/>
+                </a:solidFill>
+                <a:effectLst/>
+                <a:uLnTx/>
+                <a:uFillTx/>
+                <a:latin typeface="Market_Deco"/>
+                <a:ea typeface="+mn-ea"/>
+                <a:cs typeface="+mn-cs"/>
+              </a:rPr>
+              <a:t>a.Title</a:t>
+            </a:r>
+            <a:r>
+              <a:rPr kumimoji="0" lang="en-US" sz="2000" b="0" i="0" u="none" strike="noStrike" kern="1200" cap="none" spc="0" normalizeH="0" baseline="0" noProof="0" dirty="0">
+                <a:ln>
+                  <a:noFill/>
+                </a:ln>
+                <a:solidFill>
+                  <a:prstClr val="white"/>
+                </a:solidFill>
+                <a:effectLst/>
+                <a:uLnTx/>
+                <a:uFillTx/>
+                <a:latin typeface="Market_Deco"/>
+                <a:ea typeface="+mn-ea"/>
+                <a:cs typeface="+mn-cs"/>
+              </a:rPr>
+              <a:t> AS </a:t>
+            </a:r>
+            <a:r>
+              <a:rPr kumimoji="0" lang="en-US" sz="2000" b="0" i="0" u="none" strike="noStrike" kern="1200" cap="none" spc="0" normalizeH="0" baseline="0" noProof="0" dirty="0" err="1">
+                <a:ln>
+                  <a:noFill/>
+                </a:ln>
+                <a:solidFill>
+                  <a:prstClr val="white"/>
+                </a:solidFill>
+                <a:effectLst/>
+                <a:uLnTx/>
+                <a:uFillTx/>
+                <a:latin typeface="Market_Deco"/>
+                <a:ea typeface="+mn-ea"/>
+                <a:cs typeface="+mn-cs"/>
+              </a:rPr>
+              <a:t>AlbumName</a:t>
+            </a:r>
+            <a:r>
+              <a:rPr kumimoji="0" lang="en-US" sz="2000" b="0" i="0" u="none" strike="noStrike" kern="1200" cap="none" spc="0" normalizeH="0" baseline="0" noProof="0" dirty="0">
+                <a:ln>
+                  <a:noFill/>
+                </a:ln>
+                <a:solidFill>
+                  <a:prstClr val="white"/>
+                </a:solidFill>
+                <a:effectLst/>
+                <a:uLnTx/>
+                <a:uFillTx/>
+                <a:latin typeface="Market_Deco"/>
+                <a:ea typeface="+mn-ea"/>
+                <a:cs typeface="+mn-cs"/>
+              </a:rPr>
+              <a:t>, </a:t>
+            </a:r>
+            <a:r>
+              <a:rPr kumimoji="0" lang="en-US" sz="2000" b="0" i="0" u="none" strike="noStrike" kern="1200" cap="none" spc="0" normalizeH="0" baseline="0" noProof="0" dirty="0" err="1">
+                <a:ln>
+                  <a:noFill/>
+                </a:ln>
+                <a:solidFill>
+                  <a:prstClr val="white"/>
+                </a:solidFill>
+                <a:effectLst/>
+                <a:uLnTx/>
+                <a:uFillTx/>
+                <a:latin typeface="Market_Deco"/>
+                <a:ea typeface="+mn-ea"/>
+                <a:cs typeface="+mn-cs"/>
+              </a:rPr>
+              <a:t>ar.Name</a:t>
+            </a:r>
+            <a:r>
+              <a:rPr kumimoji="0" lang="en-US" sz="2000" b="0" i="0" u="none" strike="noStrike" kern="1200" cap="none" spc="0" normalizeH="0" baseline="0" noProof="0" dirty="0">
+                <a:ln>
+                  <a:noFill/>
+                </a:ln>
+                <a:solidFill>
+                  <a:prstClr val="white"/>
+                </a:solidFill>
+                <a:effectLst/>
+                <a:uLnTx/>
+                <a:uFillTx/>
+                <a:latin typeface="Market_Deco"/>
+                <a:ea typeface="+mn-ea"/>
+                <a:cs typeface="+mn-cs"/>
+              </a:rPr>
+              <a:t> AS </a:t>
+            </a:r>
+            <a:r>
+              <a:rPr kumimoji="0" lang="en-US" sz="2000" b="0" i="0" u="none" strike="noStrike" kern="1200" cap="none" spc="0" normalizeH="0" baseline="0" noProof="0" dirty="0" err="1">
+                <a:ln>
+                  <a:noFill/>
+                </a:ln>
+                <a:solidFill>
+                  <a:prstClr val="white"/>
+                </a:solidFill>
+                <a:effectLst/>
+                <a:uLnTx/>
+                <a:uFillTx/>
+                <a:latin typeface="Market_Deco"/>
+                <a:ea typeface="+mn-ea"/>
+                <a:cs typeface="+mn-cs"/>
+              </a:rPr>
+              <a:t>ArtistName</a:t>
+            </a:r>
+            <a:r>
+              <a:rPr kumimoji="0" lang="en-US" sz="2000" b="0" i="0" u="none" strike="noStrike" kern="1200" cap="none" spc="0" normalizeH="0" baseline="0" noProof="0" dirty="0">
+                <a:ln>
+                  <a:noFill/>
+                </a:ln>
+                <a:solidFill>
+                  <a:prstClr val="white"/>
+                </a:solidFill>
+                <a:effectLst/>
+                <a:uLnTx/>
+                <a:uFillTx/>
+                <a:latin typeface="Market_Deco"/>
+                <a:ea typeface="+mn-ea"/>
+                <a:cs typeface="+mn-cs"/>
+              </a:rPr>
+              <a:t>, </a:t>
+            </a:r>
+            <a:r>
+              <a:rPr kumimoji="0" lang="en-US" sz="2000" b="0" i="0" u="none" strike="noStrike" kern="1200" cap="none" spc="0" normalizeH="0" baseline="0" noProof="0" dirty="0" err="1">
+                <a:ln>
+                  <a:noFill/>
+                </a:ln>
+                <a:solidFill>
+                  <a:prstClr val="white"/>
+                </a:solidFill>
+                <a:effectLst/>
+                <a:uLnTx/>
+                <a:uFillTx/>
+                <a:latin typeface="Market_Deco"/>
+                <a:ea typeface="+mn-ea"/>
+                <a:cs typeface="+mn-cs"/>
+              </a:rPr>
+              <a:t>i.InvoiceDate</a:t>
+            </a:r>
+            <a:endParaRPr kumimoji="0" lang="en-US" sz="2000" b="0" i="0" u="none" strike="noStrike" kern="1200" cap="none" spc="0" normalizeH="0" baseline="0" noProof="0" dirty="0">
+              <a:ln>
+                <a:noFill/>
+              </a:ln>
+              <a:solidFill>
+                <a:prstClr val="white"/>
+              </a:solidFill>
+              <a:effectLst/>
+              <a:uLnTx/>
+              <a:uFillTx/>
+              <a:latin typeface="Market_Deco"/>
+              <a:ea typeface="+mn-ea"/>
+              <a:cs typeface="+mn-cs"/>
+            </a:endParaRPr>
+          </a:p>
+          <a:p>
+            <a:pPr marL="0" marR="0" lvl="0" indent="0" algn="l" defTabSz="914400" rtl="0" eaLnBrk="1" fontAlgn="auto" latinLnBrk="0" hangingPunct="1">
+              <a:lnSpc>
+                <a:spcPct val="100000"/>
+              </a:lnSpc>
+              <a:spcBef>
+                <a:spcPts val="0"/>
+              </a:spcBef>
+              <a:spcAft>
+                <a:spcPts val="0"/>
+              </a:spcAft>
+              <a:buClrTx/>
+              <a:buSzTx/>
+              <a:buFontTx/>
+              <a:buNone/>
+              <a:tabLst/>
+              <a:defRPr/>
+            </a:pPr>
+            <a:r>
+              <a:rPr kumimoji="0" lang="en-US" sz="2000" b="0" i="0" u="none" strike="noStrike" kern="1200" cap="none" spc="0" normalizeH="0" baseline="0" noProof="0" dirty="0">
+                <a:ln>
+                  <a:noFill/>
+                </a:ln>
+                <a:solidFill>
+                  <a:prstClr val="white"/>
+                </a:solidFill>
+                <a:effectLst/>
+                <a:uLnTx/>
+                <a:uFillTx/>
+                <a:latin typeface="Market_Deco"/>
+                <a:ea typeface="+mn-ea"/>
+                <a:cs typeface="+mn-cs"/>
+              </a:rPr>
+              <a:t>FROM Customer AS c</a:t>
+            </a:r>
+          </a:p>
+          <a:p>
+            <a:pPr marL="0" marR="0" lvl="0" indent="0" algn="l" defTabSz="914400" rtl="0" eaLnBrk="1" fontAlgn="auto" latinLnBrk="0" hangingPunct="1">
+              <a:lnSpc>
+                <a:spcPct val="100000"/>
+              </a:lnSpc>
+              <a:spcBef>
+                <a:spcPts val="0"/>
+              </a:spcBef>
+              <a:spcAft>
+                <a:spcPts val="0"/>
+              </a:spcAft>
+              <a:buClrTx/>
+              <a:buSzTx/>
+              <a:buFontTx/>
+              <a:buNone/>
+              <a:tabLst/>
+              <a:defRPr/>
+            </a:pPr>
+            <a:r>
+              <a:rPr kumimoji="0" lang="en-US" sz="2000" b="0" i="0" u="none" strike="noStrike" kern="1200" cap="none" spc="0" normalizeH="0" baseline="0" noProof="0" dirty="0">
+                <a:ln>
+                  <a:noFill/>
+                </a:ln>
+                <a:solidFill>
+                  <a:prstClr val="white"/>
+                </a:solidFill>
+                <a:effectLst/>
+                <a:uLnTx/>
+                <a:uFillTx/>
+                <a:latin typeface="Market_Deco"/>
+                <a:ea typeface="+mn-ea"/>
+                <a:cs typeface="+mn-cs"/>
+              </a:rPr>
+              <a:t>      INNER JOIN Invoice AS i ON </a:t>
+            </a:r>
+            <a:r>
+              <a:rPr kumimoji="0" lang="en-US" sz="2000" b="0" i="0" u="none" strike="noStrike" kern="1200" cap="none" spc="0" normalizeH="0" baseline="0" noProof="0" dirty="0" err="1">
+                <a:ln>
+                  <a:noFill/>
+                </a:ln>
+                <a:solidFill>
+                  <a:prstClr val="white"/>
+                </a:solidFill>
+                <a:effectLst/>
+                <a:uLnTx/>
+                <a:uFillTx/>
+                <a:latin typeface="Market_Deco"/>
+                <a:ea typeface="+mn-ea"/>
+                <a:cs typeface="+mn-cs"/>
+              </a:rPr>
+              <a:t>c.CustomerId</a:t>
+            </a:r>
+            <a:r>
+              <a:rPr kumimoji="0" lang="en-US" sz="2000" b="0" i="0" u="none" strike="noStrike" kern="1200" cap="none" spc="0" normalizeH="0" baseline="0" noProof="0" dirty="0">
+                <a:ln>
+                  <a:noFill/>
+                </a:ln>
+                <a:solidFill>
+                  <a:prstClr val="white"/>
+                </a:solidFill>
+                <a:effectLst/>
+                <a:uLnTx/>
+                <a:uFillTx/>
+                <a:latin typeface="Market_Deco"/>
+                <a:ea typeface="+mn-ea"/>
+                <a:cs typeface="+mn-cs"/>
+              </a:rPr>
+              <a:t> = </a:t>
+            </a:r>
+            <a:r>
+              <a:rPr kumimoji="0" lang="en-US" sz="2000" b="0" i="0" u="none" strike="noStrike" kern="1200" cap="none" spc="0" normalizeH="0" baseline="0" noProof="0" dirty="0" err="1">
+                <a:ln>
+                  <a:noFill/>
+                </a:ln>
+                <a:solidFill>
+                  <a:prstClr val="white"/>
+                </a:solidFill>
+                <a:effectLst/>
+                <a:uLnTx/>
+                <a:uFillTx/>
+                <a:latin typeface="Market_Deco"/>
+                <a:ea typeface="+mn-ea"/>
+                <a:cs typeface="+mn-cs"/>
+              </a:rPr>
+              <a:t>i.CustomerId</a:t>
+            </a:r>
+            <a:endParaRPr kumimoji="0" lang="en-US" sz="2000" b="0" i="0" u="none" strike="noStrike" kern="1200" cap="none" spc="0" normalizeH="0" baseline="0" noProof="0" dirty="0">
+              <a:ln>
+                <a:noFill/>
+              </a:ln>
+              <a:solidFill>
+                <a:prstClr val="white"/>
+              </a:solidFill>
+              <a:effectLst/>
+              <a:uLnTx/>
+              <a:uFillTx/>
+              <a:latin typeface="Market_Deco"/>
+              <a:ea typeface="+mn-ea"/>
+              <a:cs typeface="+mn-cs"/>
+            </a:endParaRPr>
+          </a:p>
+          <a:p>
+            <a:pPr marL="0" marR="0" lvl="0" indent="0" algn="l" defTabSz="914400" rtl="0" eaLnBrk="1" fontAlgn="auto" latinLnBrk="0" hangingPunct="1">
+              <a:lnSpc>
+                <a:spcPct val="100000"/>
+              </a:lnSpc>
+              <a:spcBef>
+                <a:spcPts val="0"/>
+              </a:spcBef>
+              <a:spcAft>
+                <a:spcPts val="0"/>
+              </a:spcAft>
+              <a:buClrTx/>
+              <a:buSzTx/>
+              <a:buFontTx/>
+              <a:buNone/>
+              <a:tabLst/>
+              <a:defRPr/>
+            </a:pPr>
+            <a:r>
+              <a:rPr kumimoji="0" lang="en-US" sz="2000" b="0" i="0" u="none" strike="noStrike" kern="1200" cap="none" spc="0" normalizeH="0" baseline="0" noProof="0" dirty="0">
+                <a:ln>
+                  <a:noFill/>
+                </a:ln>
+                <a:solidFill>
+                  <a:prstClr val="white"/>
+                </a:solidFill>
+                <a:effectLst/>
+                <a:uLnTx/>
+                <a:uFillTx/>
+                <a:latin typeface="Market_Deco"/>
+                <a:ea typeface="+mn-ea"/>
+                <a:cs typeface="+mn-cs"/>
+              </a:rPr>
+              <a:t>      INNER JOIN </a:t>
+            </a:r>
+            <a:r>
+              <a:rPr kumimoji="0" lang="en-US" sz="2000" b="0" i="0" u="none" strike="noStrike" kern="1200" cap="none" spc="0" normalizeH="0" baseline="0" noProof="0" dirty="0" err="1">
+                <a:ln>
+                  <a:noFill/>
+                </a:ln>
+                <a:solidFill>
+                  <a:prstClr val="white"/>
+                </a:solidFill>
+                <a:effectLst/>
+                <a:uLnTx/>
+                <a:uFillTx/>
+                <a:latin typeface="Market_Deco"/>
+                <a:ea typeface="+mn-ea"/>
+                <a:cs typeface="+mn-cs"/>
+              </a:rPr>
+              <a:t>InvoiceLine</a:t>
+            </a:r>
+            <a:r>
+              <a:rPr kumimoji="0" lang="en-US" sz="2000" b="0" i="0" u="none" strike="noStrike" kern="1200" cap="none" spc="0" normalizeH="0" baseline="0" noProof="0" dirty="0">
+                <a:ln>
+                  <a:noFill/>
+                </a:ln>
+                <a:solidFill>
+                  <a:prstClr val="white"/>
+                </a:solidFill>
+                <a:effectLst/>
+                <a:uLnTx/>
+                <a:uFillTx/>
+                <a:latin typeface="Market_Deco"/>
+                <a:ea typeface="+mn-ea"/>
+                <a:cs typeface="+mn-cs"/>
+              </a:rPr>
+              <a:t> AS </a:t>
+            </a:r>
+            <a:r>
+              <a:rPr kumimoji="0" lang="en-US" sz="2000" b="0" i="0" u="none" strike="noStrike" kern="1200" cap="none" spc="0" normalizeH="0" baseline="0" noProof="0" dirty="0" err="1">
+                <a:ln>
+                  <a:noFill/>
+                </a:ln>
+                <a:solidFill>
+                  <a:prstClr val="white"/>
+                </a:solidFill>
+                <a:effectLst/>
+                <a:uLnTx/>
+                <a:uFillTx/>
+                <a:latin typeface="Market_Deco"/>
+                <a:ea typeface="+mn-ea"/>
+                <a:cs typeface="+mn-cs"/>
+              </a:rPr>
+              <a:t>il</a:t>
+            </a:r>
+            <a:r>
+              <a:rPr kumimoji="0" lang="en-US" sz="2000" b="0" i="0" u="none" strike="noStrike" kern="1200" cap="none" spc="0" normalizeH="0" baseline="0" noProof="0" dirty="0">
+                <a:ln>
+                  <a:noFill/>
+                </a:ln>
+                <a:solidFill>
+                  <a:prstClr val="white"/>
+                </a:solidFill>
+                <a:effectLst/>
+                <a:uLnTx/>
+                <a:uFillTx/>
+                <a:latin typeface="Market_Deco"/>
+                <a:ea typeface="+mn-ea"/>
+                <a:cs typeface="+mn-cs"/>
+              </a:rPr>
+              <a:t> ON </a:t>
+            </a:r>
+            <a:r>
+              <a:rPr kumimoji="0" lang="en-US" sz="2000" b="0" i="0" u="none" strike="noStrike" kern="1200" cap="none" spc="0" normalizeH="0" baseline="0" noProof="0" dirty="0" err="1">
+                <a:ln>
+                  <a:noFill/>
+                </a:ln>
+                <a:solidFill>
+                  <a:prstClr val="white"/>
+                </a:solidFill>
+                <a:effectLst/>
+                <a:uLnTx/>
+                <a:uFillTx/>
+                <a:latin typeface="Market_Deco"/>
+                <a:ea typeface="+mn-ea"/>
+                <a:cs typeface="+mn-cs"/>
+              </a:rPr>
+              <a:t>i.InvoiceId</a:t>
+            </a:r>
+            <a:r>
+              <a:rPr kumimoji="0" lang="en-US" sz="2000" b="0" i="0" u="none" strike="noStrike" kern="1200" cap="none" spc="0" normalizeH="0" baseline="0" noProof="0" dirty="0">
+                <a:ln>
+                  <a:noFill/>
+                </a:ln>
+                <a:solidFill>
+                  <a:prstClr val="white"/>
+                </a:solidFill>
+                <a:effectLst/>
+                <a:uLnTx/>
+                <a:uFillTx/>
+                <a:latin typeface="Market_Deco"/>
+                <a:ea typeface="+mn-ea"/>
+                <a:cs typeface="+mn-cs"/>
+              </a:rPr>
+              <a:t> = </a:t>
+            </a:r>
+            <a:r>
+              <a:rPr kumimoji="0" lang="en-US" sz="2000" b="0" i="0" u="none" strike="noStrike" kern="1200" cap="none" spc="0" normalizeH="0" baseline="0" noProof="0" dirty="0" err="1">
+                <a:ln>
+                  <a:noFill/>
+                </a:ln>
+                <a:solidFill>
+                  <a:prstClr val="white"/>
+                </a:solidFill>
+                <a:effectLst/>
+                <a:uLnTx/>
+                <a:uFillTx/>
+                <a:latin typeface="Market_Deco"/>
+                <a:ea typeface="+mn-ea"/>
+                <a:cs typeface="+mn-cs"/>
+              </a:rPr>
+              <a:t>il.InvoiceId</a:t>
+            </a:r>
+            <a:endParaRPr kumimoji="0" lang="en-US" sz="2000" b="0" i="0" u="none" strike="noStrike" kern="1200" cap="none" spc="0" normalizeH="0" baseline="0" noProof="0" dirty="0">
+              <a:ln>
+                <a:noFill/>
+              </a:ln>
+              <a:solidFill>
+                <a:prstClr val="white"/>
+              </a:solidFill>
+              <a:effectLst/>
+              <a:uLnTx/>
+              <a:uFillTx/>
+              <a:latin typeface="Market_Deco"/>
+              <a:ea typeface="+mn-ea"/>
+              <a:cs typeface="+mn-cs"/>
+            </a:endParaRPr>
+          </a:p>
+          <a:p>
+            <a:pPr marL="0" marR="0" lvl="0" indent="0" algn="l" defTabSz="914400" rtl="0" eaLnBrk="1" fontAlgn="auto" latinLnBrk="0" hangingPunct="1">
+              <a:lnSpc>
+                <a:spcPct val="100000"/>
+              </a:lnSpc>
+              <a:spcBef>
+                <a:spcPts val="0"/>
+              </a:spcBef>
+              <a:spcAft>
+                <a:spcPts val="0"/>
+              </a:spcAft>
+              <a:buClrTx/>
+              <a:buSzTx/>
+              <a:buFontTx/>
+              <a:buNone/>
+              <a:tabLst/>
+              <a:defRPr/>
+            </a:pPr>
+            <a:r>
+              <a:rPr kumimoji="0" lang="en-US" sz="2000" b="0" i="0" u="none" strike="noStrike" kern="1200" cap="none" spc="0" normalizeH="0" baseline="0" noProof="0" dirty="0">
+                <a:ln>
+                  <a:noFill/>
+                </a:ln>
+                <a:solidFill>
+                  <a:prstClr val="white"/>
+                </a:solidFill>
+                <a:effectLst/>
+                <a:uLnTx/>
+                <a:uFillTx/>
+                <a:latin typeface="Market_Deco"/>
+                <a:ea typeface="+mn-ea"/>
+                <a:cs typeface="+mn-cs"/>
+              </a:rPr>
+              <a:t>      INNER JOIN Track AS t ON </a:t>
+            </a:r>
+            <a:r>
+              <a:rPr kumimoji="0" lang="en-US" sz="2000" b="0" i="0" u="none" strike="noStrike" kern="1200" cap="none" spc="0" normalizeH="0" baseline="0" noProof="0" dirty="0" err="1">
+                <a:ln>
+                  <a:noFill/>
+                </a:ln>
+                <a:solidFill>
+                  <a:prstClr val="white"/>
+                </a:solidFill>
+                <a:effectLst/>
+                <a:uLnTx/>
+                <a:uFillTx/>
+                <a:latin typeface="Market_Deco"/>
+                <a:ea typeface="+mn-ea"/>
+                <a:cs typeface="+mn-cs"/>
+              </a:rPr>
+              <a:t>il.TrackId</a:t>
+            </a:r>
+            <a:r>
+              <a:rPr kumimoji="0" lang="en-US" sz="2000" b="0" i="0" u="none" strike="noStrike" kern="1200" cap="none" spc="0" normalizeH="0" baseline="0" noProof="0" dirty="0">
+                <a:ln>
+                  <a:noFill/>
+                </a:ln>
+                <a:solidFill>
+                  <a:prstClr val="white"/>
+                </a:solidFill>
+                <a:effectLst/>
+                <a:uLnTx/>
+                <a:uFillTx/>
+                <a:latin typeface="Market_Deco"/>
+                <a:ea typeface="+mn-ea"/>
+                <a:cs typeface="+mn-cs"/>
+              </a:rPr>
+              <a:t> = </a:t>
+            </a:r>
+            <a:r>
+              <a:rPr kumimoji="0" lang="en-US" sz="2000" b="0" i="0" u="none" strike="noStrike" kern="1200" cap="none" spc="0" normalizeH="0" baseline="0" noProof="0" dirty="0" err="1">
+                <a:ln>
+                  <a:noFill/>
+                </a:ln>
+                <a:solidFill>
+                  <a:prstClr val="white"/>
+                </a:solidFill>
+                <a:effectLst/>
+                <a:uLnTx/>
+                <a:uFillTx/>
+                <a:latin typeface="Market_Deco"/>
+                <a:ea typeface="+mn-ea"/>
+                <a:cs typeface="+mn-cs"/>
+              </a:rPr>
+              <a:t>t.TrackId</a:t>
+            </a:r>
+            <a:endParaRPr kumimoji="0" lang="en-US" sz="2000" b="0" i="0" u="none" strike="noStrike" kern="1200" cap="none" spc="0" normalizeH="0" baseline="0" noProof="0" dirty="0">
+              <a:ln>
+                <a:noFill/>
+              </a:ln>
+              <a:solidFill>
+                <a:prstClr val="white"/>
+              </a:solidFill>
+              <a:effectLst/>
+              <a:uLnTx/>
+              <a:uFillTx/>
+              <a:latin typeface="Market_Deco"/>
+              <a:ea typeface="+mn-ea"/>
+              <a:cs typeface="+mn-cs"/>
+            </a:endParaRPr>
+          </a:p>
+          <a:p>
+            <a:pPr marL="0" marR="0" lvl="0" indent="0" algn="l" defTabSz="914400" rtl="0" eaLnBrk="1" fontAlgn="auto" latinLnBrk="0" hangingPunct="1">
+              <a:lnSpc>
+                <a:spcPct val="100000"/>
+              </a:lnSpc>
+              <a:spcBef>
+                <a:spcPts val="0"/>
+              </a:spcBef>
+              <a:spcAft>
+                <a:spcPts val="0"/>
+              </a:spcAft>
+              <a:buClrTx/>
+              <a:buSzTx/>
+              <a:buFontTx/>
+              <a:buNone/>
+              <a:tabLst/>
+              <a:defRPr/>
+            </a:pPr>
+            <a:r>
+              <a:rPr kumimoji="0" lang="en-US" sz="2000" b="0" i="0" u="none" strike="noStrike" kern="1200" cap="none" spc="0" normalizeH="0" baseline="0" noProof="0" dirty="0">
+                <a:ln>
+                  <a:noFill/>
+                </a:ln>
+                <a:solidFill>
+                  <a:prstClr val="white"/>
+                </a:solidFill>
+                <a:effectLst/>
+                <a:uLnTx/>
+                <a:uFillTx/>
+                <a:latin typeface="Market_Deco"/>
+                <a:ea typeface="+mn-ea"/>
+                <a:cs typeface="+mn-cs"/>
+              </a:rPr>
+              <a:t>      INNER JOIN Album AS a ON </a:t>
+            </a:r>
+            <a:r>
+              <a:rPr kumimoji="0" lang="en-US" sz="2000" b="0" i="0" u="none" strike="noStrike" kern="1200" cap="none" spc="0" normalizeH="0" baseline="0" noProof="0" dirty="0" err="1">
+                <a:ln>
+                  <a:noFill/>
+                </a:ln>
+                <a:solidFill>
+                  <a:prstClr val="white"/>
+                </a:solidFill>
+                <a:effectLst/>
+                <a:uLnTx/>
+                <a:uFillTx/>
+                <a:latin typeface="Market_Deco"/>
+                <a:ea typeface="+mn-ea"/>
+                <a:cs typeface="+mn-cs"/>
+              </a:rPr>
+              <a:t>t.AlbumId</a:t>
+            </a:r>
+            <a:r>
+              <a:rPr kumimoji="0" lang="en-US" sz="2000" b="0" i="0" u="none" strike="noStrike" kern="1200" cap="none" spc="0" normalizeH="0" baseline="0" noProof="0" dirty="0">
+                <a:ln>
+                  <a:noFill/>
+                </a:ln>
+                <a:solidFill>
+                  <a:prstClr val="white"/>
+                </a:solidFill>
+                <a:effectLst/>
+                <a:uLnTx/>
+                <a:uFillTx/>
+                <a:latin typeface="Market_Deco"/>
+                <a:ea typeface="+mn-ea"/>
+                <a:cs typeface="+mn-cs"/>
+              </a:rPr>
+              <a:t> = </a:t>
+            </a:r>
+            <a:r>
+              <a:rPr kumimoji="0" lang="en-US" sz="2000" b="0" i="0" u="none" strike="noStrike" kern="1200" cap="none" spc="0" normalizeH="0" baseline="0" noProof="0" dirty="0" err="1">
+                <a:ln>
+                  <a:noFill/>
+                </a:ln>
+                <a:solidFill>
+                  <a:prstClr val="white"/>
+                </a:solidFill>
+                <a:effectLst/>
+                <a:uLnTx/>
+                <a:uFillTx/>
+                <a:latin typeface="Market_Deco"/>
+                <a:ea typeface="+mn-ea"/>
+                <a:cs typeface="+mn-cs"/>
+              </a:rPr>
+              <a:t>a.AlbumId</a:t>
+            </a:r>
+            <a:endParaRPr kumimoji="0" lang="en-US" sz="2000" b="0" i="0" u="none" strike="noStrike" kern="1200" cap="none" spc="0" normalizeH="0" baseline="0" noProof="0" dirty="0">
+              <a:ln>
+                <a:noFill/>
+              </a:ln>
+              <a:solidFill>
+                <a:prstClr val="white"/>
+              </a:solidFill>
+              <a:effectLst/>
+              <a:uLnTx/>
+              <a:uFillTx/>
+              <a:latin typeface="Market_Deco"/>
+              <a:ea typeface="+mn-ea"/>
+              <a:cs typeface="+mn-cs"/>
+            </a:endParaRPr>
+          </a:p>
+          <a:p>
+            <a:pPr marL="0" marR="0" lvl="0" indent="0" algn="l" defTabSz="914400" rtl="0" eaLnBrk="1" fontAlgn="auto" latinLnBrk="0" hangingPunct="1">
+              <a:lnSpc>
+                <a:spcPct val="100000"/>
+              </a:lnSpc>
+              <a:spcBef>
+                <a:spcPts val="0"/>
+              </a:spcBef>
+              <a:spcAft>
+                <a:spcPts val="0"/>
+              </a:spcAft>
+              <a:buClrTx/>
+              <a:buSzTx/>
+              <a:buFontTx/>
+              <a:buNone/>
+              <a:tabLst/>
+              <a:defRPr/>
+            </a:pPr>
+            <a:r>
+              <a:rPr kumimoji="0" lang="en-US" sz="2000" b="0" i="0" u="none" strike="noStrike" kern="1200" cap="none" spc="0" normalizeH="0" baseline="0" noProof="0" dirty="0">
+                <a:ln>
+                  <a:noFill/>
+                </a:ln>
+                <a:solidFill>
+                  <a:prstClr val="white"/>
+                </a:solidFill>
+                <a:effectLst/>
+                <a:uLnTx/>
+                <a:uFillTx/>
+                <a:latin typeface="Market_Deco"/>
+                <a:ea typeface="+mn-ea"/>
+                <a:cs typeface="+mn-cs"/>
+              </a:rPr>
+              <a:t>      INNER JOIN Artist AS </a:t>
+            </a:r>
+            <a:r>
+              <a:rPr kumimoji="0" lang="en-US" sz="2000" b="0" i="0" u="none" strike="noStrike" kern="1200" cap="none" spc="0" normalizeH="0" baseline="0" noProof="0" dirty="0" err="1">
+                <a:ln>
+                  <a:noFill/>
+                </a:ln>
+                <a:solidFill>
+                  <a:prstClr val="white"/>
+                </a:solidFill>
+                <a:effectLst/>
+                <a:uLnTx/>
+                <a:uFillTx/>
+                <a:latin typeface="Market_Deco"/>
+                <a:ea typeface="+mn-ea"/>
+                <a:cs typeface="+mn-cs"/>
+              </a:rPr>
+              <a:t>ar</a:t>
+            </a:r>
+            <a:r>
+              <a:rPr kumimoji="0" lang="en-US" sz="2000" b="0" i="0" u="none" strike="noStrike" kern="1200" cap="none" spc="0" normalizeH="0" baseline="0" noProof="0" dirty="0">
+                <a:ln>
+                  <a:noFill/>
+                </a:ln>
+                <a:solidFill>
+                  <a:prstClr val="white"/>
+                </a:solidFill>
+                <a:effectLst/>
+                <a:uLnTx/>
+                <a:uFillTx/>
+                <a:latin typeface="Market_Deco"/>
+                <a:ea typeface="+mn-ea"/>
+                <a:cs typeface="+mn-cs"/>
+              </a:rPr>
+              <a:t> ON </a:t>
+            </a:r>
+            <a:r>
+              <a:rPr kumimoji="0" lang="en-US" sz="2000" b="0" i="0" u="none" strike="noStrike" kern="1200" cap="none" spc="0" normalizeH="0" baseline="0" noProof="0" dirty="0" err="1">
+                <a:ln>
+                  <a:noFill/>
+                </a:ln>
+                <a:solidFill>
+                  <a:prstClr val="white"/>
+                </a:solidFill>
+                <a:effectLst/>
+                <a:uLnTx/>
+                <a:uFillTx/>
+                <a:latin typeface="Market_Deco"/>
+                <a:ea typeface="+mn-ea"/>
+                <a:cs typeface="+mn-cs"/>
+              </a:rPr>
+              <a:t>a.ArtistId</a:t>
+            </a:r>
+            <a:r>
+              <a:rPr kumimoji="0" lang="en-US" sz="2000" b="0" i="0" u="none" strike="noStrike" kern="1200" cap="none" spc="0" normalizeH="0" baseline="0" noProof="0" dirty="0">
+                <a:ln>
+                  <a:noFill/>
+                </a:ln>
+                <a:solidFill>
+                  <a:prstClr val="white"/>
+                </a:solidFill>
+                <a:effectLst/>
+                <a:uLnTx/>
+                <a:uFillTx/>
+                <a:latin typeface="Market_Deco"/>
+                <a:ea typeface="+mn-ea"/>
+                <a:cs typeface="+mn-cs"/>
+              </a:rPr>
+              <a:t> = </a:t>
+            </a:r>
+            <a:r>
+              <a:rPr kumimoji="0" lang="en-US" sz="2000" b="0" i="0" u="none" strike="noStrike" kern="1200" cap="none" spc="0" normalizeH="0" baseline="0" noProof="0" dirty="0" err="1">
+                <a:ln>
+                  <a:noFill/>
+                </a:ln>
+                <a:solidFill>
+                  <a:prstClr val="white"/>
+                </a:solidFill>
+                <a:effectLst/>
+                <a:uLnTx/>
+                <a:uFillTx/>
+                <a:latin typeface="Market_Deco"/>
+                <a:ea typeface="+mn-ea"/>
+                <a:cs typeface="+mn-cs"/>
+              </a:rPr>
+              <a:t>ar.ArtistId</a:t>
+            </a:r>
+            <a:endParaRPr kumimoji="0" lang="en-US" sz="2000" b="0" i="0" u="none" strike="noStrike" kern="1200" cap="none" spc="0" normalizeH="0" baseline="0" noProof="0" dirty="0">
+              <a:ln>
+                <a:noFill/>
+              </a:ln>
+              <a:solidFill>
+                <a:prstClr val="white"/>
+              </a:solidFill>
+              <a:effectLst/>
+              <a:uLnTx/>
+              <a:uFillTx/>
+              <a:latin typeface="Market_Deco"/>
+              <a:ea typeface="+mn-ea"/>
+              <a:cs typeface="+mn-cs"/>
+            </a:endParaRPr>
+          </a:p>
+          <a:p>
+            <a:pPr marL="0" marR="0" lvl="0" indent="0" algn="l" defTabSz="914400" rtl="0" eaLnBrk="1" fontAlgn="auto" latinLnBrk="0" hangingPunct="1">
+              <a:lnSpc>
+                <a:spcPct val="100000"/>
+              </a:lnSpc>
+              <a:spcBef>
+                <a:spcPts val="0"/>
+              </a:spcBef>
+              <a:spcAft>
+                <a:spcPts val="0"/>
+              </a:spcAft>
+              <a:buClrTx/>
+              <a:buSzTx/>
+              <a:buFontTx/>
+              <a:buNone/>
+              <a:tabLst/>
+              <a:defRPr/>
+            </a:pPr>
+            <a:r>
+              <a:rPr kumimoji="0" lang="en-US" sz="2000" b="0" i="0" u="none" strike="noStrike" kern="1200" cap="none" spc="0" normalizeH="0" baseline="0" noProof="0" dirty="0">
+                <a:ln>
+                  <a:noFill/>
+                </a:ln>
+                <a:solidFill>
+                  <a:prstClr val="white"/>
+                </a:solidFill>
+                <a:effectLst/>
+                <a:uLnTx/>
+                <a:uFillTx/>
+                <a:latin typeface="Market_Deco"/>
+                <a:ea typeface="+mn-ea"/>
+                <a:cs typeface="+mn-cs"/>
+              </a:rPr>
+              <a:t>WHERE </a:t>
+            </a:r>
+            <a:r>
+              <a:rPr kumimoji="0" lang="en-US" sz="2000" b="0" i="0" u="none" strike="noStrike" kern="1200" cap="none" spc="0" normalizeH="0" baseline="0" noProof="0" dirty="0" err="1">
+                <a:ln>
+                  <a:noFill/>
+                </a:ln>
+                <a:solidFill>
+                  <a:prstClr val="white"/>
+                </a:solidFill>
+                <a:effectLst/>
+                <a:uLnTx/>
+                <a:uFillTx/>
+                <a:latin typeface="Market_Deco"/>
+                <a:ea typeface="+mn-ea"/>
+                <a:cs typeface="+mn-cs"/>
+              </a:rPr>
+              <a:t>c.CustomerId</a:t>
+            </a:r>
+            <a:r>
+              <a:rPr kumimoji="0" lang="en-US" sz="2000" b="0" i="0" u="none" strike="noStrike" kern="1200" cap="none" spc="0" normalizeH="0" baseline="0" noProof="0" dirty="0">
+                <a:ln>
+                  <a:noFill/>
+                </a:ln>
+                <a:solidFill>
+                  <a:prstClr val="white"/>
+                </a:solidFill>
+                <a:effectLst/>
+                <a:uLnTx/>
+                <a:uFillTx/>
+                <a:latin typeface="Market_Deco"/>
+                <a:ea typeface="+mn-ea"/>
+                <a:cs typeface="+mn-cs"/>
+              </a:rPr>
+              <a:t> = 2</a:t>
+            </a:r>
+          </a:p>
+          <a:p>
+            <a:pPr marL="0" marR="0" lvl="0" indent="0" algn="l" defTabSz="914400" rtl="0" eaLnBrk="1" fontAlgn="auto" latinLnBrk="0" hangingPunct="1">
+              <a:lnSpc>
+                <a:spcPct val="100000"/>
+              </a:lnSpc>
+              <a:spcBef>
+                <a:spcPts val="0"/>
+              </a:spcBef>
+              <a:spcAft>
+                <a:spcPts val="0"/>
+              </a:spcAft>
+              <a:buClrTx/>
+              <a:buSzTx/>
+              <a:buFontTx/>
+              <a:buNone/>
+              <a:tabLst/>
+              <a:defRPr/>
+            </a:pPr>
+            <a:r>
+              <a:rPr kumimoji="0" lang="en-US" sz="2000" b="0" i="0" u="none" strike="noStrike" kern="1200" cap="none" spc="0" normalizeH="0" baseline="0" noProof="0" dirty="0">
+                <a:ln>
+                  <a:noFill/>
+                </a:ln>
+                <a:solidFill>
+                  <a:prstClr val="white"/>
+                </a:solidFill>
+                <a:effectLst/>
+                <a:uLnTx/>
+                <a:uFillTx/>
+                <a:latin typeface="Market_Deco"/>
+                <a:ea typeface="+mn-ea"/>
+                <a:cs typeface="+mn-cs"/>
+              </a:rPr>
+              <a:t>ORDER BY </a:t>
+            </a:r>
+            <a:r>
+              <a:rPr kumimoji="0" lang="en-US" sz="2000" b="0" i="0" u="none" strike="noStrike" kern="1200" cap="none" spc="0" normalizeH="0" baseline="0" noProof="0" dirty="0" err="1">
+                <a:ln>
+                  <a:noFill/>
+                </a:ln>
+                <a:solidFill>
+                  <a:prstClr val="white"/>
+                </a:solidFill>
+                <a:effectLst/>
+                <a:uLnTx/>
+                <a:uFillTx/>
+                <a:latin typeface="Market_Deco"/>
+                <a:ea typeface="+mn-ea"/>
+                <a:cs typeface="+mn-cs"/>
+              </a:rPr>
+              <a:t>AlbumName</a:t>
+            </a:r>
+            <a:endParaRPr kumimoji="0" lang="en-US" sz="2000" b="0" i="0" u="none" strike="noStrike" kern="1200" cap="none" spc="0" normalizeH="0" baseline="0" noProof="0" dirty="0">
+              <a:ln>
+                <a:noFill/>
+              </a:ln>
+              <a:solidFill>
+                <a:prstClr val="white"/>
+              </a:solidFill>
+              <a:effectLst/>
+              <a:uLnTx/>
+              <a:uFillTx/>
+              <a:latin typeface="Market_Deco"/>
+              <a:ea typeface="+mn-ea"/>
+              <a:cs typeface="+mn-cs"/>
+            </a:endParaRPr>
+          </a:p>
+        </p:txBody>
+      </p:sp>
+      <p:pic>
+        <p:nvPicPr>
+          <p:cNvPr id="5" name="Picture 4">
+            <a:extLst>
+              <a:ext uri="{FF2B5EF4-FFF2-40B4-BE49-F238E27FC236}">
+                <a16:creationId xmlns:a16="http://schemas.microsoft.com/office/drawing/2014/main" id="{8F652891-5548-4C5A-9974-960130898C92}"/>
+              </a:ext>
+            </a:extLst>
+          </p:cNvPr>
+          <p:cNvPicPr>
+            <a:picLocks noChangeAspect="1"/>
+          </p:cNvPicPr>
+          <p:nvPr/>
+        </p:nvPicPr>
+        <p:blipFill>
+          <a:blip r:embed="rId2">
+            <a:extLst>
+              <a:ext uri="{28A0092B-C50C-407E-A947-70E740481C1C}">
+                <a14:useLocalDpi xmlns:a14="http://schemas.microsoft.com/office/drawing/2010/main" val="0"/>
+              </a:ext>
+            </a:extLst>
+          </a:blip>
+          <a:stretch>
+            <a:fillRect/>
+          </a:stretch>
+        </p:blipFill>
+        <p:spPr>
+          <a:xfrm>
+            <a:off x="0" y="3724888"/>
+            <a:ext cx="12192000" cy="2594935"/>
+          </a:xfrm>
+          <a:prstGeom prst="rect">
+            <a:avLst/>
+          </a:prstGeom>
+        </p:spPr>
+      </p:pic>
+    </p:spTree>
+    <p:extLst>
+      <p:ext uri="{BB962C8B-B14F-4D97-AF65-F5344CB8AC3E}">
+        <p14:creationId xmlns:p14="http://schemas.microsoft.com/office/powerpoint/2010/main" val="2452896425"/>
+      </p:ext>
+    </p:extLst>
+  </p:cSld>
+  <p:clrMapOvr>
+    <a:masterClrMapping/>
+  </p:clrMapOvr>
+</p:sld>
+</file>
+
+<file path=ppt/slides/slide37.xml><?xml version="1.0" encoding="utf-8"?>
+<p:sld xmlns:a="http://schemas.openxmlformats.org/drawingml/2006/main" xmlns:r="http://schemas.openxmlformats.org/officeDocument/2006/relationships" xmlns:p="http://schemas.openxmlformats.org/presentationml/2006/main">
+  <p:cSld>
+    <p:bg>
+      <p:bgPr>
+        <a:solidFill>
+          <a:schemeClr val="tx1"/>
+        </a:solidFill>
+        <a:effectLst/>
+      </p:bgPr>
+    </p:bg>
+    <p:spTree>
+      <p:nvGrpSpPr>
+        <p:cNvPr id="1" name=""/>
+        <p:cNvGrpSpPr/>
+        <p:nvPr/>
+      </p:nvGrpSpPr>
+      <p:grpSpPr>
+        <a:xfrm>
+          <a:off x="0" y="0"/>
+          <a:ext cx="0" cy="0"/>
+          <a:chOff x="0" y="0"/>
+          <a:chExt cx="0" cy="0"/>
+        </a:xfrm>
+      </p:grpSpPr>
+      <p:sp>
+        <p:nvSpPr>
+          <p:cNvPr id="2" name="Rectangle 1">
+            <a:extLst>
+              <a:ext uri="{FF2B5EF4-FFF2-40B4-BE49-F238E27FC236}">
+                <a16:creationId xmlns:a16="http://schemas.microsoft.com/office/drawing/2014/main" id="{92AFB0A1-901F-45F3-914B-4808B0A60D7F}"/>
+              </a:ext>
+            </a:extLst>
+          </p:cNvPr>
+          <p:cNvSpPr/>
+          <p:nvPr/>
+        </p:nvSpPr>
+        <p:spPr>
+          <a:xfrm>
+            <a:off x="243840" y="63030"/>
+            <a:ext cx="11704320" cy="3139321"/>
+          </a:xfrm>
+          <a:prstGeom prst="rect">
+            <a:avLst/>
+          </a:prstGeom>
+        </p:spPr>
+        <p:txBody>
+          <a:bodyPr wrap="square">
+            <a:spAutoFit/>
+          </a:bodyPr>
+          <a:lstStyle/>
+          <a:p>
+            <a:pPr marL="0" marR="0" lvl="0" indent="0" algn="l" defTabSz="914400" rtl="0" eaLnBrk="1" fontAlgn="auto" latinLnBrk="0" hangingPunct="1">
+              <a:lnSpc>
+                <a:spcPct val="100000"/>
+              </a:lnSpc>
+              <a:spcBef>
+                <a:spcPts val="0"/>
+              </a:spcBef>
+              <a:spcAft>
+                <a:spcPts val="0"/>
+              </a:spcAft>
+              <a:buClrTx/>
+              <a:buSzTx/>
+              <a:buFontTx/>
+              <a:buNone/>
+              <a:tabLst/>
+              <a:defRPr/>
+            </a:pPr>
+            <a:r>
+              <a:rPr kumimoji="0" lang="en-US" sz="1800" b="0" i="0" u="none" strike="noStrike" kern="1200" cap="none" spc="0" normalizeH="0" baseline="0" noProof="0" dirty="0">
+                <a:ln>
+                  <a:noFill/>
+                </a:ln>
+                <a:solidFill>
+                  <a:prstClr val="white"/>
+                </a:solidFill>
+                <a:effectLst/>
+                <a:uLnTx/>
+                <a:uFillTx/>
+                <a:latin typeface="Market_Deco"/>
+                <a:ea typeface="+mn-ea"/>
+                <a:cs typeface="+mn-cs"/>
+              </a:rPr>
+              <a:t>SELECT DISTINCT pp.[</a:t>
+            </a:r>
+            <a:r>
+              <a:rPr kumimoji="0" lang="en-US" sz="1800" b="0" i="0" u="none" strike="noStrike" kern="1200" cap="none" spc="0" normalizeH="0" baseline="0" noProof="0" dirty="0" err="1">
+                <a:ln>
+                  <a:noFill/>
+                </a:ln>
+                <a:solidFill>
+                  <a:prstClr val="white"/>
+                </a:solidFill>
+                <a:effectLst/>
+                <a:uLnTx/>
+                <a:uFillTx/>
+                <a:latin typeface="Market_Deco"/>
+                <a:ea typeface="+mn-ea"/>
+                <a:cs typeface="+mn-cs"/>
+              </a:rPr>
+              <a:t>nameFirst</a:t>
+            </a:r>
+            <a:r>
+              <a:rPr kumimoji="0" lang="en-US" sz="1800" b="0" i="0" u="none" strike="noStrike" kern="1200" cap="none" spc="0" normalizeH="0" baseline="0" noProof="0" dirty="0">
+                <a:ln>
+                  <a:noFill/>
+                </a:ln>
+                <a:solidFill>
+                  <a:prstClr val="white"/>
+                </a:solidFill>
+                <a:effectLst/>
+                <a:uLnTx/>
+                <a:uFillTx/>
+                <a:latin typeface="Market_Deco"/>
+                <a:ea typeface="+mn-ea"/>
+                <a:cs typeface="+mn-cs"/>
+              </a:rPr>
+              <a:t>] AS [</a:t>
+            </a:r>
+            <a:r>
+              <a:rPr kumimoji="0" lang="en-US" sz="1800" b="0" i="0" u="none" strike="noStrike" kern="1200" cap="none" spc="0" normalizeH="0" baseline="0" noProof="0" dirty="0" err="1">
+                <a:ln>
+                  <a:noFill/>
+                </a:ln>
+                <a:solidFill>
+                  <a:prstClr val="white"/>
+                </a:solidFill>
+                <a:effectLst/>
+                <a:uLnTx/>
+                <a:uFillTx/>
+                <a:latin typeface="Market_Deco"/>
+                <a:ea typeface="+mn-ea"/>
+                <a:cs typeface="+mn-cs"/>
+              </a:rPr>
+              <a:t>NameFirst</a:t>
+            </a:r>
+            <a:r>
+              <a:rPr kumimoji="0" lang="en-US" sz="1800" b="0" i="0" u="none" strike="noStrike" kern="1200" cap="none" spc="0" normalizeH="0" baseline="0" noProof="0" dirty="0">
+                <a:ln>
+                  <a:noFill/>
+                </a:ln>
+                <a:solidFill>
+                  <a:prstClr val="white"/>
+                </a:solidFill>
+                <a:effectLst/>
+                <a:uLnTx/>
+                <a:uFillTx/>
+                <a:latin typeface="Market_Deco"/>
+                <a:ea typeface="+mn-ea"/>
+                <a:cs typeface="+mn-cs"/>
+              </a:rPr>
+              <a:t>], pp.[</a:t>
+            </a:r>
+            <a:r>
+              <a:rPr kumimoji="0" lang="en-US" sz="1800" b="0" i="0" u="none" strike="noStrike" kern="1200" cap="none" spc="0" normalizeH="0" baseline="0" noProof="0" dirty="0" err="1">
+                <a:ln>
+                  <a:noFill/>
+                </a:ln>
+                <a:solidFill>
+                  <a:prstClr val="white"/>
+                </a:solidFill>
+                <a:effectLst/>
+                <a:uLnTx/>
+                <a:uFillTx/>
+                <a:latin typeface="Market_Deco"/>
+                <a:ea typeface="+mn-ea"/>
+                <a:cs typeface="+mn-cs"/>
+              </a:rPr>
+              <a:t>nameLast</a:t>
+            </a:r>
+            <a:r>
+              <a:rPr kumimoji="0" lang="en-US" sz="1800" b="0" i="0" u="none" strike="noStrike" kern="1200" cap="none" spc="0" normalizeH="0" baseline="0" noProof="0" dirty="0">
+                <a:ln>
+                  <a:noFill/>
+                </a:ln>
+                <a:solidFill>
+                  <a:prstClr val="white"/>
+                </a:solidFill>
+                <a:effectLst/>
+                <a:uLnTx/>
+                <a:uFillTx/>
+                <a:latin typeface="Market_Deco"/>
+                <a:ea typeface="+mn-ea"/>
+                <a:cs typeface="+mn-cs"/>
+              </a:rPr>
+              <a:t>] AS [</a:t>
+            </a:r>
+            <a:r>
+              <a:rPr kumimoji="0" lang="en-US" sz="1800" b="0" i="0" u="none" strike="noStrike" kern="1200" cap="none" spc="0" normalizeH="0" baseline="0" noProof="0" dirty="0" err="1">
+                <a:ln>
+                  <a:noFill/>
+                </a:ln>
+                <a:solidFill>
+                  <a:prstClr val="white"/>
+                </a:solidFill>
+                <a:effectLst/>
+                <a:uLnTx/>
+                <a:uFillTx/>
+                <a:latin typeface="Market_Deco"/>
+                <a:ea typeface="+mn-ea"/>
+                <a:cs typeface="+mn-cs"/>
+              </a:rPr>
+              <a:t>NameLast</a:t>
+            </a:r>
+            <a:r>
+              <a:rPr kumimoji="0" lang="en-US" sz="1800" b="0" i="0" u="none" strike="noStrike" kern="1200" cap="none" spc="0" normalizeH="0" baseline="0" noProof="0" dirty="0">
+                <a:ln>
+                  <a:noFill/>
+                </a:ln>
+                <a:solidFill>
+                  <a:prstClr val="white"/>
+                </a:solidFill>
+                <a:effectLst/>
+                <a:uLnTx/>
+                <a:uFillTx/>
+                <a:latin typeface="Market_Deco"/>
+                <a:ea typeface="+mn-ea"/>
+                <a:cs typeface="+mn-cs"/>
+              </a:rPr>
+              <a:t>], </a:t>
+            </a:r>
+            <a:r>
+              <a:rPr kumimoji="0" lang="en-US" sz="1800" b="0" i="0" u="none" strike="noStrike" kern="1200" cap="none" spc="0" normalizeH="0" baseline="0" noProof="0" dirty="0" err="1">
+                <a:ln>
+                  <a:noFill/>
+                </a:ln>
+                <a:solidFill>
+                  <a:prstClr val="white"/>
+                </a:solidFill>
+                <a:effectLst/>
+                <a:uLnTx/>
+                <a:uFillTx/>
+                <a:latin typeface="Market_Deco"/>
+                <a:ea typeface="+mn-ea"/>
+                <a:cs typeface="+mn-cs"/>
+              </a:rPr>
+              <a:t>tf</a:t>
+            </a:r>
+            <a:r>
+              <a:rPr kumimoji="0" lang="en-US" sz="1800" b="0" i="0" u="none" strike="noStrike" kern="1200" cap="none" spc="0" normalizeH="0" baseline="0" noProof="0" dirty="0">
+                <a:ln>
+                  <a:noFill/>
+                </a:ln>
+                <a:solidFill>
+                  <a:prstClr val="white"/>
+                </a:solidFill>
+                <a:effectLst/>
+                <a:uLnTx/>
+                <a:uFillTx/>
+                <a:latin typeface="Market_Deco"/>
+                <a:ea typeface="+mn-ea"/>
+                <a:cs typeface="+mn-cs"/>
+              </a:rPr>
+              <a:t>.[</a:t>
+            </a:r>
+            <a:r>
+              <a:rPr kumimoji="0" lang="en-US" sz="1800" b="0" i="0" u="none" strike="noStrike" kern="1200" cap="none" spc="0" normalizeH="0" baseline="0" noProof="0" dirty="0" err="1">
+                <a:ln>
+                  <a:noFill/>
+                </a:ln>
+                <a:solidFill>
+                  <a:prstClr val="white"/>
+                </a:solidFill>
+                <a:effectLst/>
+                <a:uLnTx/>
+                <a:uFillTx/>
+                <a:latin typeface="Market_Deco"/>
+                <a:ea typeface="+mn-ea"/>
+                <a:cs typeface="+mn-cs"/>
+              </a:rPr>
+              <a:t>franchName</a:t>
+            </a:r>
+            <a:r>
+              <a:rPr kumimoji="0" lang="en-US" sz="1800" b="0" i="0" u="none" strike="noStrike" kern="1200" cap="none" spc="0" normalizeH="0" baseline="0" noProof="0" dirty="0">
+                <a:ln>
+                  <a:noFill/>
+                </a:ln>
+                <a:solidFill>
+                  <a:prstClr val="white"/>
+                </a:solidFill>
+                <a:effectLst/>
+                <a:uLnTx/>
+                <a:uFillTx/>
+                <a:latin typeface="Market_Deco"/>
+                <a:ea typeface="+mn-ea"/>
+                <a:cs typeface="+mn-cs"/>
+              </a:rPr>
+              <a:t>] AS [Franchise]</a:t>
+            </a:r>
+          </a:p>
+          <a:p>
+            <a:pPr marL="0" marR="0" lvl="0" indent="0" algn="l" defTabSz="914400" rtl="0" eaLnBrk="1" fontAlgn="auto" latinLnBrk="0" hangingPunct="1">
+              <a:lnSpc>
+                <a:spcPct val="100000"/>
+              </a:lnSpc>
+              <a:spcBef>
+                <a:spcPts val="0"/>
+              </a:spcBef>
+              <a:spcAft>
+                <a:spcPts val="0"/>
+              </a:spcAft>
+              <a:buClrTx/>
+              <a:buSzTx/>
+              <a:buFontTx/>
+              <a:buNone/>
+              <a:tabLst/>
+              <a:defRPr/>
+            </a:pPr>
+            <a:r>
+              <a:rPr kumimoji="0" lang="en-US" sz="1800" b="0" i="0" u="none" strike="noStrike" kern="1200" cap="none" spc="0" normalizeH="0" baseline="0" noProof="0" dirty="0">
+                <a:ln>
+                  <a:noFill/>
+                </a:ln>
+                <a:solidFill>
+                  <a:prstClr val="white"/>
+                </a:solidFill>
+                <a:effectLst/>
+                <a:uLnTx/>
+                <a:uFillTx/>
+                <a:latin typeface="Market_Deco"/>
+                <a:ea typeface="+mn-ea"/>
+                <a:cs typeface="+mn-cs"/>
+              </a:rPr>
+              <a:t>FROM [</a:t>
+            </a:r>
+            <a:r>
+              <a:rPr kumimoji="0" lang="en-US" sz="1800" b="0" i="0" u="none" strike="noStrike" kern="1200" cap="none" spc="0" normalizeH="0" baseline="0" noProof="0" dirty="0" err="1">
+                <a:ln>
+                  <a:noFill/>
+                </a:ln>
+                <a:solidFill>
+                  <a:prstClr val="white"/>
+                </a:solidFill>
+                <a:effectLst/>
+                <a:uLnTx/>
+                <a:uFillTx/>
+                <a:latin typeface="Market_Deco"/>
+                <a:ea typeface="+mn-ea"/>
+                <a:cs typeface="+mn-cs"/>
+              </a:rPr>
+              <a:t>SeriesPost</a:t>
+            </a:r>
+            <a:r>
+              <a:rPr kumimoji="0" lang="en-US" sz="1800" b="0" i="0" u="none" strike="noStrike" kern="1200" cap="none" spc="0" normalizeH="0" baseline="0" noProof="0" dirty="0">
+                <a:ln>
+                  <a:noFill/>
+                </a:ln>
+                <a:solidFill>
+                  <a:prstClr val="white"/>
+                </a:solidFill>
+                <a:effectLst/>
+                <a:uLnTx/>
+                <a:uFillTx/>
+                <a:latin typeface="Market_Deco"/>
+                <a:ea typeface="+mn-ea"/>
+                <a:cs typeface="+mn-cs"/>
+              </a:rPr>
+              <a:t>] AS </a:t>
+            </a:r>
+            <a:r>
+              <a:rPr kumimoji="0" lang="en-US" sz="1800" b="0" i="0" u="none" strike="noStrike" kern="1200" cap="none" spc="0" normalizeH="0" baseline="0" noProof="0" dirty="0" err="1">
+                <a:ln>
+                  <a:noFill/>
+                </a:ln>
+                <a:solidFill>
+                  <a:prstClr val="white"/>
+                </a:solidFill>
+                <a:effectLst/>
+                <a:uLnTx/>
+                <a:uFillTx/>
+                <a:latin typeface="Market_Deco"/>
+                <a:ea typeface="+mn-ea"/>
+                <a:cs typeface="+mn-cs"/>
+              </a:rPr>
+              <a:t>sp</a:t>
+            </a:r>
+            <a:endParaRPr kumimoji="0" lang="en-US" sz="1800" b="0" i="0" u="none" strike="noStrike" kern="1200" cap="none" spc="0" normalizeH="0" baseline="0" noProof="0" dirty="0">
+              <a:ln>
+                <a:noFill/>
+              </a:ln>
+              <a:solidFill>
+                <a:prstClr val="white"/>
+              </a:solidFill>
+              <a:effectLst/>
+              <a:uLnTx/>
+              <a:uFillTx/>
+              <a:latin typeface="Market_Deco"/>
+              <a:ea typeface="+mn-ea"/>
+              <a:cs typeface="+mn-cs"/>
+            </a:endParaRPr>
+          </a:p>
+          <a:p>
+            <a:pPr marL="0" marR="0" lvl="0" indent="0" algn="l" defTabSz="914400" rtl="0" eaLnBrk="1" fontAlgn="auto" latinLnBrk="0" hangingPunct="1">
+              <a:lnSpc>
+                <a:spcPct val="100000"/>
+              </a:lnSpc>
+              <a:spcBef>
+                <a:spcPts val="0"/>
+              </a:spcBef>
+              <a:spcAft>
+                <a:spcPts val="0"/>
+              </a:spcAft>
+              <a:buClrTx/>
+              <a:buSzTx/>
+              <a:buFontTx/>
+              <a:buNone/>
+              <a:tabLst/>
+              <a:defRPr/>
+            </a:pPr>
+            <a:r>
+              <a:rPr kumimoji="0" lang="en-US" sz="1800" b="0" i="0" u="none" strike="noStrike" kern="1200" cap="none" spc="0" normalizeH="0" baseline="0" noProof="0" dirty="0">
+                <a:ln>
+                  <a:noFill/>
+                </a:ln>
+                <a:solidFill>
+                  <a:prstClr val="white"/>
+                </a:solidFill>
+                <a:effectLst/>
+                <a:uLnTx/>
+                <a:uFillTx/>
+                <a:latin typeface="Market_Deco"/>
+                <a:ea typeface="+mn-ea"/>
+                <a:cs typeface="+mn-cs"/>
+              </a:rPr>
+              <a:t>INNER JOIN [Teams] AS t</a:t>
+            </a:r>
+          </a:p>
+          <a:p>
+            <a:pPr marL="0" marR="0" lvl="0" indent="0" algn="l" defTabSz="914400" rtl="0" eaLnBrk="1" fontAlgn="auto" latinLnBrk="0" hangingPunct="1">
+              <a:lnSpc>
+                <a:spcPct val="100000"/>
+              </a:lnSpc>
+              <a:spcBef>
+                <a:spcPts val="0"/>
+              </a:spcBef>
+              <a:spcAft>
+                <a:spcPts val="0"/>
+              </a:spcAft>
+              <a:buClrTx/>
+              <a:buSzTx/>
+              <a:buFontTx/>
+              <a:buNone/>
+              <a:tabLst/>
+              <a:defRPr/>
+            </a:pPr>
+            <a:r>
+              <a:rPr kumimoji="0" lang="en-US" sz="1800" b="0" i="0" u="none" strike="noStrike" kern="1200" cap="none" spc="0" normalizeH="0" baseline="0" noProof="0" dirty="0">
+                <a:ln>
+                  <a:noFill/>
+                </a:ln>
+                <a:solidFill>
+                  <a:prstClr val="white"/>
+                </a:solidFill>
+                <a:effectLst/>
+                <a:uLnTx/>
+                <a:uFillTx/>
+                <a:latin typeface="Market_Deco"/>
+                <a:ea typeface="+mn-ea"/>
+                <a:cs typeface="+mn-cs"/>
+              </a:rPr>
+              <a:t>	ON (sp.[</a:t>
+            </a:r>
+            <a:r>
+              <a:rPr kumimoji="0" lang="en-US" sz="1800" b="0" i="0" u="none" strike="noStrike" kern="1200" cap="none" spc="0" normalizeH="0" baseline="0" noProof="0" dirty="0" err="1">
+                <a:ln>
+                  <a:noFill/>
+                </a:ln>
+                <a:solidFill>
+                  <a:prstClr val="white"/>
+                </a:solidFill>
+                <a:effectLst/>
+                <a:uLnTx/>
+                <a:uFillTx/>
+                <a:latin typeface="Market_Deco"/>
+                <a:ea typeface="+mn-ea"/>
+                <a:cs typeface="+mn-cs"/>
+              </a:rPr>
+              <a:t>teamIDwinner</a:t>
+            </a:r>
+            <a:r>
+              <a:rPr kumimoji="0" lang="en-US" sz="1800" b="0" i="0" u="none" strike="noStrike" kern="1200" cap="none" spc="0" normalizeH="0" baseline="0" noProof="0" dirty="0">
+                <a:ln>
+                  <a:noFill/>
+                </a:ln>
+                <a:solidFill>
+                  <a:prstClr val="white"/>
+                </a:solidFill>
+                <a:effectLst/>
+                <a:uLnTx/>
+                <a:uFillTx/>
+                <a:latin typeface="Market_Deco"/>
+                <a:ea typeface="+mn-ea"/>
+                <a:cs typeface="+mn-cs"/>
+              </a:rPr>
+              <a:t>] = t.[</a:t>
+            </a:r>
+            <a:r>
+              <a:rPr kumimoji="0" lang="en-US" sz="1800" b="0" i="0" u="none" strike="noStrike" kern="1200" cap="none" spc="0" normalizeH="0" baseline="0" noProof="0" dirty="0" err="1">
+                <a:ln>
+                  <a:noFill/>
+                </a:ln>
+                <a:solidFill>
+                  <a:prstClr val="white"/>
+                </a:solidFill>
+                <a:effectLst/>
+                <a:uLnTx/>
+                <a:uFillTx/>
+                <a:latin typeface="Market_Deco"/>
+                <a:ea typeface="+mn-ea"/>
+                <a:cs typeface="+mn-cs"/>
+              </a:rPr>
+              <a:t>teamID</a:t>
+            </a:r>
+            <a:r>
+              <a:rPr kumimoji="0" lang="en-US" sz="1800" b="0" i="0" u="none" strike="noStrike" kern="1200" cap="none" spc="0" normalizeH="0" baseline="0" noProof="0" dirty="0">
+                <a:ln>
+                  <a:noFill/>
+                </a:ln>
+                <a:solidFill>
+                  <a:prstClr val="white"/>
+                </a:solidFill>
+                <a:effectLst/>
+                <a:uLnTx/>
+                <a:uFillTx/>
+                <a:latin typeface="Market_Deco"/>
+                <a:ea typeface="+mn-ea"/>
+                <a:cs typeface="+mn-cs"/>
+              </a:rPr>
+              <a:t>]) AND (sp.[</a:t>
+            </a:r>
+            <a:r>
+              <a:rPr kumimoji="0" lang="en-US" sz="1800" b="0" i="0" u="none" strike="noStrike" kern="1200" cap="none" spc="0" normalizeH="0" baseline="0" noProof="0" dirty="0" err="1">
+                <a:ln>
+                  <a:noFill/>
+                </a:ln>
+                <a:solidFill>
+                  <a:prstClr val="white"/>
+                </a:solidFill>
+                <a:effectLst/>
+                <a:uLnTx/>
+                <a:uFillTx/>
+                <a:latin typeface="Market_Deco"/>
+                <a:ea typeface="+mn-ea"/>
+                <a:cs typeface="+mn-cs"/>
+              </a:rPr>
+              <a:t>lgIDwinner</a:t>
+            </a:r>
+            <a:r>
+              <a:rPr kumimoji="0" lang="en-US" sz="1800" b="0" i="0" u="none" strike="noStrike" kern="1200" cap="none" spc="0" normalizeH="0" baseline="0" noProof="0" dirty="0">
+                <a:ln>
+                  <a:noFill/>
+                </a:ln>
+                <a:solidFill>
+                  <a:prstClr val="white"/>
+                </a:solidFill>
+                <a:effectLst/>
+                <a:uLnTx/>
+                <a:uFillTx/>
+                <a:latin typeface="Market_Deco"/>
+                <a:ea typeface="+mn-ea"/>
+                <a:cs typeface="+mn-cs"/>
+              </a:rPr>
+              <a:t>] = t.[lgID]) AND (sp.[yearID] = t.[yearID])</a:t>
+            </a:r>
+          </a:p>
+          <a:p>
+            <a:pPr marL="0" marR="0" lvl="0" indent="0" algn="l" defTabSz="914400" rtl="0" eaLnBrk="1" fontAlgn="auto" latinLnBrk="0" hangingPunct="1">
+              <a:lnSpc>
+                <a:spcPct val="100000"/>
+              </a:lnSpc>
+              <a:spcBef>
+                <a:spcPts val="0"/>
+              </a:spcBef>
+              <a:spcAft>
+                <a:spcPts val="0"/>
+              </a:spcAft>
+              <a:buClrTx/>
+              <a:buSzTx/>
+              <a:buFontTx/>
+              <a:buNone/>
+              <a:tabLst/>
+              <a:defRPr/>
+            </a:pPr>
+            <a:r>
+              <a:rPr kumimoji="0" lang="en-US" sz="1800" b="0" i="0" u="none" strike="noStrike" kern="1200" cap="none" spc="0" normalizeH="0" baseline="0" noProof="0" dirty="0">
+                <a:ln>
+                  <a:noFill/>
+                </a:ln>
+                <a:solidFill>
+                  <a:prstClr val="white"/>
+                </a:solidFill>
+                <a:effectLst/>
+                <a:uLnTx/>
+                <a:uFillTx/>
+                <a:latin typeface="Market_Deco"/>
+                <a:ea typeface="+mn-ea"/>
+                <a:cs typeface="+mn-cs"/>
+              </a:rPr>
+              <a:t>INNER JOIN [</a:t>
+            </a:r>
+            <a:r>
+              <a:rPr kumimoji="0" lang="en-US" sz="1800" b="0" i="0" u="none" strike="noStrike" kern="1200" cap="none" spc="0" normalizeH="0" baseline="0" noProof="0" dirty="0" err="1">
+                <a:ln>
+                  <a:noFill/>
+                </a:ln>
+                <a:solidFill>
+                  <a:prstClr val="white"/>
+                </a:solidFill>
+                <a:effectLst/>
+                <a:uLnTx/>
+                <a:uFillTx/>
+                <a:latin typeface="Market_Deco"/>
+                <a:ea typeface="+mn-ea"/>
+                <a:cs typeface="+mn-cs"/>
+              </a:rPr>
+              <a:t>TeamsFranchises</a:t>
+            </a:r>
+            <a:r>
+              <a:rPr kumimoji="0" lang="en-US" sz="1800" b="0" i="0" u="none" strike="noStrike" kern="1200" cap="none" spc="0" normalizeH="0" baseline="0" noProof="0" dirty="0">
+                <a:ln>
+                  <a:noFill/>
+                </a:ln>
+                <a:solidFill>
+                  <a:prstClr val="white"/>
+                </a:solidFill>
+                <a:effectLst/>
+                <a:uLnTx/>
+                <a:uFillTx/>
+                <a:latin typeface="Market_Deco"/>
+                <a:ea typeface="+mn-ea"/>
+                <a:cs typeface="+mn-cs"/>
+              </a:rPr>
+              <a:t>] AS </a:t>
+            </a:r>
+            <a:r>
+              <a:rPr kumimoji="0" lang="en-US" sz="1800" b="0" i="0" u="none" strike="noStrike" kern="1200" cap="none" spc="0" normalizeH="0" baseline="0" noProof="0" dirty="0" err="1">
+                <a:ln>
+                  <a:noFill/>
+                </a:ln>
+                <a:solidFill>
+                  <a:prstClr val="white"/>
+                </a:solidFill>
+                <a:effectLst/>
+                <a:uLnTx/>
+                <a:uFillTx/>
+                <a:latin typeface="Market_Deco"/>
+                <a:ea typeface="+mn-ea"/>
+                <a:cs typeface="+mn-cs"/>
+              </a:rPr>
+              <a:t>tf</a:t>
+            </a:r>
+            <a:endParaRPr kumimoji="0" lang="en-US" sz="1800" b="0" i="0" u="none" strike="noStrike" kern="1200" cap="none" spc="0" normalizeH="0" baseline="0" noProof="0" dirty="0">
+              <a:ln>
+                <a:noFill/>
+              </a:ln>
+              <a:solidFill>
+                <a:prstClr val="white"/>
+              </a:solidFill>
+              <a:effectLst/>
+              <a:uLnTx/>
+              <a:uFillTx/>
+              <a:latin typeface="Market_Deco"/>
+              <a:ea typeface="+mn-ea"/>
+              <a:cs typeface="+mn-cs"/>
+            </a:endParaRPr>
+          </a:p>
+          <a:p>
+            <a:pPr marL="0" marR="0" lvl="0" indent="0" algn="l" defTabSz="914400" rtl="0" eaLnBrk="1" fontAlgn="auto" latinLnBrk="0" hangingPunct="1">
+              <a:lnSpc>
+                <a:spcPct val="100000"/>
+              </a:lnSpc>
+              <a:spcBef>
+                <a:spcPts val="0"/>
+              </a:spcBef>
+              <a:spcAft>
+                <a:spcPts val="0"/>
+              </a:spcAft>
+              <a:buClrTx/>
+              <a:buSzTx/>
+              <a:buFontTx/>
+              <a:buNone/>
+              <a:tabLst/>
+              <a:defRPr/>
+            </a:pPr>
+            <a:r>
+              <a:rPr kumimoji="0" lang="en-US" sz="1800" b="0" i="0" u="none" strike="noStrike" kern="1200" cap="none" spc="0" normalizeH="0" baseline="0" noProof="0" dirty="0">
+                <a:ln>
+                  <a:noFill/>
+                </a:ln>
+                <a:solidFill>
+                  <a:prstClr val="white"/>
+                </a:solidFill>
+                <a:effectLst/>
+                <a:uLnTx/>
+                <a:uFillTx/>
+                <a:latin typeface="Market_Deco"/>
+                <a:ea typeface="+mn-ea"/>
+                <a:cs typeface="+mn-cs"/>
+              </a:rPr>
+              <a:t>	ON t.[</a:t>
+            </a:r>
+            <a:r>
+              <a:rPr kumimoji="0" lang="en-US" sz="1800" b="0" i="0" u="none" strike="noStrike" kern="1200" cap="none" spc="0" normalizeH="0" baseline="0" noProof="0" dirty="0" err="1">
+                <a:ln>
+                  <a:noFill/>
+                </a:ln>
+                <a:solidFill>
+                  <a:prstClr val="white"/>
+                </a:solidFill>
+                <a:effectLst/>
+                <a:uLnTx/>
+                <a:uFillTx/>
+                <a:latin typeface="Market_Deco"/>
+                <a:ea typeface="+mn-ea"/>
+                <a:cs typeface="+mn-cs"/>
+              </a:rPr>
+              <a:t>franchID</a:t>
+            </a:r>
+            <a:r>
+              <a:rPr kumimoji="0" lang="en-US" sz="1800" b="0" i="0" u="none" strike="noStrike" kern="1200" cap="none" spc="0" normalizeH="0" baseline="0" noProof="0" dirty="0">
+                <a:ln>
+                  <a:noFill/>
+                </a:ln>
+                <a:solidFill>
+                  <a:prstClr val="white"/>
+                </a:solidFill>
+                <a:effectLst/>
+                <a:uLnTx/>
+                <a:uFillTx/>
+                <a:latin typeface="Market_Deco"/>
+                <a:ea typeface="+mn-ea"/>
+                <a:cs typeface="+mn-cs"/>
+              </a:rPr>
+              <a:t>] = </a:t>
+            </a:r>
+            <a:r>
+              <a:rPr kumimoji="0" lang="en-US" sz="1800" b="0" i="0" u="none" strike="noStrike" kern="1200" cap="none" spc="0" normalizeH="0" baseline="0" noProof="0" dirty="0" err="1">
+                <a:ln>
+                  <a:noFill/>
+                </a:ln>
+                <a:solidFill>
+                  <a:prstClr val="white"/>
+                </a:solidFill>
+                <a:effectLst/>
+                <a:uLnTx/>
+                <a:uFillTx/>
+                <a:latin typeface="Market_Deco"/>
+                <a:ea typeface="+mn-ea"/>
+                <a:cs typeface="+mn-cs"/>
+              </a:rPr>
+              <a:t>tf</a:t>
+            </a:r>
+            <a:r>
+              <a:rPr kumimoji="0" lang="en-US" sz="1800" b="0" i="0" u="none" strike="noStrike" kern="1200" cap="none" spc="0" normalizeH="0" baseline="0" noProof="0" dirty="0">
+                <a:ln>
+                  <a:noFill/>
+                </a:ln>
+                <a:solidFill>
+                  <a:prstClr val="white"/>
+                </a:solidFill>
+                <a:effectLst/>
+                <a:uLnTx/>
+                <a:uFillTx/>
+                <a:latin typeface="Market_Deco"/>
+                <a:ea typeface="+mn-ea"/>
+                <a:cs typeface="+mn-cs"/>
+              </a:rPr>
+              <a:t>.[</a:t>
+            </a:r>
+            <a:r>
+              <a:rPr kumimoji="0" lang="en-US" sz="1800" b="0" i="0" u="none" strike="noStrike" kern="1200" cap="none" spc="0" normalizeH="0" baseline="0" noProof="0" dirty="0" err="1">
+                <a:ln>
+                  <a:noFill/>
+                </a:ln>
+                <a:solidFill>
+                  <a:prstClr val="white"/>
+                </a:solidFill>
+                <a:effectLst/>
+                <a:uLnTx/>
+                <a:uFillTx/>
+                <a:latin typeface="Market_Deco"/>
+                <a:ea typeface="+mn-ea"/>
+                <a:cs typeface="+mn-cs"/>
+              </a:rPr>
+              <a:t>franchID</a:t>
+            </a:r>
+            <a:r>
+              <a:rPr kumimoji="0" lang="en-US" sz="1800" b="0" i="0" u="none" strike="noStrike" kern="1200" cap="none" spc="0" normalizeH="0" baseline="0" noProof="0" dirty="0">
+                <a:ln>
+                  <a:noFill/>
+                </a:ln>
+                <a:solidFill>
+                  <a:prstClr val="white"/>
+                </a:solidFill>
+                <a:effectLst/>
+                <a:uLnTx/>
+                <a:uFillTx/>
+                <a:latin typeface="Market_Deco"/>
+                <a:ea typeface="+mn-ea"/>
+                <a:cs typeface="+mn-cs"/>
+              </a:rPr>
+              <a:t>]</a:t>
+            </a:r>
+          </a:p>
+          <a:p>
+            <a:pPr marL="0" marR="0" lvl="0" indent="0" algn="l" defTabSz="914400" rtl="0" eaLnBrk="1" fontAlgn="auto" latinLnBrk="0" hangingPunct="1">
+              <a:lnSpc>
+                <a:spcPct val="100000"/>
+              </a:lnSpc>
+              <a:spcBef>
+                <a:spcPts val="0"/>
+              </a:spcBef>
+              <a:spcAft>
+                <a:spcPts val="0"/>
+              </a:spcAft>
+              <a:buClrTx/>
+              <a:buSzTx/>
+              <a:buFontTx/>
+              <a:buNone/>
+              <a:tabLst/>
+              <a:defRPr/>
+            </a:pPr>
+            <a:r>
+              <a:rPr kumimoji="0" lang="en-US" sz="1800" b="0" i="0" u="none" strike="noStrike" kern="1200" cap="none" spc="0" normalizeH="0" baseline="0" noProof="0" dirty="0">
+                <a:ln>
+                  <a:noFill/>
+                </a:ln>
+                <a:solidFill>
+                  <a:prstClr val="white"/>
+                </a:solidFill>
+                <a:effectLst/>
+                <a:uLnTx/>
+                <a:uFillTx/>
+                <a:latin typeface="Market_Deco"/>
+                <a:ea typeface="+mn-ea"/>
+                <a:cs typeface="+mn-cs"/>
+              </a:rPr>
+              <a:t>INNER JOIN [Pitching] AS p</a:t>
+            </a:r>
+          </a:p>
+          <a:p>
+            <a:pPr marL="0" marR="0" lvl="0" indent="0" algn="l" defTabSz="914400" rtl="0" eaLnBrk="1" fontAlgn="auto" latinLnBrk="0" hangingPunct="1">
+              <a:lnSpc>
+                <a:spcPct val="100000"/>
+              </a:lnSpc>
+              <a:spcBef>
+                <a:spcPts val="0"/>
+              </a:spcBef>
+              <a:spcAft>
+                <a:spcPts val="0"/>
+              </a:spcAft>
+              <a:buClrTx/>
+              <a:buSzTx/>
+              <a:buFontTx/>
+              <a:buNone/>
+              <a:tabLst/>
+              <a:defRPr/>
+            </a:pPr>
+            <a:r>
+              <a:rPr kumimoji="0" lang="en-US" sz="1800" b="0" i="0" u="none" strike="noStrike" kern="1200" cap="none" spc="0" normalizeH="0" baseline="0" noProof="0" dirty="0">
+                <a:ln>
+                  <a:noFill/>
+                </a:ln>
+                <a:solidFill>
+                  <a:prstClr val="white"/>
+                </a:solidFill>
+                <a:effectLst/>
+                <a:uLnTx/>
+                <a:uFillTx/>
+                <a:latin typeface="Market_Deco"/>
+                <a:ea typeface="+mn-ea"/>
+                <a:cs typeface="+mn-cs"/>
+              </a:rPr>
+              <a:t>	ON (t.[</a:t>
+            </a:r>
+            <a:r>
+              <a:rPr kumimoji="0" lang="en-US" sz="1800" b="0" i="0" u="none" strike="noStrike" kern="1200" cap="none" spc="0" normalizeH="0" baseline="0" noProof="0" dirty="0" err="1">
+                <a:ln>
+                  <a:noFill/>
+                </a:ln>
+                <a:solidFill>
+                  <a:prstClr val="white"/>
+                </a:solidFill>
+                <a:effectLst/>
+                <a:uLnTx/>
+                <a:uFillTx/>
+                <a:latin typeface="Market_Deco"/>
+                <a:ea typeface="+mn-ea"/>
+                <a:cs typeface="+mn-cs"/>
+              </a:rPr>
+              <a:t>teamID</a:t>
+            </a:r>
+            <a:r>
+              <a:rPr kumimoji="0" lang="en-US" sz="1800" b="0" i="0" u="none" strike="noStrike" kern="1200" cap="none" spc="0" normalizeH="0" baseline="0" noProof="0" dirty="0">
+                <a:ln>
+                  <a:noFill/>
+                </a:ln>
+                <a:solidFill>
+                  <a:prstClr val="white"/>
+                </a:solidFill>
+                <a:effectLst/>
+                <a:uLnTx/>
+                <a:uFillTx/>
+                <a:latin typeface="Market_Deco"/>
+                <a:ea typeface="+mn-ea"/>
+                <a:cs typeface="+mn-cs"/>
+              </a:rPr>
+              <a:t>] = p.[</a:t>
+            </a:r>
+            <a:r>
+              <a:rPr kumimoji="0" lang="en-US" sz="1800" b="0" i="0" u="none" strike="noStrike" kern="1200" cap="none" spc="0" normalizeH="0" baseline="0" noProof="0" dirty="0" err="1">
+                <a:ln>
+                  <a:noFill/>
+                </a:ln>
+                <a:solidFill>
+                  <a:prstClr val="white"/>
+                </a:solidFill>
+                <a:effectLst/>
+                <a:uLnTx/>
+                <a:uFillTx/>
+                <a:latin typeface="Market_Deco"/>
+                <a:ea typeface="+mn-ea"/>
+                <a:cs typeface="+mn-cs"/>
+              </a:rPr>
+              <a:t>teamID</a:t>
+            </a:r>
+            <a:r>
+              <a:rPr kumimoji="0" lang="en-US" sz="1800" b="0" i="0" u="none" strike="noStrike" kern="1200" cap="none" spc="0" normalizeH="0" baseline="0" noProof="0" dirty="0">
+                <a:ln>
+                  <a:noFill/>
+                </a:ln>
+                <a:solidFill>
+                  <a:prstClr val="white"/>
+                </a:solidFill>
+                <a:effectLst/>
+                <a:uLnTx/>
+                <a:uFillTx/>
+                <a:latin typeface="Market_Deco"/>
+                <a:ea typeface="+mn-ea"/>
+                <a:cs typeface="+mn-cs"/>
+              </a:rPr>
+              <a:t>]) AND (t.[lgID] = p.[lgID]) AND (t.[yearID] = p.[yearID])</a:t>
+            </a:r>
+          </a:p>
+          <a:p>
+            <a:pPr marL="0" marR="0" lvl="0" indent="0" algn="l" defTabSz="914400" rtl="0" eaLnBrk="1" fontAlgn="auto" latinLnBrk="0" hangingPunct="1">
+              <a:lnSpc>
+                <a:spcPct val="100000"/>
+              </a:lnSpc>
+              <a:spcBef>
+                <a:spcPts val="0"/>
+              </a:spcBef>
+              <a:spcAft>
+                <a:spcPts val="0"/>
+              </a:spcAft>
+              <a:buClrTx/>
+              <a:buSzTx/>
+              <a:buFontTx/>
+              <a:buNone/>
+              <a:tabLst/>
+              <a:defRPr/>
+            </a:pPr>
+            <a:r>
+              <a:rPr kumimoji="0" lang="en-US" sz="1800" b="0" i="0" u="none" strike="noStrike" kern="1200" cap="none" spc="0" normalizeH="0" baseline="0" noProof="0" dirty="0">
+                <a:ln>
+                  <a:noFill/>
+                </a:ln>
+                <a:solidFill>
+                  <a:prstClr val="white"/>
+                </a:solidFill>
+                <a:effectLst/>
+                <a:uLnTx/>
+                <a:uFillTx/>
+                <a:latin typeface="Market_Deco"/>
+                <a:ea typeface="+mn-ea"/>
+                <a:cs typeface="+mn-cs"/>
+              </a:rPr>
+              <a:t>INNER JOIN [People] AS pp</a:t>
+            </a:r>
+          </a:p>
+          <a:p>
+            <a:pPr marL="0" marR="0" lvl="0" indent="0" algn="l" defTabSz="914400" rtl="0" eaLnBrk="1" fontAlgn="auto" latinLnBrk="0" hangingPunct="1">
+              <a:lnSpc>
+                <a:spcPct val="100000"/>
+              </a:lnSpc>
+              <a:spcBef>
+                <a:spcPts val="0"/>
+              </a:spcBef>
+              <a:spcAft>
+                <a:spcPts val="0"/>
+              </a:spcAft>
+              <a:buClrTx/>
+              <a:buSzTx/>
+              <a:buFontTx/>
+              <a:buNone/>
+              <a:tabLst/>
+              <a:defRPr/>
+            </a:pPr>
+            <a:r>
+              <a:rPr kumimoji="0" lang="en-US" sz="1800" b="0" i="0" u="none" strike="noStrike" kern="1200" cap="none" spc="0" normalizeH="0" baseline="0" noProof="0" dirty="0">
+                <a:ln>
+                  <a:noFill/>
+                </a:ln>
+                <a:solidFill>
+                  <a:prstClr val="white"/>
+                </a:solidFill>
+                <a:effectLst/>
+                <a:uLnTx/>
+                <a:uFillTx/>
+                <a:latin typeface="Market_Deco"/>
+                <a:ea typeface="+mn-ea"/>
+                <a:cs typeface="+mn-cs"/>
+              </a:rPr>
+              <a:t>	ON p.[playerID] = pp.[playerID]</a:t>
+            </a:r>
+          </a:p>
+          <a:p>
+            <a:pPr marL="0" marR="0" lvl="0" indent="0" algn="l" defTabSz="914400" rtl="0" eaLnBrk="1" fontAlgn="auto" latinLnBrk="0" hangingPunct="1">
+              <a:lnSpc>
+                <a:spcPct val="100000"/>
+              </a:lnSpc>
+              <a:spcBef>
+                <a:spcPts val="0"/>
+              </a:spcBef>
+              <a:spcAft>
+                <a:spcPts val="0"/>
+              </a:spcAft>
+              <a:buClrTx/>
+              <a:buSzTx/>
+              <a:buFontTx/>
+              <a:buNone/>
+              <a:tabLst/>
+              <a:defRPr/>
+            </a:pPr>
+            <a:r>
+              <a:rPr kumimoji="0" lang="en-US" sz="1800" b="0" i="0" u="none" strike="noStrike" kern="1200" cap="none" spc="0" normalizeH="0" baseline="0" noProof="0" dirty="0">
+                <a:ln>
+                  <a:noFill/>
+                </a:ln>
+                <a:solidFill>
+                  <a:prstClr val="white"/>
+                </a:solidFill>
+                <a:effectLst/>
+                <a:uLnTx/>
+                <a:uFillTx/>
+                <a:latin typeface="Market_Deco"/>
+                <a:ea typeface="+mn-ea"/>
+                <a:cs typeface="+mn-cs"/>
+              </a:rPr>
+              <a:t>WHERE (sp.[round] = 'WS') AND (sp.[yearID] = 2018)</a:t>
+            </a:r>
+          </a:p>
+        </p:txBody>
+      </p:sp>
+      <p:pic>
+        <p:nvPicPr>
+          <p:cNvPr id="3" name="Picture 2">
+            <a:extLst>
+              <a:ext uri="{FF2B5EF4-FFF2-40B4-BE49-F238E27FC236}">
+                <a16:creationId xmlns:a16="http://schemas.microsoft.com/office/drawing/2014/main" id="{B679176F-FFAF-4054-887C-B5B5AFAF76BA}"/>
+              </a:ext>
+            </a:extLst>
+          </p:cNvPr>
+          <p:cNvPicPr>
+            <a:picLocks noChangeAspect="1"/>
+          </p:cNvPicPr>
+          <p:nvPr/>
+        </p:nvPicPr>
+        <p:blipFill>
+          <a:blip r:embed="rId2">
+            <a:extLst>
+              <a:ext uri="{28A0092B-C50C-407E-A947-70E740481C1C}">
+                <a14:useLocalDpi xmlns:a14="http://schemas.microsoft.com/office/drawing/2010/main" val="0"/>
+              </a:ext>
+            </a:extLst>
+          </a:blip>
+          <a:stretch>
+            <a:fillRect/>
+          </a:stretch>
+        </p:blipFill>
+        <p:spPr>
+          <a:xfrm>
+            <a:off x="0" y="3392338"/>
+            <a:ext cx="12192000" cy="3465662"/>
+          </a:xfrm>
+          <a:prstGeom prst="rect">
+            <a:avLst/>
+          </a:prstGeom>
+        </p:spPr>
+      </p:pic>
+      <mc:AlternateContent xmlns:mc="http://schemas.openxmlformats.org/markup-compatibility/2006" xmlns:p14="http://schemas.microsoft.com/office/powerpoint/2010/main">
+        <mc:Choice Requires="p14">
+          <p:contentPart p14:bwMode="auto" r:id="rId3">
+            <p14:nvContentPartPr>
+              <p14:cNvPr id="5" name="Ink 4">
+                <a:extLst>
+                  <a:ext uri="{FF2B5EF4-FFF2-40B4-BE49-F238E27FC236}">
+                    <a16:creationId xmlns:a16="http://schemas.microsoft.com/office/drawing/2014/main" id="{B0199339-F740-4D4E-9805-7DA775443643}"/>
+                  </a:ext>
+                </a:extLst>
+              </p14:cNvPr>
+              <p14:cNvContentPartPr/>
+              <p14:nvPr/>
+            </p14:nvContentPartPr>
+            <p14:xfrm>
+              <a:off x="41889" y="3839132"/>
+              <a:ext cx="8451720" cy="109440"/>
+            </p14:xfrm>
+          </p:contentPart>
+        </mc:Choice>
+        <mc:Fallback xmlns="">
+          <p:pic>
+            <p:nvPicPr>
+              <p:cNvPr id="5" name="Ink 4">
+                <a:extLst>
+                  <a:ext uri="{FF2B5EF4-FFF2-40B4-BE49-F238E27FC236}">
+                    <a16:creationId xmlns:a16="http://schemas.microsoft.com/office/drawing/2014/main" id="{B0199339-F740-4D4E-9805-7DA775443643}"/>
+                  </a:ext>
+                </a:extLst>
+              </p:cNvPr>
+              <p:cNvPicPr/>
+              <p:nvPr/>
+            </p:nvPicPr>
+            <p:blipFill>
+              <a:blip r:embed="rId4"/>
+              <a:stretch>
+                <a:fillRect/>
+              </a:stretch>
+            </p:blipFill>
+            <p:spPr>
+              <a:xfrm>
+                <a:off x="-12111" y="3731132"/>
+                <a:ext cx="8559360" cy="325080"/>
+              </a:xfrm>
+              <a:prstGeom prst="rect">
+                <a:avLst/>
+              </a:prstGeom>
+            </p:spPr>
+          </p:pic>
+        </mc:Fallback>
+      </mc:AlternateContent>
+      <p:sp>
+        <p:nvSpPr>
+          <p:cNvPr id="6" name="Rectangle: Rounded Corners 5">
+            <a:extLst>
+              <a:ext uri="{FF2B5EF4-FFF2-40B4-BE49-F238E27FC236}">
+                <a16:creationId xmlns:a16="http://schemas.microsoft.com/office/drawing/2014/main" id="{048F13A6-07E0-4B99-8B40-8AE6E8359343}"/>
+              </a:ext>
+            </a:extLst>
+          </p:cNvPr>
+          <p:cNvSpPr/>
+          <p:nvPr/>
+        </p:nvSpPr>
+        <p:spPr>
+          <a:xfrm>
+            <a:off x="4048787" y="4899619"/>
+            <a:ext cx="1349596" cy="1173562"/>
+          </a:xfrm>
+          <a:prstGeom prst="roundRect">
+            <a:avLst/>
+          </a:prstGeom>
+          <a:noFill/>
+          <a:ln w="76200">
+            <a:solidFill>
+              <a:srgbClr val="FF0000"/>
+            </a:solidFill>
+          </a:ln>
+        </p:spPr>
+        <p:style>
+          <a:lnRef idx="2">
+            <a:schemeClr val="accent1">
+              <a:shade val="50000"/>
+            </a:schemeClr>
+          </a:lnRef>
+          <a:fillRef idx="1">
+            <a:schemeClr val="accent1"/>
+          </a:fillRef>
+          <a:effectRef idx="0">
+            <a:schemeClr val="accent1"/>
+          </a:effectRef>
+          <a:fontRef idx="minor">
+            <a:schemeClr val="lt1"/>
+          </a:fontRef>
+        </p:style>
+        <p:txBody>
+          <a:bodyPr rtlCol="0" anchor="ctr"/>
+          <a:lstStyle/>
+          <a:p>
+            <a:pPr marL="0" marR="0" lvl="0" indent="0" algn="ctr" defTabSz="914400" rtl="0" eaLnBrk="1" fontAlgn="auto" latinLnBrk="0" hangingPunct="1">
+              <a:lnSpc>
+                <a:spcPct val="100000"/>
+              </a:lnSpc>
+              <a:spcBef>
+                <a:spcPts val="0"/>
+              </a:spcBef>
+              <a:spcAft>
+                <a:spcPts val="0"/>
+              </a:spcAft>
+              <a:buClrTx/>
+              <a:buSzTx/>
+              <a:buFontTx/>
+              <a:buNone/>
+              <a:tabLst/>
+              <a:defRPr/>
+            </a:pPr>
+            <a:endParaRPr kumimoji="0" lang="en-US" sz="1800" b="0" i="0" u="none" strike="noStrike" kern="1200" cap="none" spc="0" normalizeH="0" baseline="0" noProof="0">
+              <a:ln>
+                <a:noFill/>
+              </a:ln>
+              <a:solidFill>
+                <a:prstClr val="white"/>
+              </a:solidFill>
+              <a:effectLst/>
+              <a:uLnTx/>
+              <a:uFillTx/>
+              <a:latin typeface="Market_Deco"/>
+              <a:ea typeface="+mn-ea"/>
+              <a:cs typeface="+mn-cs"/>
+            </a:endParaRPr>
+          </a:p>
+        </p:txBody>
+      </p:sp>
+      <p:pic>
+        <p:nvPicPr>
+          <p:cNvPr id="7" name="Picture 6">
+            <a:extLst>
+              <a:ext uri="{FF2B5EF4-FFF2-40B4-BE49-F238E27FC236}">
+                <a16:creationId xmlns:a16="http://schemas.microsoft.com/office/drawing/2014/main" id="{FE072B2B-88FC-444C-B5A3-4DFBCE941948}"/>
+              </a:ext>
+            </a:extLst>
+          </p:cNvPr>
+          <p:cNvPicPr>
+            <a:picLocks noChangeAspect="1"/>
+          </p:cNvPicPr>
+          <p:nvPr/>
+        </p:nvPicPr>
+        <p:blipFill>
+          <a:blip r:embed="rId5"/>
+          <a:stretch>
+            <a:fillRect/>
+          </a:stretch>
+        </p:blipFill>
+        <p:spPr>
+          <a:xfrm>
+            <a:off x="6285289" y="1453492"/>
+            <a:ext cx="3295363" cy="2786577"/>
+          </a:xfrm>
+          <a:prstGeom prst="rect">
+            <a:avLst/>
+          </a:prstGeom>
+          <a:ln w="76200">
+            <a:solidFill>
+              <a:srgbClr val="FF0000"/>
+            </a:solidFill>
+          </a:ln>
+        </p:spPr>
+      </p:pic>
+      <p:sp>
+        <p:nvSpPr>
+          <p:cNvPr id="8" name="Arrow: Right 7">
+            <a:extLst>
+              <a:ext uri="{FF2B5EF4-FFF2-40B4-BE49-F238E27FC236}">
+                <a16:creationId xmlns:a16="http://schemas.microsoft.com/office/drawing/2014/main" id="{DD17BDF1-ECA2-4066-84B6-4B3EB6D4F6A8}"/>
+              </a:ext>
+            </a:extLst>
+          </p:cNvPr>
+          <p:cNvSpPr/>
+          <p:nvPr/>
+        </p:nvSpPr>
+        <p:spPr>
+          <a:xfrm rot="20049201">
+            <a:off x="5242138" y="4458835"/>
+            <a:ext cx="1196301" cy="393388"/>
+          </a:xfrm>
+          <a:prstGeom prst="rightArrow">
+            <a:avLst/>
+          </a:prstGeom>
+          <a:solidFill>
+            <a:srgbClr val="FF0000"/>
+          </a:solidFill>
+        </p:spPr>
+        <p:style>
+          <a:lnRef idx="2">
+            <a:schemeClr val="accent1">
+              <a:shade val="50000"/>
+            </a:schemeClr>
+          </a:lnRef>
+          <a:fillRef idx="1">
+            <a:schemeClr val="accent1"/>
+          </a:fillRef>
+          <a:effectRef idx="0">
+            <a:schemeClr val="accent1"/>
+          </a:effectRef>
+          <a:fontRef idx="minor">
+            <a:schemeClr val="lt1"/>
+          </a:fontRef>
+        </p:style>
+        <p:txBody>
+          <a:bodyPr rtlCol="0" anchor="ctr"/>
+          <a:lstStyle/>
+          <a:p>
+            <a:pPr marL="0" marR="0" lvl="0" indent="0" algn="ctr" defTabSz="914400" rtl="0" eaLnBrk="1" fontAlgn="auto" latinLnBrk="0" hangingPunct="1">
+              <a:lnSpc>
+                <a:spcPct val="100000"/>
+              </a:lnSpc>
+              <a:spcBef>
+                <a:spcPts val="0"/>
+              </a:spcBef>
+              <a:spcAft>
+                <a:spcPts val="0"/>
+              </a:spcAft>
+              <a:buClrTx/>
+              <a:buSzTx/>
+              <a:buFontTx/>
+              <a:buNone/>
+              <a:tabLst/>
+              <a:defRPr/>
+            </a:pPr>
+            <a:endParaRPr kumimoji="0" lang="en-US" sz="1800" b="0" i="0" u="none" strike="noStrike" kern="1200" cap="none" spc="0" normalizeH="0" baseline="0" noProof="0">
+              <a:ln>
+                <a:noFill/>
+              </a:ln>
+              <a:solidFill>
+                <a:prstClr val="white"/>
+              </a:solidFill>
+              <a:effectLst/>
+              <a:uLnTx/>
+              <a:uFillTx/>
+              <a:latin typeface="Market_Deco"/>
+              <a:ea typeface="+mn-ea"/>
+              <a:cs typeface="+mn-cs"/>
+            </a:endParaRPr>
+          </a:p>
+        </p:txBody>
+      </p:sp>
+    </p:spTree>
+    <p:extLst>
+      <p:ext uri="{BB962C8B-B14F-4D97-AF65-F5344CB8AC3E}">
+        <p14:creationId xmlns:p14="http://schemas.microsoft.com/office/powerpoint/2010/main" val="1872663745"/>
+      </p:ext>
+    </p:extLst>
+  </p:cSld>
+  <p:clrMapOvr>
+    <a:masterClrMapping/>
+  </p:clrMapOvr>
+  <p:timing>
+    <p:tnLst>
+      <p:par>
+        <p:cTn id="1" dur="indefinite" restart="never" nodeType="tmRoot">
+          <p:childTnLst>
+            <p:seq concurrent="1" nextAc="seek">
+              <p:cTn id="2" dur="indefinite" nodeType="mainSeq">
+                <p:childTnLst>
+                  <p:par>
+                    <p:cTn id="3" fill="hold">
+                      <p:stCondLst>
+                        <p:cond delay="indefinite"/>
+                      </p:stCondLst>
+                      <p:childTnLst>
+                        <p:par>
+                          <p:cTn id="4" fill="hold">
+                            <p:stCondLst>
+                              <p:cond delay="0"/>
+                            </p:stCondLst>
+                            <p:childTnLst>
+                              <p:par>
+                                <p:cTn id="5" presetID="10" presetClass="entr" presetSubtype="0" fill="hold" nodeType="clickEffect">
+                                  <p:stCondLst>
+                                    <p:cond delay="0"/>
+                                  </p:stCondLst>
+                                  <p:childTnLst>
+                                    <p:set>
+                                      <p:cBhvr>
+                                        <p:cTn id="6" dur="1" fill="hold">
+                                          <p:stCondLst>
+                                            <p:cond delay="0"/>
+                                          </p:stCondLst>
+                                        </p:cTn>
+                                        <p:tgtEl>
+                                          <p:spTgt spid="3"/>
+                                        </p:tgtEl>
+                                        <p:attrNameLst>
+                                          <p:attrName>style.visibility</p:attrName>
+                                        </p:attrNameLst>
+                                      </p:cBhvr>
+                                      <p:to>
+                                        <p:strVal val="visible"/>
+                                      </p:to>
+                                    </p:set>
+                                    <p:animEffect transition="in" filter="fade">
+                                      <p:cBhvr>
+                                        <p:cTn id="7" dur="500"/>
+                                        <p:tgtEl>
+                                          <p:spTgt spid="3"/>
+                                        </p:tgtEl>
+                                      </p:cBhvr>
+                                    </p:animEffect>
+                                  </p:childTnLst>
+                                </p:cTn>
+                              </p:par>
+                            </p:childTnLst>
+                          </p:cTn>
+                        </p:par>
+                      </p:childTnLst>
+                    </p:cTn>
+                  </p:par>
+                  <p:par>
+                    <p:cTn id="8" fill="hold">
+                      <p:stCondLst>
+                        <p:cond delay="indefinite"/>
+                      </p:stCondLst>
+                      <p:childTnLst>
+                        <p:par>
+                          <p:cTn id="9" fill="hold">
+                            <p:stCondLst>
+                              <p:cond delay="0"/>
+                            </p:stCondLst>
+                            <p:childTnLst>
+                              <p:par>
+                                <p:cTn id="10" presetID="1" presetClass="entr" presetSubtype="0" fill="hold" grpId="0" nodeType="clickEffect">
+                                  <p:stCondLst>
+                                    <p:cond delay="0"/>
+                                  </p:stCondLst>
+                                  <p:childTnLst>
+                                    <p:set>
+                                      <p:cBhvr>
+                                        <p:cTn id="11" dur="1" fill="hold">
+                                          <p:stCondLst>
+                                            <p:cond delay="0"/>
+                                          </p:stCondLst>
+                                        </p:cTn>
+                                        <p:tgtEl>
+                                          <p:spTgt spid="6"/>
+                                        </p:tgtEl>
+                                        <p:attrNameLst>
+                                          <p:attrName>style.visibility</p:attrName>
+                                        </p:attrNameLst>
+                                      </p:cBhvr>
+                                      <p:to>
+                                        <p:strVal val="visible"/>
+                                      </p:to>
+                                    </p:set>
+                                  </p:childTnLst>
+                                </p:cTn>
+                              </p:par>
+                              <p:par>
+                                <p:cTn id="12" presetID="1" presetClass="entr" presetSubtype="0" fill="hold" grpId="0" nodeType="withEffect">
+                                  <p:stCondLst>
+                                    <p:cond delay="0"/>
+                                  </p:stCondLst>
+                                  <p:childTnLst>
+                                    <p:set>
+                                      <p:cBhvr>
+                                        <p:cTn id="13" dur="1" fill="hold">
+                                          <p:stCondLst>
+                                            <p:cond delay="0"/>
+                                          </p:stCondLst>
+                                        </p:cTn>
+                                        <p:tgtEl>
+                                          <p:spTgt spid="8"/>
+                                        </p:tgtEl>
+                                        <p:attrNameLst>
+                                          <p:attrName>style.visibility</p:attrName>
+                                        </p:attrNameLst>
+                                      </p:cBhvr>
+                                      <p:to>
+                                        <p:strVal val="visible"/>
+                                      </p:to>
+                                    </p:set>
+                                  </p:childTnLst>
+                                </p:cTn>
+                              </p:par>
+                              <p:par>
+                                <p:cTn id="14" presetID="1" presetClass="entr" presetSubtype="0" fill="hold" nodeType="withEffect">
+                                  <p:stCondLst>
+                                    <p:cond delay="0"/>
+                                  </p:stCondLst>
+                                  <p:childTnLst>
+                                    <p:set>
+                                      <p:cBhvr>
+                                        <p:cTn id="15" dur="1" fill="hold">
+                                          <p:stCondLst>
+                                            <p:cond delay="0"/>
+                                          </p:stCondLst>
+                                        </p:cTn>
+                                        <p:tgtEl>
+                                          <p:spTgt spid="7"/>
+                                        </p:tgtEl>
+                                        <p:attrNameLst>
+                                          <p:attrName>style.visibility</p:attrName>
+                                        </p:attrNameLst>
+                                      </p:cBhvr>
+                                      <p:to>
+                                        <p:strVal val="visible"/>
+                                      </p:to>
+                                    </p:set>
+                                  </p:childTnLst>
+                                </p:cTn>
+                              </p:par>
+                            </p:childTnLst>
+                          </p:cTn>
+                        </p:par>
+                      </p:childTnLst>
+                    </p:cTn>
+                  </p:par>
+                  <p:par>
+                    <p:cTn id="16" fill="hold">
+                      <p:stCondLst>
+                        <p:cond delay="indefinite"/>
+                      </p:stCondLst>
+                      <p:childTnLst>
+                        <p:par>
+                          <p:cTn id="17" fill="hold">
+                            <p:stCondLst>
+                              <p:cond delay="0"/>
+                            </p:stCondLst>
+                            <p:childTnLst>
+                              <p:par>
+                                <p:cTn id="18" presetID="1" presetClass="exit" presetSubtype="0" fill="hold" grpId="1" nodeType="clickEffect">
+                                  <p:stCondLst>
+                                    <p:cond delay="0"/>
+                                  </p:stCondLst>
+                                  <p:childTnLst>
+                                    <p:set>
+                                      <p:cBhvr>
+                                        <p:cTn id="19" dur="1" fill="hold">
+                                          <p:stCondLst>
+                                            <p:cond delay="0"/>
+                                          </p:stCondLst>
+                                        </p:cTn>
+                                        <p:tgtEl>
+                                          <p:spTgt spid="6"/>
+                                        </p:tgtEl>
+                                        <p:attrNameLst>
+                                          <p:attrName>style.visibility</p:attrName>
+                                        </p:attrNameLst>
+                                      </p:cBhvr>
+                                      <p:to>
+                                        <p:strVal val="hidden"/>
+                                      </p:to>
+                                    </p:set>
+                                  </p:childTnLst>
+                                </p:cTn>
+                              </p:par>
+                              <p:par>
+                                <p:cTn id="20" presetID="1" presetClass="exit" presetSubtype="0" fill="hold" grpId="1" nodeType="withEffect">
+                                  <p:stCondLst>
+                                    <p:cond delay="0"/>
+                                  </p:stCondLst>
+                                  <p:childTnLst>
+                                    <p:set>
+                                      <p:cBhvr>
+                                        <p:cTn id="21" dur="1" fill="hold">
+                                          <p:stCondLst>
+                                            <p:cond delay="0"/>
+                                          </p:stCondLst>
+                                        </p:cTn>
+                                        <p:tgtEl>
+                                          <p:spTgt spid="8"/>
+                                        </p:tgtEl>
+                                        <p:attrNameLst>
+                                          <p:attrName>style.visibility</p:attrName>
+                                        </p:attrNameLst>
+                                      </p:cBhvr>
+                                      <p:to>
+                                        <p:strVal val="hidden"/>
+                                      </p:to>
+                                    </p:set>
+                                  </p:childTnLst>
+                                </p:cTn>
+                              </p:par>
+                              <p:par>
+                                <p:cTn id="22" presetID="1" presetClass="exit" presetSubtype="0" fill="hold" nodeType="withEffect">
+                                  <p:stCondLst>
+                                    <p:cond delay="0"/>
+                                  </p:stCondLst>
+                                  <p:childTnLst>
+                                    <p:set>
+                                      <p:cBhvr>
+                                        <p:cTn id="23" dur="1" fill="hold">
+                                          <p:stCondLst>
+                                            <p:cond delay="0"/>
+                                          </p:stCondLst>
+                                        </p:cTn>
+                                        <p:tgtEl>
+                                          <p:spTgt spid="7"/>
+                                        </p:tgtEl>
+                                        <p:attrNameLst>
+                                          <p:attrName>style.visibility</p:attrName>
+                                        </p:attrNameLst>
+                                      </p:cBhvr>
+                                      <p:to>
+                                        <p:strVal val="hidden"/>
+                                      </p:to>
+                                    </p:set>
+                                  </p:childTnLst>
+                                </p:cTn>
+                              </p:par>
+                            </p:childTnLst>
+                          </p:cTn>
+                        </p:par>
+                      </p:childTnLst>
+                    </p:cTn>
+                  </p:par>
+                  <p:par>
+                    <p:cTn id="24" fill="hold">
+                      <p:stCondLst>
+                        <p:cond delay="indefinite"/>
+                      </p:stCondLst>
+                      <p:childTnLst>
+                        <p:par>
+                          <p:cTn id="25" fill="hold">
+                            <p:stCondLst>
+                              <p:cond delay="0"/>
+                            </p:stCondLst>
+                            <p:childTnLst>
+                              <p:par>
+                                <p:cTn id="26" presetID="1" presetClass="entr" presetSubtype="0" fill="hold" nodeType="clickEffect">
+                                  <p:stCondLst>
+                                    <p:cond delay="0"/>
+                                  </p:stCondLst>
+                                  <p:childTnLst>
+                                    <p:set>
+                                      <p:cBhvr>
+                                        <p:cTn id="27" dur="1" fill="hold">
+                                          <p:stCondLst>
+                                            <p:cond delay="0"/>
+                                          </p:stCondLst>
+                                        </p:cTn>
+                                        <p:tgtEl>
+                                          <p:spTgt spid="5"/>
+                                        </p:tgtEl>
+                                        <p:attrNameLst>
+                                          <p:attrName>style.visibility</p:attrName>
+                                        </p:attrNameLst>
+                                      </p:cBhvr>
+                                      <p:to>
+                                        <p:strVal val="visible"/>
+                                      </p:to>
+                                    </p:set>
+                                  </p:childTnLst>
+                                </p:cTn>
+                              </p:par>
+                            </p:childTnLst>
+                          </p:cTn>
+                        </p:par>
+                      </p:childTnLst>
+                    </p:cTn>
+                  </p:par>
+                </p:childTnLst>
+              </p:cTn>
+              <p:prevCondLst>
+                <p:cond evt="onPrev" delay="0">
+                  <p:tgtEl>
+                    <p:sldTgt/>
+                  </p:tgtEl>
+                </p:cond>
+              </p:prevCondLst>
+              <p:nextCondLst>
+                <p:cond evt="onNext" delay="0">
+                  <p:tgtEl>
+                    <p:sldTgt/>
+                  </p:tgtEl>
+                </p:cond>
+              </p:nextCondLst>
+            </p:seq>
+          </p:childTnLst>
+        </p:cTn>
+      </p:par>
+    </p:tnLst>
+    <p:bldLst>
+      <p:bldP spid="6" grpId="0" animBg="1"/>
+      <p:bldP spid="6" grpId="1" animBg="1"/>
+      <p:bldP spid="8" grpId="0" animBg="1"/>
+      <p:bldP spid="8" grpId="1" animBg="1"/>
+    </p:bldLst>
+  </p:timing>
+</p:sld>
+</file>
+
+<file path=ppt/slides/slide38.xml><?xml version="1.0" encoding="utf-8"?>
+<p:sld xmlns:a="http://schemas.openxmlformats.org/drawingml/2006/main" xmlns:r="http://schemas.openxmlformats.org/officeDocument/2006/relationships" xmlns:p="http://schemas.openxmlformats.org/presentationml/2006/main">
   <p:cSld name="Slide 35">
     <p:bg>
       <p:bgPr>
@@ -26515,7 +29520,7 @@
 </p:sld>
 </file>
 
-<file path=ppt/slides/slide37.xml><?xml version="1.0" encoding="utf-8"?>
+<file path=ppt/slides/slide39.xml><?xml version="1.0" encoding="utf-8"?>
 <p:sld xmlns:a="http://schemas.openxmlformats.org/drawingml/2006/main" xmlns:r="http://schemas.openxmlformats.org/officeDocument/2006/relationships" xmlns:p="http://schemas.openxmlformats.org/presentationml/2006/main">
   <p:cSld name="Slide 36">
     <p:bg>
@@ -27071,660 +30076,6 @@
               <a:t>10   Read the execution plan. Reach past EF Core when it earns it.</a:t>
             </a:r>
             <a:endParaRPr lang="en-US" sz="1500" dirty="0"/>
-          </a:p>
-        </p:txBody>
-      </p:sp>
-    </p:spTree>
-  </p:cSld>
-  <p:clrMapOvr>
-    <a:masterClrMapping/>
-  </p:clrMapOvr>
-</p:sld>
-</file>
-
-<file path=ppt/slides/slide38.xml><?xml version="1.0" encoding="utf-8"?>
-<p:sld xmlns:a="http://schemas.openxmlformats.org/drawingml/2006/main" xmlns:r="http://schemas.openxmlformats.org/officeDocument/2006/relationships" xmlns:p="http://schemas.openxmlformats.org/presentationml/2006/main">
-  <p:cSld name="Slide 37">
-    <p:bg>
-      <p:bgPr>
-        <a:solidFill>
-          <a:srgbClr val="FFFFFF"/>
-        </a:solidFill>
-        <a:effectLst/>
-      </p:bgPr>
-    </p:bg>
-    <p:spTree>
-      <p:nvGrpSpPr>
-        <p:cNvPr id="1" name=""/>
-        <p:cNvGrpSpPr/>
-        <p:nvPr/>
-      </p:nvGrpSpPr>
-      <p:grpSpPr>
-        <a:xfrm>
-          <a:off x="0" y="0"/>
-          <a:ext cx="0" cy="0"/>
-          <a:chOff x="0" y="0"/>
-          <a:chExt cx="0" cy="0"/>
-        </a:xfrm>
-      </p:grpSpPr>
-      <p:sp>
-        <p:nvSpPr>
-          <p:cNvPr id="2" name="Shape 0"/>
-          <p:cNvSpPr/>
-          <p:nvPr/>
-        </p:nvSpPr>
-        <p:spPr>
-          <a:xfrm>
-            <a:off x="0" y="0"/>
-            <a:ext cx="960120" cy="6858000"/>
-          </a:xfrm>
-          <a:prstGeom prst="rect">
-            <a:avLst/>
-          </a:prstGeom>
-          <a:solidFill>
-            <a:srgbClr val="F8B400"/>
-          </a:solidFill>
-          <a:ln/>
-        </p:spPr>
-        <p:txBody>
-          <a:bodyPr/>
-          <a:lstStyle/>
-          <a:p>
-            <a:endParaRPr lang="en-US"/>
-          </a:p>
-        </p:txBody>
-      </p:sp>
-      <p:sp>
-        <p:nvSpPr>
-          <p:cNvPr id="3" name="Text 1"/>
-          <p:cNvSpPr/>
-          <p:nvPr/>
-        </p:nvSpPr>
-        <p:spPr>
-          <a:xfrm>
-            <a:off x="1234440" y="502920"/>
-            <a:ext cx="10652760" cy="868680"/>
-          </a:xfrm>
-          <a:prstGeom prst="rect">
-            <a:avLst/>
-          </a:prstGeom>
-          <a:noFill/>
-          <a:ln/>
-        </p:spPr>
-        <p:txBody>
-          <a:bodyPr wrap="square" rtlCol="0" anchor="t"/>
-          <a:lstStyle/>
-          <a:p>
-            <a:pPr marL="0" indent="0">
-              <a:buNone/>
-            </a:pPr>
-            <a:r>
-              <a:rPr lang="en-US" sz="2800" b="1" kern="0" spc="200" dirty="0">
-                <a:solidFill>
-                  <a:srgbClr val="292929"/>
-                </a:solidFill>
-                <a:latin typeface="Arial Black" pitchFamily="34" charset="0"/>
-                <a:ea typeface="Arial Black" pitchFamily="34" charset="-122"/>
-                <a:cs typeface="Arial Black" pitchFamily="34" charset="-120"/>
-              </a:rPr>
-              <a:t>RESOURCES</a:t>
-            </a:r>
-            <a:endParaRPr lang="en-US" sz="2800" dirty="0"/>
-          </a:p>
-        </p:txBody>
-      </p:sp>
-      <p:sp>
-        <p:nvSpPr>
-          <p:cNvPr id="4" name="Text 2"/>
-          <p:cNvSpPr/>
-          <p:nvPr/>
-        </p:nvSpPr>
-        <p:spPr>
-          <a:xfrm>
-            <a:off x="1234440" y="6446520"/>
-            <a:ext cx="8686800" cy="274320"/>
-          </a:xfrm>
-          <a:prstGeom prst="rect">
-            <a:avLst/>
-          </a:prstGeom>
-          <a:noFill/>
-          <a:ln/>
-        </p:spPr>
-        <p:txBody>
-          <a:bodyPr wrap="square" rtlCol="0" anchor="ctr"/>
-          <a:lstStyle/>
-          <a:p>
-            <a:pPr marL="0" indent="0">
-              <a:buNone/>
-            </a:pPr>
-            <a:r>
-              <a:rPr lang="en-US" sz="900" dirty="0">
-                <a:solidFill>
-                  <a:srgbClr val="808080"/>
-                </a:solidFill>
-                <a:latin typeface="Arial" pitchFamily="34" charset="0"/>
-                <a:ea typeface="Arial" pitchFamily="34" charset="-122"/>
-                <a:cs typeface="Arial" pitchFamily="34" charset="-120"/>
-              </a:rPr>
-              <a:t>EF CORE SECRETS  •  CHRIS WOODRUFF  •  intelligently.dev</a:t>
-            </a:r>
-            <a:endParaRPr lang="en-US" sz="900" dirty="0"/>
-          </a:p>
-        </p:txBody>
-      </p:sp>
-      <p:sp>
-        <p:nvSpPr>
-          <p:cNvPr id="5" name="Text 3"/>
-          <p:cNvSpPr/>
-          <p:nvPr/>
-        </p:nvSpPr>
-        <p:spPr>
-          <a:xfrm>
-            <a:off x="11475720" y="6446520"/>
-            <a:ext cx="457200" cy="274320"/>
-          </a:xfrm>
-          <a:prstGeom prst="rect">
-            <a:avLst/>
-          </a:prstGeom>
-          <a:noFill/>
-          <a:ln/>
-        </p:spPr>
-        <p:txBody>
-          <a:bodyPr wrap="square" rtlCol="0" anchor="ctr"/>
-          <a:lstStyle/>
-          <a:p>
-            <a:pPr marL="0" indent="0" algn="r">
-              <a:buNone/>
-            </a:pPr>
-            <a:r>
-              <a:rPr lang="en-US" sz="900" dirty="0">
-                <a:solidFill>
-                  <a:srgbClr val="808080"/>
-                </a:solidFill>
-                <a:latin typeface="Arial" pitchFamily="34" charset="0"/>
-                <a:ea typeface="Arial" pitchFamily="34" charset="-122"/>
-                <a:cs typeface="Arial" pitchFamily="34" charset="-120"/>
-              </a:rPr>
-              <a:t>37</a:t>
-            </a:r>
-            <a:endParaRPr lang="en-US" sz="900" dirty="0"/>
-          </a:p>
-        </p:txBody>
-      </p:sp>
-      <p:sp>
-        <p:nvSpPr>
-          <p:cNvPr id="6" name="Text 4"/>
-          <p:cNvSpPr/>
-          <p:nvPr/>
-        </p:nvSpPr>
-        <p:spPr>
-          <a:xfrm>
-            <a:off x="1234440" y="1463040"/>
-            <a:ext cx="10515600" cy="365760"/>
-          </a:xfrm>
-          <a:prstGeom prst="rect">
-            <a:avLst/>
-          </a:prstGeom>
-          <a:noFill/>
-          <a:ln/>
-        </p:spPr>
-        <p:txBody>
-          <a:bodyPr wrap="square" rtlCol="0" anchor="ctr"/>
-          <a:lstStyle/>
-          <a:p>
-            <a:pPr marL="0" indent="0">
-              <a:buNone/>
-            </a:pPr>
-            <a:r>
-              <a:rPr lang="en-US" sz="1300" b="1" kern="0" spc="400" dirty="0">
-                <a:solidFill>
-                  <a:srgbClr val="D89800"/>
-                </a:solidFill>
-                <a:latin typeface="Arial" pitchFamily="34" charset="0"/>
-                <a:ea typeface="Arial" pitchFamily="34" charset="-122"/>
-                <a:cs typeface="Arial" pitchFamily="34" charset="-120"/>
-              </a:rPr>
-              <a:t>SAMPLE CODE</a:t>
-            </a:r>
-            <a:endParaRPr lang="en-US" sz="1300" dirty="0"/>
-          </a:p>
-        </p:txBody>
-      </p:sp>
-      <p:sp>
-        <p:nvSpPr>
-          <p:cNvPr id="7" name="Text 5"/>
-          <p:cNvSpPr/>
-          <p:nvPr/>
-        </p:nvSpPr>
-        <p:spPr>
-          <a:xfrm>
-            <a:off x="1234440" y="1828800"/>
-            <a:ext cx="10515600" cy="457200"/>
-          </a:xfrm>
-          <a:prstGeom prst="rect">
-            <a:avLst/>
-          </a:prstGeom>
-          <a:noFill/>
-          <a:ln/>
-        </p:spPr>
-        <p:txBody>
-          <a:bodyPr wrap="square" rtlCol="0" anchor="ctr"/>
-          <a:lstStyle/>
-          <a:p>
-            <a:pPr marL="0" indent="0">
-              <a:buNone/>
-            </a:pPr>
-            <a:r>
-              <a:rPr lang="en-US" sz="2200" b="1" dirty="0">
-                <a:solidFill>
-                  <a:srgbClr val="292929"/>
-                </a:solidFill>
-                <a:latin typeface="Consolas" pitchFamily="34" charset="0"/>
-                <a:ea typeface="Consolas" pitchFamily="34" charset="-122"/>
-                <a:cs typeface="Consolas" pitchFamily="34" charset="-120"/>
-              </a:rPr>
-              <a:t>github.com/cwoodruff/EFCoreDemos</a:t>
-            </a:r>
-            <a:endParaRPr lang="en-US" sz="2200" dirty="0"/>
-          </a:p>
-        </p:txBody>
-      </p:sp>
-      <p:sp>
-        <p:nvSpPr>
-          <p:cNvPr id="8" name="Text 6"/>
-          <p:cNvSpPr/>
-          <p:nvPr/>
-        </p:nvSpPr>
-        <p:spPr>
-          <a:xfrm>
-            <a:off x="1234440" y="2651760"/>
-            <a:ext cx="10515600" cy="365760"/>
-          </a:xfrm>
-          <a:prstGeom prst="rect">
-            <a:avLst/>
-          </a:prstGeom>
-          <a:noFill/>
-          <a:ln/>
-        </p:spPr>
-        <p:txBody>
-          <a:bodyPr wrap="square" rtlCol="0" anchor="ctr"/>
-          <a:lstStyle/>
-          <a:p>
-            <a:pPr marL="0" indent="0">
-              <a:buNone/>
-            </a:pPr>
-            <a:r>
-              <a:rPr lang="en-US" sz="1300" b="1" kern="0" spc="400" dirty="0">
-                <a:solidFill>
-                  <a:srgbClr val="D89800"/>
-                </a:solidFill>
-                <a:latin typeface="Arial" pitchFamily="34" charset="0"/>
-                <a:ea typeface="Arial" pitchFamily="34" charset="-122"/>
-                <a:cs typeface="Arial" pitchFamily="34" charset="-120"/>
-              </a:rPr>
-              <a:t>OFFICIAL DOCS</a:t>
-            </a:r>
-            <a:endParaRPr lang="en-US" sz="1300" dirty="0"/>
-          </a:p>
-        </p:txBody>
-      </p:sp>
-      <p:sp>
-        <p:nvSpPr>
-          <p:cNvPr id="9" name="Text 7"/>
-          <p:cNvSpPr/>
-          <p:nvPr/>
-        </p:nvSpPr>
-        <p:spPr>
-          <a:xfrm>
-            <a:off x="1234440" y="3017520"/>
-            <a:ext cx="10515600" cy="1280160"/>
-          </a:xfrm>
-          <a:prstGeom prst="rect">
-            <a:avLst/>
-          </a:prstGeom>
-          <a:noFill/>
-          <a:ln/>
-        </p:spPr>
-        <p:txBody>
-          <a:bodyPr wrap="square" rtlCol="0" anchor="ctr"/>
-          <a:lstStyle/>
-          <a:p>
-            <a:pPr marL="0" indent="0">
-              <a:spcAft>
-                <a:spcPts val="400"/>
-              </a:spcAft>
-              <a:buNone/>
-            </a:pPr>
-            <a:r>
-              <a:rPr lang="en-US" sz="1600" dirty="0">
-                <a:solidFill>
-                  <a:srgbClr val="292929"/>
-                </a:solidFill>
-                <a:latin typeface="Consolas" pitchFamily="34" charset="0"/>
-                <a:ea typeface="Consolas" pitchFamily="34" charset="-122"/>
-                <a:cs typeface="Consolas" pitchFamily="34" charset="-120"/>
-              </a:rPr>
-              <a:t>learn.microsoft.com/ef/core/</a:t>
-            </a:r>
-            <a:endParaRPr lang="en-US" sz="1600" dirty="0"/>
-          </a:p>
-          <a:p>
-            <a:pPr marL="0" indent="0">
-              <a:spcAft>
-                <a:spcPts val="400"/>
-              </a:spcAft>
-              <a:buNone/>
-            </a:pPr>
-            <a:r>
-              <a:rPr lang="en-US" sz="1600" dirty="0">
-                <a:solidFill>
-                  <a:srgbClr val="292929"/>
-                </a:solidFill>
-                <a:latin typeface="Consolas" pitchFamily="34" charset="0"/>
-                <a:ea typeface="Consolas" pitchFamily="34" charset="-122"/>
-                <a:cs typeface="Consolas" pitchFamily="34" charset="-120"/>
-              </a:rPr>
-              <a:t>devblogs.microsoft.com/dotnet/tag/entity-framework/</a:t>
-            </a:r>
-            <a:endParaRPr lang="en-US" sz="1600" dirty="0"/>
-          </a:p>
-          <a:p>
-            <a:pPr marL="0" indent="0">
-              <a:spcAft>
-                <a:spcPts val="400"/>
-              </a:spcAft>
-              <a:buNone/>
-            </a:pPr>
-            <a:r>
-              <a:rPr lang="en-US" sz="1600" dirty="0">
-                <a:solidFill>
-                  <a:srgbClr val="292929"/>
-                </a:solidFill>
-                <a:latin typeface="Consolas" pitchFamily="34" charset="0"/>
-                <a:ea typeface="Consolas" pitchFamily="34" charset="-122"/>
-                <a:cs typeface="Consolas" pitchFamily="34" charset="-120"/>
-              </a:rPr>
-              <a:t>github.com/dotnet/efcore</a:t>
-            </a:r>
-            <a:endParaRPr lang="en-US" sz="1600" dirty="0"/>
-          </a:p>
-        </p:txBody>
-      </p:sp>
-      <p:sp>
-        <p:nvSpPr>
-          <p:cNvPr id="10" name="Text 8"/>
-          <p:cNvSpPr/>
-          <p:nvPr/>
-        </p:nvSpPr>
-        <p:spPr>
-          <a:xfrm>
-            <a:off x="1234440" y="4480560"/>
-            <a:ext cx="10515600" cy="365760"/>
-          </a:xfrm>
-          <a:prstGeom prst="rect">
-            <a:avLst/>
-          </a:prstGeom>
-          <a:noFill/>
-          <a:ln/>
-        </p:spPr>
-        <p:txBody>
-          <a:bodyPr wrap="square" rtlCol="0" anchor="ctr"/>
-          <a:lstStyle/>
-          <a:p>
-            <a:pPr marL="0" indent="0">
-              <a:buNone/>
-            </a:pPr>
-            <a:r>
-              <a:rPr lang="en-US" sz="1300" b="1" kern="0" spc="400" dirty="0">
-                <a:solidFill>
-                  <a:srgbClr val="D89800"/>
-                </a:solidFill>
-                <a:latin typeface="Arial" pitchFamily="34" charset="0"/>
-                <a:ea typeface="Arial" pitchFamily="34" charset="-122"/>
-                <a:cs typeface="Arial" pitchFamily="34" charset="-120"/>
-              </a:rPr>
-              <a:t>GO DEEPER</a:t>
-            </a:r>
-            <a:endParaRPr lang="en-US" sz="1300" dirty="0"/>
-          </a:p>
-        </p:txBody>
-      </p:sp>
-      <p:sp>
-        <p:nvSpPr>
-          <p:cNvPr id="11" name="Text 9"/>
-          <p:cNvSpPr/>
-          <p:nvPr/>
-        </p:nvSpPr>
-        <p:spPr>
-          <a:xfrm>
-            <a:off x="1234440" y="4846320"/>
-            <a:ext cx="10515600" cy="914400"/>
-          </a:xfrm>
-          <a:prstGeom prst="rect">
-            <a:avLst/>
-          </a:prstGeom>
-          <a:noFill/>
-          <a:ln/>
-        </p:spPr>
-        <p:txBody>
-          <a:bodyPr wrap="square" rtlCol="0" anchor="ctr"/>
-          <a:lstStyle/>
-          <a:p>
-            <a:pPr marL="0" indent="0">
-              <a:spcAft>
-                <a:spcPts val="400"/>
-              </a:spcAft>
-              <a:buNone/>
-            </a:pPr>
-            <a:r>
-              <a:rPr lang="en-US" sz="1500" dirty="0">
-                <a:solidFill>
-                  <a:srgbClr val="292929"/>
-                </a:solidFill>
-                <a:latin typeface="Arial" pitchFamily="34" charset="0"/>
-                <a:ea typeface="Arial" pitchFamily="34" charset="-122"/>
-                <a:cs typeface="Arial" pitchFamily="34" charset="-120"/>
-              </a:rPr>
-              <a:t>intelligently.dev — Mastering Entity Framework Core (full course)</a:t>
-            </a:r>
-            <a:endParaRPr lang="en-US" sz="1500" dirty="0"/>
-          </a:p>
-          <a:p>
-            <a:pPr marL="0" indent="0">
-              <a:spcAft>
-                <a:spcPts val="400"/>
-              </a:spcAft>
-              <a:buNone/>
-            </a:pPr>
-            <a:r>
-              <a:rPr lang="en-US" sz="1500" dirty="0">
-                <a:solidFill>
-                  <a:srgbClr val="292929"/>
-                </a:solidFill>
-                <a:latin typeface="Arial" pitchFamily="34" charset="0"/>
-                <a:ea typeface="Arial" pitchFamily="34" charset="-122"/>
-                <a:cs typeface="Arial" pitchFamily="34" charset="-120"/>
-              </a:rPr>
-              <a:t>Beyond Boundaries: C# Network Programming (book)</a:t>
-            </a:r>
-            <a:endParaRPr lang="en-US" sz="1500" dirty="0"/>
-          </a:p>
-        </p:txBody>
-      </p:sp>
-    </p:spTree>
-  </p:cSld>
-  <p:clrMapOvr>
-    <a:masterClrMapping/>
-  </p:clrMapOvr>
-</p:sld>
-</file>
-
-<file path=ppt/slides/slide39.xml><?xml version="1.0" encoding="utf-8"?>
-<p:sld xmlns:a="http://schemas.openxmlformats.org/drawingml/2006/main" xmlns:r="http://schemas.openxmlformats.org/officeDocument/2006/relationships" xmlns:p="http://schemas.openxmlformats.org/presentationml/2006/main">
-  <p:cSld name="Slide 38">
-    <p:bg>
-      <p:bgPr>
-        <a:solidFill>
-          <a:srgbClr val="000000"/>
-        </a:solidFill>
-        <a:effectLst/>
-      </p:bgPr>
-    </p:bg>
-    <p:spTree>
-      <p:nvGrpSpPr>
-        <p:cNvPr id="1" name=""/>
-        <p:cNvGrpSpPr/>
-        <p:nvPr/>
-      </p:nvGrpSpPr>
-      <p:grpSpPr>
-        <a:xfrm>
-          <a:off x="0" y="0"/>
-          <a:ext cx="0" cy="0"/>
-          <a:chOff x="0" y="0"/>
-          <a:chExt cx="0" cy="0"/>
-        </a:xfrm>
-      </p:grpSpPr>
-      <p:sp>
-        <p:nvSpPr>
-          <p:cNvPr id="2" name="Shape 0"/>
-          <p:cNvSpPr/>
-          <p:nvPr/>
-        </p:nvSpPr>
-        <p:spPr>
-          <a:xfrm>
-            <a:off x="0" y="0"/>
-            <a:ext cx="960120" cy="6858000"/>
-          </a:xfrm>
-          <a:prstGeom prst="rect">
-            <a:avLst/>
-          </a:prstGeom>
-          <a:solidFill>
-            <a:srgbClr val="F8B400"/>
-          </a:solidFill>
-          <a:ln/>
-        </p:spPr>
-        <p:txBody>
-          <a:bodyPr/>
-          <a:lstStyle/>
-          <a:p>
-            <a:endParaRPr lang="en-US"/>
-          </a:p>
-        </p:txBody>
-      </p:sp>
-      <p:sp>
-        <p:nvSpPr>
-          <p:cNvPr id="3" name="Text 1"/>
-          <p:cNvSpPr/>
-          <p:nvPr/>
-        </p:nvSpPr>
-        <p:spPr>
-          <a:xfrm>
-            <a:off x="1371600" y="2286000"/>
-            <a:ext cx="10058400" cy="1371600"/>
-          </a:xfrm>
-          <a:prstGeom prst="rect">
-            <a:avLst/>
-          </a:prstGeom>
-          <a:noFill/>
-          <a:ln/>
-        </p:spPr>
-        <p:txBody>
-          <a:bodyPr wrap="square" rtlCol="0" anchor="ctr"/>
-          <a:lstStyle/>
-          <a:p>
-            <a:pPr marL="0" indent="0" algn="ctr">
-              <a:buNone/>
-            </a:pPr>
-            <a:r>
-              <a:rPr lang="en-US" sz="9600" b="1" kern="0" spc="400" dirty="0">
-                <a:solidFill>
-                  <a:srgbClr val="F8B400"/>
-                </a:solidFill>
-                <a:latin typeface="Arial Black" pitchFamily="34" charset="0"/>
-                <a:ea typeface="Arial Black" pitchFamily="34" charset="-122"/>
-                <a:cs typeface="Arial Black" pitchFamily="34" charset="-120"/>
-              </a:rPr>
-              <a:t>QUESTIONS?</a:t>
-            </a:r>
-            <a:endParaRPr lang="en-US" sz="9600" dirty="0"/>
-          </a:p>
-        </p:txBody>
-      </p:sp>
-      <p:sp>
-        <p:nvSpPr>
-          <p:cNvPr id="4" name="Text 2"/>
-          <p:cNvSpPr/>
-          <p:nvPr/>
-        </p:nvSpPr>
-        <p:spPr>
-          <a:xfrm>
-            <a:off x="1371600" y="4114800"/>
-            <a:ext cx="10058400" cy="457200"/>
-          </a:xfrm>
-          <a:prstGeom prst="rect">
-            <a:avLst/>
-          </a:prstGeom>
-          <a:noFill/>
-          <a:ln/>
-        </p:spPr>
-        <p:txBody>
-          <a:bodyPr wrap="square" rtlCol="0" anchor="ctr"/>
-          <a:lstStyle/>
-          <a:p>
-            <a:pPr marL="0" indent="0" algn="ctr">
-              <a:buNone/>
-            </a:pPr>
-            <a:r>
-              <a:rPr lang="en-US" sz="1800" dirty="0">
-                <a:solidFill>
-                  <a:srgbClr val="FFFFFF"/>
-                </a:solidFill>
-                <a:latin typeface="Arial" pitchFamily="34" charset="0"/>
-                <a:ea typeface="Arial" pitchFamily="34" charset="-122"/>
-                <a:cs typeface="Arial" pitchFamily="34" charset="-120"/>
-              </a:rPr>
-              <a:t>woodruff.dev  •  @woodruff.dev on Bluesky  •  cwoodruff@live.com</a:t>
-            </a:r>
-            <a:endParaRPr lang="en-US" sz="1800" dirty="0"/>
-          </a:p>
-        </p:txBody>
-      </p:sp>
-      <p:sp>
-        <p:nvSpPr>
-          <p:cNvPr id="5" name="Text 3"/>
-          <p:cNvSpPr/>
-          <p:nvPr/>
-        </p:nvSpPr>
-        <p:spPr>
-          <a:xfrm>
-            <a:off x="1371600" y="4663440"/>
-            <a:ext cx="10058400" cy="365760"/>
-          </a:xfrm>
-          <a:prstGeom prst="rect">
-            <a:avLst/>
-          </a:prstGeom>
-          <a:noFill/>
-          <a:ln/>
-        </p:spPr>
-        <p:txBody>
-          <a:bodyPr wrap="square" rtlCol="0" anchor="ctr"/>
-          <a:lstStyle/>
-          <a:p>
-            <a:pPr marL="0" indent="0" algn="ctr">
-              <a:buNone/>
-            </a:pPr>
-            <a:r>
-              <a:rPr lang="en-US" sz="1400" dirty="0">
-                <a:solidFill>
-                  <a:srgbClr val="F8B400"/>
-                </a:solidFill>
-                <a:latin typeface="Consolas" pitchFamily="34" charset="0"/>
-                <a:ea typeface="Consolas" pitchFamily="34" charset="-122"/>
-                <a:cs typeface="Consolas" pitchFamily="34" charset="-120"/>
-              </a:rPr>
-              <a:t>Sample code: github.com/cwoodruff/EFCoreDemos</a:t>
-            </a:r>
-            <a:endParaRPr lang="en-US" sz="1400" dirty="0"/>
           </a:p>
         </p:txBody>
       </p:sp>
@@ -28284,6 +30635,660 @@
 
 <file path=ppt/slides/slide40.xml><?xml version="1.0" encoding="utf-8"?>
 <p:sld xmlns:a="http://schemas.openxmlformats.org/drawingml/2006/main" xmlns:r="http://schemas.openxmlformats.org/officeDocument/2006/relationships" xmlns:p="http://schemas.openxmlformats.org/presentationml/2006/main">
+  <p:cSld name="Slide 37">
+    <p:bg>
+      <p:bgPr>
+        <a:solidFill>
+          <a:srgbClr val="FFFFFF"/>
+        </a:solidFill>
+        <a:effectLst/>
+      </p:bgPr>
+    </p:bg>
+    <p:spTree>
+      <p:nvGrpSpPr>
+        <p:cNvPr id="1" name=""/>
+        <p:cNvGrpSpPr/>
+        <p:nvPr/>
+      </p:nvGrpSpPr>
+      <p:grpSpPr>
+        <a:xfrm>
+          <a:off x="0" y="0"/>
+          <a:ext cx="0" cy="0"/>
+          <a:chOff x="0" y="0"/>
+          <a:chExt cx="0" cy="0"/>
+        </a:xfrm>
+      </p:grpSpPr>
+      <p:sp>
+        <p:nvSpPr>
+          <p:cNvPr id="2" name="Shape 0"/>
+          <p:cNvSpPr/>
+          <p:nvPr/>
+        </p:nvSpPr>
+        <p:spPr>
+          <a:xfrm>
+            <a:off x="0" y="0"/>
+            <a:ext cx="960120" cy="6858000"/>
+          </a:xfrm>
+          <a:prstGeom prst="rect">
+            <a:avLst/>
+          </a:prstGeom>
+          <a:solidFill>
+            <a:srgbClr val="F8B400"/>
+          </a:solidFill>
+          <a:ln/>
+        </p:spPr>
+        <p:txBody>
+          <a:bodyPr/>
+          <a:lstStyle/>
+          <a:p>
+            <a:endParaRPr lang="en-US"/>
+          </a:p>
+        </p:txBody>
+      </p:sp>
+      <p:sp>
+        <p:nvSpPr>
+          <p:cNvPr id="3" name="Text 1"/>
+          <p:cNvSpPr/>
+          <p:nvPr/>
+        </p:nvSpPr>
+        <p:spPr>
+          <a:xfrm>
+            <a:off x="1234440" y="502920"/>
+            <a:ext cx="10652760" cy="868680"/>
+          </a:xfrm>
+          <a:prstGeom prst="rect">
+            <a:avLst/>
+          </a:prstGeom>
+          <a:noFill/>
+          <a:ln/>
+        </p:spPr>
+        <p:txBody>
+          <a:bodyPr wrap="square" rtlCol="0" anchor="t"/>
+          <a:lstStyle/>
+          <a:p>
+            <a:pPr marL="0" indent="0">
+              <a:buNone/>
+            </a:pPr>
+            <a:r>
+              <a:rPr lang="en-US" sz="2800" b="1" kern="0" spc="200" dirty="0">
+                <a:solidFill>
+                  <a:srgbClr val="292929"/>
+                </a:solidFill>
+                <a:latin typeface="Arial Black" pitchFamily="34" charset="0"/>
+                <a:ea typeface="Arial Black" pitchFamily="34" charset="-122"/>
+                <a:cs typeface="Arial Black" pitchFamily="34" charset="-120"/>
+              </a:rPr>
+              <a:t>RESOURCES</a:t>
+            </a:r>
+            <a:endParaRPr lang="en-US" sz="2800" dirty="0"/>
+          </a:p>
+        </p:txBody>
+      </p:sp>
+      <p:sp>
+        <p:nvSpPr>
+          <p:cNvPr id="4" name="Text 2"/>
+          <p:cNvSpPr/>
+          <p:nvPr/>
+        </p:nvSpPr>
+        <p:spPr>
+          <a:xfrm>
+            <a:off x="1234440" y="6446520"/>
+            <a:ext cx="8686800" cy="274320"/>
+          </a:xfrm>
+          <a:prstGeom prst="rect">
+            <a:avLst/>
+          </a:prstGeom>
+          <a:noFill/>
+          <a:ln/>
+        </p:spPr>
+        <p:txBody>
+          <a:bodyPr wrap="square" rtlCol="0" anchor="ctr"/>
+          <a:lstStyle/>
+          <a:p>
+            <a:pPr marL="0" indent="0">
+              <a:buNone/>
+            </a:pPr>
+            <a:r>
+              <a:rPr lang="en-US" sz="900" dirty="0">
+                <a:solidFill>
+                  <a:srgbClr val="808080"/>
+                </a:solidFill>
+                <a:latin typeface="Arial" pitchFamily="34" charset="0"/>
+                <a:ea typeface="Arial" pitchFamily="34" charset="-122"/>
+                <a:cs typeface="Arial" pitchFamily="34" charset="-120"/>
+              </a:rPr>
+              <a:t>EF CORE SECRETS  •  CHRIS WOODRUFF  •  intelligently.dev</a:t>
+            </a:r>
+            <a:endParaRPr lang="en-US" sz="900" dirty="0"/>
+          </a:p>
+        </p:txBody>
+      </p:sp>
+      <p:sp>
+        <p:nvSpPr>
+          <p:cNvPr id="5" name="Text 3"/>
+          <p:cNvSpPr/>
+          <p:nvPr/>
+        </p:nvSpPr>
+        <p:spPr>
+          <a:xfrm>
+            <a:off x="11475720" y="6446520"/>
+            <a:ext cx="457200" cy="274320"/>
+          </a:xfrm>
+          <a:prstGeom prst="rect">
+            <a:avLst/>
+          </a:prstGeom>
+          <a:noFill/>
+          <a:ln/>
+        </p:spPr>
+        <p:txBody>
+          <a:bodyPr wrap="square" rtlCol="0" anchor="ctr"/>
+          <a:lstStyle/>
+          <a:p>
+            <a:pPr marL="0" indent="0" algn="r">
+              <a:buNone/>
+            </a:pPr>
+            <a:r>
+              <a:rPr lang="en-US" sz="900" dirty="0">
+                <a:solidFill>
+                  <a:srgbClr val="808080"/>
+                </a:solidFill>
+                <a:latin typeface="Arial" pitchFamily="34" charset="0"/>
+                <a:ea typeface="Arial" pitchFamily="34" charset="-122"/>
+                <a:cs typeface="Arial" pitchFamily="34" charset="-120"/>
+              </a:rPr>
+              <a:t>37</a:t>
+            </a:r>
+            <a:endParaRPr lang="en-US" sz="900" dirty="0"/>
+          </a:p>
+        </p:txBody>
+      </p:sp>
+      <p:sp>
+        <p:nvSpPr>
+          <p:cNvPr id="6" name="Text 4"/>
+          <p:cNvSpPr/>
+          <p:nvPr/>
+        </p:nvSpPr>
+        <p:spPr>
+          <a:xfrm>
+            <a:off x="1234440" y="1463040"/>
+            <a:ext cx="10515600" cy="365760"/>
+          </a:xfrm>
+          <a:prstGeom prst="rect">
+            <a:avLst/>
+          </a:prstGeom>
+          <a:noFill/>
+          <a:ln/>
+        </p:spPr>
+        <p:txBody>
+          <a:bodyPr wrap="square" rtlCol="0" anchor="ctr"/>
+          <a:lstStyle/>
+          <a:p>
+            <a:pPr marL="0" indent="0">
+              <a:buNone/>
+            </a:pPr>
+            <a:r>
+              <a:rPr lang="en-US" sz="1300" b="1" kern="0" spc="400" dirty="0">
+                <a:solidFill>
+                  <a:srgbClr val="D89800"/>
+                </a:solidFill>
+                <a:latin typeface="Arial" pitchFamily="34" charset="0"/>
+                <a:ea typeface="Arial" pitchFamily="34" charset="-122"/>
+                <a:cs typeface="Arial" pitchFamily="34" charset="-120"/>
+              </a:rPr>
+              <a:t>SAMPLE CODE</a:t>
+            </a:r>
+            <a:endParaRPr lang="en-US" sz="1300" dirty="0"/>
+          </a:p>
+        </p:txBody>
+      </p:sp>
+      <p:sp>
+        <p:nvSpPr>
+          <p:cNvPr id="7" name="Text 5"/>
+          <p:cNvSpPr/>
+          <p:nvPr/>
+        </p:nvSpPr>
+        <p:spPr>
+          <a:xfrm>
+            <a:off x="1234440" y="1828800"/>
+            <a:ext cx="10515600" cy="457200"/>
+          </a:xfrm>
+          <a:prstGeom prst="rect">
+            <a:avLst/>
+          </a:prstGeom>
+          <a:noFill/>
+          <a:ln/>
+        </p:spPr>
+        <p:txBody>
+          <a:bodyPr wrap="square" rtlCol="0" anchor="ctr"/>
+          <a:lstStyle/>
+          <a:p>
+            <a:pPr marL="0" indent="0">
+              <a:buNone/>
+            </a:pPr>
+            <a:r>
+              <a:rPr lang="en-US" sz="2200" b="1" dirty="0">
+                <a:solidFill>
+                  <a:srgbClr val="292929"/>
+                </a:solidFill>
+                <a:latin typeface="Consolas" pitchFamily="34" charset="0"/>
+                <a:ea typeface="Consolas" pitchFamily="34" charset="-122"/>
+                <a:cs typeface="Consolas" pitchFamily="34" charset="-120"/>
+              </a:rPr>
+              <a:t>github.com/cwoodruff/EFCoreDemos</a:t>
+            </a:r>
+            <a:endParaRPr lang="en-US" sz="2200" dirty="0"/>
+          </a:p>
+        </p:txBody>
+      </p:sp>
+      <p:sp>
+        <p:nvSpPr>
+          <p:cNvPr id="8" name="Text 6"/>
+          <p:cNvSpPr/>
+          <p:nvPr/>
+        </p:nvSpPr>
+        <p:spPr>
+          <a:xfrm>
+            <a:off x="1234440" y="2651760"/>
+            <a:ext cx="10515600" cy="365760"/>
+          </a:xfrm>
+          <a:prstGeom prst="rect">
+            <a:avLst/>
+          </a:prstGeom>
+          <a:noFill/>
+          <a:ln/>
+        </p:spPr>
+        <p:txBody>
+          <a:bodyPr wrap="square" rtlCol="0" anchor="ctr"/>
+          <a:lstStyle/>
+          <a:p>
+            <a:pPr marL="0" indent="0">
+              <a:buNone/>
+            </a:pPr>
+            <a:r>
+              <a:rPr lang="en-US" sz="1300" b="1" kern="0" spc="400" dirty="0">
+                <a:solidFill>
+                  <a:srgbClr val="D89800"/>
+                </a:solidFill>
+                <a:latin typeface="Arial" pitchFamily="34" charset="0"/>
+                <a:ea typeface="Arial" pitchFamily="34" charset="-122"/>
+                <a:cs typeface="Arial" pitchFamily="34" charset="-120"/>
+              </a:rPr>
+              <a:t>OFFICIAL DOCS</a:t>
+            </a:r>
+            <a:endParaRPr lang="en-US" sz="1300" dirty="0"/>
+          </a:p>
+        </p:txBody>
+      </p:sp>
+      <p:sp>
+        <p:nvSpPr>
+          <p:cNvPr id="9" name="Text 7"/>
+          <p:cNvSpPr/>
+          <p:nvPr/>
+        </p:nvSpPr>
+        <p:spPr>
+          <a:xfrm>
+            <a:off x="1234440" y="3017520"/>
+            <a:ext cx="10515600" cy="1280160"/>
+          </a:xfrm>
+          <a:prstGeom prst="rect">
+            <a:avLst/>
+          </a:prstGeom>
+          <a:noFill/>
+          <a:ln/>
+        </p:spPr>
+        <p:txBody>
+          <a:bodyPr wrap="square" rtlCol="0" anchor="ctr"/>
+          <a:lstStyle/>
+          <a:p>
+            <a:pPr marL="0" indent="0">
+              <a:spcAft>
+                <a:spcPts val="400"/>
+              </a:spcAft>
+              <a:buNone/>
+            </a:pPr>
+            <a:r>
+              <a:rPr lang="en-US" sz="1600" dirty="0">
+                <a:solidFill>
+                  <a:srgbClr val="292929"/>
+                </a:solidFill>
+                <a:latin typeface="Consolas" pitchFamily="34" charset="0"/>
+                <a:ea typeface="Consolas" pitchFamily="34" charset="-122"/>
+                <a:cs typeface="Consolas" pitchFamily="34" charset="-120"/>
+              </a:rPr>
+              <a:t>learn.microsoft.com/ef/core/</a:t>
+            </a:r>
+            <a:endParaRPr lang="en-US" sz="1600" dirty="0"/>
+          </a:p>
+          <a:p>
+            <a:pPr marL="0" indent="0">
+              <a:spcAft>
+                <a:spcPts val="400"/>
+              </a:spcAft>
+              <a:buNone/>
+            </a:pPr>
+            <a:r>
+              <a:rPr lang="en-US" sz="1600" dirty="0">
+                <a:solidFill>
+                  <a:srgbClr val="292929"/>
+                </a:solidFill>
+                <a:latin typeface="Consolas" pitchFamily="34" charset="0"/>
+                <a:ea typeface="Consolas" pitchFamily="34" charset="-122"/>
+                <a:cs typeface="Consolas" pitchFamily="34" charset="-120"/>
+              </a:rPr>
+              <a:t>devblogs.microsoft.com/dotnet/tag/entity-framework/</a:t>
+            </a:r>
+            <a:endParaRPr lang="en-US" sz="1600" dirty="0"/>
+          </a:p>
+          <a:p>
+            <a:pPr marL="0" indent="0">
+              <a:spcAft>
+                <a:spcPts val="400"/>
+              </a:spcAft>
+              <a:buNone/>
+            </a:pPr>
+            <a:r>
+              <a:rPr lang="en-US" sz="1600" dirty="0">
+                <a:solidFill>
+                  <a:srgbClr val="292929"/>
+                </a:solidFill>
+                <a:latin typeface="Consolas" pitchFamily="34" charset="0"/>
+                <a:ea typeface="Consolas" pitchFamily="34" charset="-122"/>
+                <a:cs typeface="Consolas" pitchFamily="34" charset="-120"/>
+              </a:rPr>
+              <a:t>github.com/dotnet/efcore</a:t>
+            </a:r>
+            <a:endParaRPr lang="en-US" sz="1600" dirty="0"/>
+          </a:p>
+        </p:txBody>
+      </p:sp>
+      <p:sp>
+        <p:nvSpPr>
+          <p:cNvPr id="10" name="Text 8"/>
+          <p:cNvSpPr/>
+          <p:nvPr/>
+        </p:nvSpPr>
+        <p:spPr>
+          <a:xfrm>
+            <a:off x="1234440" y="4480560"/>
+            <a:ext cx="10515600" cy="365760"/>
+          </a:xfrm>
+          <a:prstGeom prst="rect">
+            <a:avLst/>
+          </a:prstGeom>
+          <a:noFill/>
+          <a:ln/>
+        </p:spPr>
+        <p:txBody>
+          <a:bodyPr wrap="square" rtlCol="0" anchor="ctr"/>
+          <a:lstStyle/>
+          <a:p>
+            <a:pPr marL="0" indent="0">
+              <a:buNone/>
+            </a:pPr>
+            <a:r>
+              <a:rPr lang="en-US" sz="1300" b="1" kern="0" spc="400" dirty="0">
+                <a:solidFill>
+                  <a:srgbClr val="D89800"/>
+                </a:solidFill>
+                <a:latin typeface="Arial" pitchFamily="34" charset="0"/>
+                <a:ea typeface="Arial" pitchFamily="34" charset="-122"/>
+                <a:cs typeface="Arial" pitchFamily="34" charset="-120"/>
+              </a:rPr>
+              <a:t>GO DEEPER</a:t>
+            </a:r>
+            <a:endParaRPr lang="en-US" sz="1300" dirty="0"/>
+          </a:p>
+        </p:txBody>
+      </p:sp>
+      <p:sp>
+        <p:nvSpPr>
+          <p:cNvPr id="11" name="Text 9"/>
+          <p:cNvSpPr/>
+          <p:nvPr/>
+        </p:nvSpPr>
+        <p:spPr>
+          <a:xfrm>
+            <a:off x="1234440" y="4846320"/>
+            <a:ext cx="10515600" cy="914400"/>
+          </a:xfrm>
+          <a:prstGeom prst="rect">
+            <a:avLst/>
+          </a:prstGeom>
+          <a:noFill/>
+          <a:ln/>
+        </p:spPr>
+        <p:txBody>
+          <a:bodyPr wrap="square" rtlCol="0" anchor="ctr"/>
+          <a:lstStyle/>
+          <a:p>
+            <a:pPr marL="0" indent="0">
+              <a:spcAft>
+                <a:spcPts val="400"/>
+              </a:spcAft>
+              <a:buNone/>
+            </a:pPr>
+            <a:r>
+              <a:rPr lang="en-US" sz="1500" dirty="0">
+                <a:solidFill>
+                  <a:srgbClr val="292929"/>
+                </a:solidFill>
+                <a:latin typeface="Arial" pitchFamily="34" charset="0"/>
+                <a:ea typeface="Arial" pitchFamily="34" charset="-122"/>
+                <a:cs typeface="Arial" pitchFamily="34" charset="-120"/>
+              </a:rPr>
+              <a:t>intelligently.dev — Mastering Entity Framework Core (full course)</a:t>
+            </a:r>
+            <a:endParaRPr lang="en-US" sz="1500" dirty="0"/>
+          </a:p>
+          <a:p>
+            <a:pPr marL="0" indent="0">
+              <a:spcAft>
+                <a:spcPts val="400"/>
+              </a:spcAft>
+              <a:buNone/>
+            </a:pPr>
+            <a:r>
+              <a:rPr lang="en-US" sz="1500" dirty="0">
+                <a:solidFill>
+                  <a:srgbClr val="292929"/>
+                </a:solidFill>
+                <a:latin typeface="Arial" pitchFamily="34" charset="0"/>
+                <a:ea typeface="Arial" pitchFamily="34" charset="-122"/>
+                <a:cs typeface="Arial" pitchFamily="34" charset="-120"/>
+              </a:rPr>
+              <a:t>Beyond Boundaries: C# Network Programming (book)</a:t>
+            </a:r>
+            <a:endParaRPr lang="en-US" sz="1500" dirty="0"/>
+          </a:p>
+        </p:txBody>
+      </p:sp>
+    </p:spTree>
+  </p:cSld>
+  <p:clrMapOvr>
+    <a:masterClrMapping/>
+  </p:clrMapOvr>
+</p:sld>
+</file>
+
+<file path=ppt/slides/slide41.xml><?xml version="1.0" encoding="utf-8"?>
+<p:sld xmlns:a="http://schemas.openxmlformats.org/drawingml/2006/main" xmlns:r="http://schemas.openxmlformats.org/officeDocument/2006/relationships" xmlns:p="http://schemas.openxmlformats.org/presentationml/2006/main">
+  <p:cSld name="Slide 38">
+    <p:bg>
+      <p:bgPr>
+        <a:solidFill>
+          <a:srgbClr val="000000"/>
+        </a:solidFill>
+        <a:effectLst/>
+      </p:bgPr>
+    </p:bg>
+    <p:spTree>
+      <p:nvGrpSpPr>
+        <p:cNvPr id="1" name=""/>
+        <p:cNvGrpSpPr/>
+        <p:nvPr/>
+      </p:nvGrpSpPr>
+      <p:grpSpPr>
+        <a:xfrm>
+          <a:off x="0" y="0"/>
+          <a:ext cx="0" cy="0"/>
+          <a:chOff x="0" y="0"/>
+          <a:chExt cx="0" cy="0"/>
+        </a:xfrm>
+      </p:grpSpPr>
+      <p:sp>
+        <p:nvSpPr>
+          <p:cNvPr id="2" name="Shape 0"/>
+          <p:cNvSpPr/>
+          <p:nvPr/>
+        </p:nvSpPr>
+        <p:spPr>
+          <a:xfrm>
+            <a:off x="0" y="0"/>
+            <a:ext cx="960120" cy="6858000"/>
+          </a:xfrm>
+          <a:prstGeom prst="rect">
+            <a:avLst/>
+          </a:prstGeom>
+          <a:solidFill>
+            <a:srgbClr val="F8B400"/>
+          </a:solidFill>
+          <a:ln/>
+        </p:spPr>
+        <p:txBody>
+          <a:bodyPr/>
+          <a:lstStyle/>
+          <a:p>
+            <a:endParaRPr lang="en-US"/>
+          </a:p>
+        </p:txBody>
+      </p:sp>
+      <p:sp>
+        <p:nvSpPr>
+          <p:cNvPr id="3" name="Text 1"/>
+          <p:cNvSpPr/>
+          <p:nvPr/>
+        </p:nvSpPr>
+        <p:spPr>
+          <a:xfrm>
+            <a:off x="1371600" y="2286000"/>
+            <a:ext cx="10058400" cy="1371600"/>
+          </a:xfrm>
+          <a:prstGeom prst="rect">
+            <a:avLst/>
+          </a:prstGeom>
+          <a:noFill/>
+          <a:ln/>
+        </p:spPr>
+        <p:txBody>
+          <a:bodyPr wrap="square" rtlCol="0" anchor="ctr"/>
+          <a:lstStyle/>
+          <a:p>
+            <a:pPr marL="0" indent="0" algn="ctr">
+              <a:buNone/>
+            </a:pPr>
+            <a:r>
+              <a:rPr lang="en-US" sz="9600" b="1" kern="0" spc="400" dirty="0">
+                <a:solidFill>
+                  <a:srgbClr val="F8B400"/>
+                </a:solidFill>
+                <a:latin typeface="Arial Black" pitchFamily="34" charset="0"/>
+                <a:ea typeface="Arial Black" pitchFamily="34" charset="-122"/>
+                <a:cs typeface="Arial Black" pitchFamily="34" charset="-120"/>
+              </a:rPr>
+              <a:t>QUESTIONS?</a:t>
+            </a:r>
+            <a:endParaRPr lang="en-US" sz="9600" dirty="0"/>
+          </a:p>
+        </p:txBody>
+      </p:sp>
+      <p:sp>
+        <p:nvSpPr>
+          <p:cNvPr id="4" name="Text 2"/>
+          <p:cNvSpPr/>
+          <p:nvPr/>
+        </p:nvSpPr>
+        <p:spPr>
+          <a:xfrm>
+            <a:off x="1371600" y="4114800"/>
+            <a:ext cx="10058400" cy="457200"/>
+          </a:xfrm>
+          <a:prstGeom prst="rect">
+            <a:avLst/>
+          </a:prstGeom>
+          <a:noFill/>
+          <a:ln/>
+        </p:spPr>
+        <p:txBody>
+          <a:bodyPr wrap="square" rtlCol="0" anchor="ctr"/>
+          <a:lstStyle/>
+          <a:p>
+            <a:pPr marL="0" indent="0" algn="ctr">
+              <a:buNone/>
+            </a:pPr>
+            <a:r>
+              <a:rPr lang="en-US" sz="1800" dirty="0">
+                <a:solidFill>
+                  <a:srgbClr val="FFFFFF"/>
+                </a:solidFill>
+                <a:latin typeface="Arial" pitchFamily="34" charset="0"/>
+                <a:ea typeface="Arial" pitchFamily="34" charset="-122"/>
+                <a:cs typeface="Arial" pitchFamily="34" charset="-120"/>
+              </a:rPr>
+              <a:t>woodruff.dev  •  @woodruff.dev on Bluesky  •  cwoodruff@live.com</a:t>
+            </a:r>
+            <a:endParaRPr lang="en-US" sz="1800" dirty="0"/>
+          </a:p>
+        </p:txBody>
+      </p:sp>
+      <p:sp>
+        <p:nvSpPr>
+          <p:cNvPr id="5" name="Text 3"/>
+          <p:cNvSpPr/>
+          <p:nvPr/>
+        </p:nvSpPr>
+        <p:spPr>
+          <a:xfrm>
+            <a:off x="1371600" y="4663440"/>
+            <a:ext cx="10058400" cy="365760"/>
+          </a:xfrm>
+          <a:prstGeom prst="rect">
+            <a:avLst/>
+          </a:prstGeom>
+          <a:noFill/>
+          <a:ln/>
+        </p:spPr>
+        <p:txBody>
+          <a:bodyPr wrap="square" rtlCol="0" anchor="ctr"/>
+          <a:lstStyle/>
+          <a:p>
+            <a:pPr marL="0" indent="0" algn="ctr">
+              <a:buNone/>
+            </a:pPr>
+            <a:r>
+              <a:rPr lang="en-US" sz="1400" dirty="0">
+                <a:solidFill>
+                  <a:srgbClr val="F8B400"/>
+                </a:solidFill>
+                <a:latin typeface="Consolas" pitchFamily="34" charset="0"/>
+                <a:ea typeface="Consolas" pitchFamily="34" charset="-122"/>
+                <a:cs typeface="Consolas" pitchFamily="34" charset="-120"/>
+              </a:rPr>
+              <a:t>Sample code: github.com/cwoodruff/EFCoreDemos</a:t>
+            </a:r>
+            <a:endParaRPr lang="en-US" sz="1400" dirty="0"/>
+          </a:p>
+        </p:txBody>
+      </p:sp>
+    </p:spTree>
+  </p:cSld>
+  <p:clrMapOvr>
+    <a:masterClrMapping/>
+  </p:clrMapOvr>
+</p:sld>
+</file>
+
+<file path=ppt/slides/slide42.xml><?xml version="1.0" encoding="utf-8"?>
+<p:sld xmlns:a="http://schemas.openxmlformats.org/drawingml/2006/main" xmlns:r="http://schemas.openxmlformats.org/officeDocument/2006/relationships" xmlns:p="http://schemas.openxmlformats.org/presentationml/2006/main">
   <p:cSld>
     <p:bg>
       <p:bgPr>
@@ -28360,7 +31365,7 @@
         </p:nvSpPr>
         <p:spPr>
           <a:xfrm>
-            <a:off x="1371600" y="4114800"/>
+            <a:off x="1371600" y="5687962"/>
             <a:ext cx="10058400" cy="457200"/>
           </a:xfrm>
           <a:prstGeom prst="rect">
@@ -28405,7 +31410,7 @@
         </p:nvSpPr>
         <p:spPr>
           <a:xfrm>
-            <a:off x="1371600" y="4663440"/>
+            <a:off x="1371600" y="6236602"/>
             <a:ext cx="10058400" cy="365760"/>
           </a:xfrm>
           <a:prstGeom prst="rect">
@@ -28422,7 +31427,7 @@
               <a:buNone/>
             </a:pPr>
             <a:r>
-              <a:rPr lang="en-US" sz="1400" dirty="0">
+              <a:rPr lang="en-US" sz="2400" dirty="0">
                 <a:solidFill>
                   <a:srgbClr val="F8B400"/>
                 </a:solidFill>
@@ -28432,10 +31437,40 @@
               </a:rPr>
               <a:t>Sample code: github.com/cwoodruff/EFCoreDemos</a:t>
             </a:r>
-            <a:endParaRPr lang="en-US" sz="1400" dirty="0"/>
-          </a:p>
-        </p:txBody>
-      </p:sp>
+            <a:endParaRPr lang="en-US" sz="2400" dirty="0"/>
+          </a:p>
+        </p:txBody>
+      </p:sp>
+      <p:pic>
+        <p:nvPicPr>
+          <p:cNvPr id="7" name="Picture 6">
+            <a:extLst>
+              <a:ext uri="{FF2B5EF4-FFF2-40B4-BE49-F238E27FC236}">
+                <a16:creationId xmlns:a16="http://schemas.microsoft.com/office/drawing/2014/main" id="{5096E881-8B68-828C-DDB0-BFB05045B4FB}"/>
+              </a:ext>
+            </a:extLst>
+          </p:cNvPr>
+          <p:cNvPicPr>
+            <a:picLocks noChangeAspect="1"/>
+          </p:cNvPicPr>
+          <p:nvPr/>
+        </p:nvPicPr>
+        <p:blipFill>
+          <a:blip r:embed="rId3"/>
+          <a:stretch>
+            <a:fillRect/>
+          </a:stretch>
+        </p:blipFill>
+        <p:spPr>
+          <a:xfrm>
+            <a:off x="1371599" y="154857"/>
+            <a:ext cx="5147187" cy="5147187"/>
+          </a:xfrm>
+          <a:prstGeom prst="rect">
+            <a:avLst/>
+          </a:prstGeom>
+        </p:spPr>
+      </p:pic>
     </p:spTree>
     <p:extLst>
       <p:ext uri="{BB962C8B-B14F-4D97-AF65-F5344CB8AC3E}">
@@ -29533,8 +32568,8 @@
         </p:nvSpPr>
         <p:spPr>
           <a:xfrm>
-            <a:off x="1234440" y="2377440"/>
-            <a:ext cx="10652760" cy="3200400"/>
+            <a:off x="1234440" y="2240280"/>
+            <a:ext cx="10652760" cy="3337560"/>
           </a:xfrm>
           <a:prstGeom prst="rect">
             <a:avLst/>

--- a/EF-Core-Secrets-10-Insights.pptx
+++ b/EF-Core-Secrets-10-Insights.pptx
@@ -4853,7 +4853,29 @@
                 <a:ea typeface="Consolas" pitchFamily="34" charset="-122"/>
                 <a:cs typeface="Consolas" pitchFamily="34" charset="-120"/>
               </a:rPr>
-              <a:t> db = </a:t>
+              <a:t> </a:t>
+            </a:r>
+            <a:r>
+              <a:rPr lang="en-US" sz="1600" dirty="0" err="1">
+                <a:solidFill>
+                  <a:srgbClr val="292929"/>
+                </a:solidFill>
+                <a:latin typeface="Consolas" pitchFamily="34" charset="0"/>
+                <a:ea typeface="Consolas" pitchFamily="34" charset="-122"/>
+                <a:cs typeface="Consolas" pitchFamily="34" charset="-120"/>
+              </a:rPr>
+              <a:t>db</a:t>
+            </a:r>
+            <a:r>
+              <a:rPr lang="en-US" sz="1600" dirty="0">
+                <a:solidFill>
+                  <a:srgbClr val="292929"/>
+                </a:solidFill>
+                <a:latin typeface="Consolas" pitchFamily="34" charset="0"/>
+                <a:ea typeface="Consolas" pitchFamily="34" charset="-122"/>
+                <a:cs typeface="Consolas" pitchFamily="34" charset="-120"/>
+              </a:rPr>
+              <a:t> = </a:t>
             </a:r>
             <a:r>
               <a:rPr lang="en-US" sz="1600" b="1" dirty="0">
@@ -4878,15 +4900,98 @@
               <a:t> </a:t>
             </a:r>
             <a:r>
+              <a:rPr lang="en-US" sz="1600" dirty="0" err="1">
+                <a:solidFill>
+                  <a:srgbClr val="2B91AF"/>
+                </a:solidFill>
+                <a:latin typeface="Consolas" pitchFamily="34" charset="0"/>
+                <a:ea typeface="Consolas" pitchFamily="34" charset="-122"/>
+                <a:cs typeface="Consolas" pitchFamily="34" charset="-120"/>
+              </a:rPr>
+              <a:t>ChinookContext</a:t>
+            </a:r>
+            <a:r>
               <a:rPr lang="en-US" sz="1600" dirty="0">
                 <a:solidFill>
+                  <a:srgbClr val="292929"/>
+                </a:solidFill>
+                <a:latin typeface="Consolas" pitchFamily="34" charset="0"/>
+                <a:ea typeface="Consolas" pitchFamily="34" charset="-122"/>
+                <a:cs typeface="Consolas" pitchFamily="34" charset="-120"/>
+              </a:rPr>
+              <a:t>();</a:t>
+            </a:r>
+            <a:endParaRPr lang="en-US" sz="1600" dirty="0"/>
+          </a:p>
+          <a:p>
+            <a:pPr marL="0" indent="0">
+              <a:buNone/>
+            </a:pPr>
+            <a:r>
+              <a:rPr lang="en-US" sz="1600" b="1" dirty="0">
+                <a:solidFill>
+                  <a:srgbClr val="0000FF"/>
+                </a:solidFill>
+                <a:latin typeface="Consolas" pitchFamily="34" charset="0"/>
+                <a:ea typeface="Consolas" pitchFamily="34" charset="-122"/>
+                <a:cs typeface="Consolas" pitchFamily="34" charset="-120"/>
+              </a:rPr>
+              <a:t>var</a:t>
+            </a:r>
+            <a:r>
+              <a:rPr lang="en-US" sz="1600" dirty="0">
+                <a:solidFill>
+                  <a:srgbClr val="292929"/>
+                </a:solidFill>
+                <a:latin typeface="Consolas" pitchFamily="34" charset="0"/>
+                <a:ea typeface="Consolas" pitchFamily="34" charset="-122"/>
+                <a:cs typeface="Consolas" pitchFamily="34" charset="-120"/>
+              </a:rPr>
+              <a:t> album = </a:t>
+            </a:r>
+            <a:r>
+              <a:rPr lang="en-US" sz="1600" dirty="0" err="1">
+                <a:solidFill>
+                  <a:srgbClr val="292929"/>
+                </a:solidFill>
+                <a:latin typeface="Consolas" pitchFamily="34" charset="0"/>
+                <a:ea typeface="Consolas" pitchFamily="34" charset="-122"/>
+                <a:cs typeface="Consolas" pitchFamily="34" charset="-120"/>
+              </a:rPr>
+              <a:t>db.</a:t>
+            </a:r>
+            <a:r>
+              <a:rPr lang="en-US" sz="1600" dirty="0" err="1">
+                <a:solidFill>
                   <a:srgbClr val="2B91AF"/>
                 </a:solidFill>
                 <a:latin typeface="Consolas" pitchFamily="34" charset="0"/>
                 <a:ea typeface="Consolas" pitchFamily="34" charset="-122"/>
                 <a:cs typeface="Consolas" pitchFamily="34" charset="-120"/>
               </a:rPr>
-              <a:t>ChinookContext</a:t>
+              <a:t>Albums</a:t>
+            </a:r>
+            <a:r>
+              <a:rPr lang="en-US" sz="1600" dirty="0" err="1">
+                <a:solidFill>
+                  <a:srgbClr val="292929"/>
+                </a:solidFill>
+                <a:latin typeface="Consolas" pitchFamily="34" charset="0"/>
+                <a:ea typeface="Consolas" pitchFamily="34" charset="-122"/>
+                <a:cs typeface="Consolas" pitchFamily="34" charset="-120"/>
+              </a:rPr>
+              <a:t>.</a:t>
+            </a:r>
+            <a:r>
+              <a:rPr lang="en-US" sz="1600" dirty="0" err="1">
+                <a:solidFill>
+                  <a:srgbClr val="2B91AF"/>
+                </a:solidFill>
+                <a:latin typeface="Consolas" pitchFamily="34" charset="0"/>
+                <a:ea typeface="Consolas" pitchFamily="34" charset="-122"/>
+                <a:cs typeface="Consolas" pitchFamily="34" charset="-120"/>
+              </a:rPr>
+              <a:t>First</a:t>
             </a:r>
             <a:r>
               <a:rPr lang="en-US" sz="1600" dirty="0">
@@ -4897,7 +5002,40 @@
                 <a:ea typeface="Consolas" pitchFamily="34" charset="-122"/>
                 <a:cs typeface="Consolas" pitchFamily="34" charset="-120"/>
               </a:rPr>
-              <a:t>();</a:t>
+              <a:t>(a =&gt; </a:t>
+            </a:r>
+            <a:r>
+              <a:rPr lang="en-US" sz="1600" dirty="0" err="1">
+                <a:solidFill>
+                  <a:srgbClr val="292929"/>
+                </a:solidFill>
+                <a:latin typeface="Consolas" pitchFamily="34" charset="0"/>
+                <a:ea typeface="Consolas" pitchFamily="34" charset="-122"/>
+                <a:cs typeface="Consolas" pitchFamily="34" charset="-120"/>
+              </a:rPr>
+              <a:t>a.</a:t>
+            </a:r>
+            <a:r>
+              <a:rPr lang="en-US" sz="1600" dirty="0" err="1">
+                <a:solidFill>
+                  <a:srgbClr val="2B91AF"/>
+                </a:solidFill>
+                <a:latin typeface="Consolas" pitchFamily="34" charset="0"/>
+                <a:ea typeface="Consolas" pitchFamily="34" charset="-122"/>
+                <a:cs typeface="Consolas" pitchFamily="34" charset="-120"/>
+              </a:rPr>
+              <a:t>Id</a:t>
+            </a:r>
+            <a:r>
+              <a:rPr lang="en-US" sz="1600" dirty="0">
+                <a:solidFill>
+                  <a:srgbClr val="292929"/>
+                </a:solidFill>
+                <a:latin typeface="Consolas" pitchFamily="34" charset="0"/>
+                <a:ea typeface="Consolas" pitchFamily="34" charset="-122"/>
+                <a:cs typeface="Consolas" pitchFamily="34" charset="-120"/>
+              </a:rPr>
+              <a:t> == 1);</a:t>
             </a:r>
             <a:endParaRPr lang="en-US" sz="1600" dirty="0"/>
           </a:p>
@@ -4906,6 +5044,257 @@
               <a:buNone/>
             </a:pPr>
             <a:r>
+              <a:rPr lang="en-US" sz="1600" dirty="0">
+                <a:solidFill>
+                  <a:srgbClr val="292929"/>
+                </a:solidFill>
+                <a:latin typeface="Consolas" pitchFamily="34" charset="0"/>
+                <a:ea typeface="Consolas" pitchFamily="34" charset="-122"/>
+                <a:cs typeface="Consolas" pitchFamily="34" charset="-120"/>
+              </a:rPr>
+              <a:t> </a:t>
+            </a:r>
+            <a:endParaRPr lang="en-US" sz="1600" dirty="0"/>
+          </a:p>
+          <a:p>
+            <a:pPr marL="0" indent="0">
+              <a:buNone/>
+            </a:pPr>
+            <a:r>
+              <a:rPr lang="en-US" sz="1600" dirty="0" err="1">
+                <a:solidFill>
+                  <a:srgbClr val="2B91AF"/>
+                </a:solidFill>
+                <a:latin typeface="Consolas" pitchFamily="34" charset="0"/>
+                <a:ea typeface="Consolas" pitchFamily="34" charset="-122"/>
+                <a:cs typeface="Consolas" pitchFamily="34" charset="-120"/>
+              </a:rPr>
+              <a:t>PrintTracker</a:t>
+            </a:r>
+            <a:r>
+              <a:rPr lang="en-US" sz="1600" dirty="0">
+                <a:solidFill>
+                  <a:srgbClr val="292929"/>
+                </a:solidFill>
+                <a:latin typeface="Consolas" pitchFamily="34" charset="0"/>
+                <a:ea typeface="Consolas" pitchFamily="34" charset="-122"/>
+                <a:cs typeface="Consolas" pitchFamily="34" charset="-120"/>
+              </a:rPr>
+              <a:t>(</a:t>
+            </a:r>
+            <a:r>
+              <a:rPr lang="en-US" sz="1600" dirty="0" err="1">
+                <a:solidFill>
+                  <a:srgbClr val="292929"/>
+                </a:solidFill>
+                <a:latin typeface="Consolas" pitchFamily="34" charset="0"/>
+                <a:ea typeface="Consolas" pitchFamily="34" charset="-122"/>
+                <a:cs typeface="Consolas" pitchFamily="34" charset="-120"/>
+              </a:rPr>
+              <a:t>db</a:t>
+            </a:r>
+            <a:r>
+              <a:rPr lang="en-US" sz="1600" dirty="0">
+                <a:solidFill>
+                  <a:srgbClr val="292929"/>
+                </a:solidFill>
+                <a:latin typeface="Consolas" pitchFamily="34" charset="0"/>
+                <a:ea typeface="Consolas" pitchFamily="34" charset="-122"/>
+                <a:cs typeface="Consolas" pitchFamily="34" charset="-120"/>
+              </a:rPr>
+              <a:t>);   </a:t>
+            </a:r>
+            <a:r>
+              <a:rPr lang="en-US" sz="1600" dirty="0">
+                <a:solidFill>
+                  <a:srgbClr val="008000"/>
+                </a:solidFill>
+                <a:latin typeface="Consolas" pitchFamily="34" charset="0"/>
+                <a:ea typeface="Consolas" pitchFamily="34" charset="-122"/>
+                <a:cs typeface="Consolas" pitchFamily="34" charset="-120"/>
+              </a:rPr>
+              <a:t>// 1 entity, state: Unchanged</a:t>
+            </a:r>
+            <a:endParaRPr lang="en-US" sz="1600" dirty="0"/>
+          </a:p>
+          <a:p>
+            <a:pPr marL="0" indent="0">
+              <a:buNone/>
+            </a:pPr>
+            <a:r>
+              <a:rPr lang="en-US" sz="1600" dirty="0">
+                <a:solidFill>
+                  <a:srgbClr val="292929"/>
+                </a:solidFill>
+                <a:latin typeface="Consolas" pitchFamily="34" charset="0"/>
+                <a:ea typeface="Consolas" pitchFamily="34" charset="-122"/>
+                <a:cs typeface="Consolas" pitchFamily="34" charset="-120"/>
+              </a:rPr>
+              <a:t> </a:t>
+            </a:r>
+            <a:endParaRPr lang="en-US" sz="1600" dirty="0"/>
+          </a:p>
+          <a:p>
+            <a:pPr marL="0" indent="0">
+              <a:buNone/>
+            </a:pPr>
+            <a:r>
+              <a:rPr lang="en-US" sz="1600" dirty="0" err="1">
+                <a:solidFill>
+                  <a:srgbClr val="292929"/>
+                </a:solidFill>
+                <a:latin typeface="Consolas" pitchFamily="34" charset="0"/>
+                <a:ea typeface="Consolas" pitchFamily="34" charset="-122"/>
+                <a:cs typeface="Consolas" pitchFamily="34" charset="-120"/>
+              </a:rPr>
+              <a:t>album.</a:t>
+            </a:r>
+            <a:r>
+              <a:rPr lang="en-US" sz="1600" dirty="0" err="1">
+                <a:solidFill>
+                  <a:srgbClr val="2B91AF"/>
+                </a:solidFill>
+                <a:latin typeface="Consolas" pitchFamily="34" charset="0"/>
+                <a:ea typeface="Consolas" pitchFamily="34" charset="-122"/>
+                <a:cs typeface="Consolas" pitchFamily="34" charset="-120"/>
+              </a:rPr>
+              <a:t>Title</a:t>
+            </a:r>
+            <a:r>
+              <a:rPr lang="en-US" sz="1600" dirty="0">
+                <a:solidFill>
+                  <a:srgbClr val="292929"/>
+                </a:solidFill>
+                <a:latin typeface="Consolas" pitchFamily="34" charset="0"/>
+                <a:ea typeface="Consolas" pitchFamily="34" charset="-122"/>
+                <a:cs typeface="Consolas" pitchFamily="34" charset="-120"/>
+              </a:rPr>
+              <a:t> = </a:t>
+            </a:r>
+            <a:r>
+              <a:rPr lang="en-US" sz="1600" dirty="0">
+                <a:solidFill>
+                  <a:srgbClr val="A31515"/>
+                </a:solidFill>
+                <a:latin typeface="Consolas" pitchFamily="34" charset="0"/>
+                <a:ea typeface="Consolas" pitchFamily="34" charset="-122"/>
+                <a:cs typeface="Consolas" pitchFamily="34" charset="-120"/>
+              </a:rPr>
+              <a:t>"New Title"</a:t>
+            </a:r>
+            <a:r>
+              <a:rPr lang="en-US" sz="1600" dirty="0">
+                <a:solidFill>
+                  <a:srgbClr val="292929"/>
+                </a:solidFill>
+                <a:latin typeface="Consolas" pitchFamily="34" charset="0"/>
+                <a:ea typeface="Consolas" pitchFamily="34" charset="-122"/>
+                <a:cs typeface="Consolas" pitchFamily="34" charset="-120"/>
+              </a:rPr>
+              <a:t>;</a:t>
+            </a:r>
+            <a:endParaRPr lang="en-US" sz="1600" dirty="0"/>
+          </a:p>
+          <a:p>
+            <a:pPr marL="0" indent="0">
+              <a:buNone/>
+            </a:pPr>
+            <a:r>
+              <a:rPr lang="en-US" sz="1600" dirty="0">
+                <a:solidFill>
+                  <a:srgbClr val="292929"/>
+                </a:solidFill>
+                <a:latin typeface="Consolas" pitchFamily="34" charset="0"/>
+                <a:ea typeface="Consolas" pitchFamily="34" charset="-122"/>
+                <a:cs typeface="Consolas" pitchFamily="34" charset="-120"/>
+              </a:rPr>
+              <a:t> </a:t>
+            </a:r>
+            <a:endParaRPr lang="en-US" sz="1600" dirty="0"/>
+          </a:p>
+          <a:p>
+            <a:pPr marL="0" indent="0">
+              <a:buNone/>
+            </a:pPr>
+            <a:r>
+              <a:rPr lang="en-US" sz="1600" dirty="0" err="1">
+                <a:solidFill>
+                  <a:srgbClr val="2B91AF"/>
+                </a:solidFill>
+                <a:latin typeface="Consolas" pitchFamily="34" charset="0"/>
+                <a:ea typeface="Consolas" pitchFamily="34" charset="-122"/>
+                <a:cs typeface="Consolas" pitchFamily="34" charset="-120"/>
+              </a:rPr>
+              <a:t>PrintTracker</a:t>
+            </a:r>
+            <a:r>
+              <a:rPr lang="en-US" sz="1600" dirty="0">
+                <a:solidFill>
+                  <a:srgbClr val="292929"/>
+                </a:solidFill>
+                <a:latin typeface="Consolas" pitchFamily="34" charset="0"/>
+                <a:ea typeface="Consolas" pitchFamily="34" charset="-122"/>
+                <a:cs typeface="Consolas" pitchFamily="34" charset="-120"/>
+              </a:rPr>
+              <a:t>(</a:t>
+            </a:r>
+            <a:r>
+              <a:rPr lang="en-US" sz="1600" dirty="0" err="1">
+                <a:solidFill>
+                  <a:srgbClr val="292929"/>
+                </a:solidFill>
+                <a:latin typeface="Consolas" pitchFamily="34" charset="0"/>
+                <a:ea typeface="Consolas" pitchFamily="34" charset="-122"/>
+                <a:cs typeface="Consolas" pitchFamily="34" charset="-120"/>
+              </a:rPr>
+              <a:t>db</a:t>
+            </a:r>
+            <a:r>
+              <a:rPr lang="en-US" sz="1600" dirty="0">
+                <a:solidFill>
+                  <a:srgbClr val="292929"/>
+                </a:solidFill>
+                <a:latin typeface="Consolas" pitchFamily="34" charset="0"/>
+                <a:ea typeface="Consolas" pitchFamily="34" charset="-122"/>
+                <a:cs typeface="Consolas" pitchFamily="34" charset="-120"/>
+              </a:rPr>
+              <a:t>);   </a:t>
+            </a:r>
+            <a:r>
+              <a:rPr lang="en-US" sz="1600" dirty="0">
+                <a:solidFill>
+                  <a:srgbClr val="008000"/>
+                </a:solidFill>
+                <a:latin typeface="Consolas" pitchFamily="34" charset="0"/>
+                <a:ea typeface="Consolas" pitchFamily="34" charset="-122"/>
+                <a:cs typeface="Consolas" pitchFamily="34" charset="-120"/>
+              </a:rPr>
+              <a:t>// 1 entity, state: Modified</a:t>
+            </a:r>
+            <a:endParaRPr lang="en-US" sz="1600" dirty="0"/>
+          </a:p>
+          <a:p>
+            <a:pPr marL="0" indent="0">
+              <a:buNone/>
+            </a:pPr>
+            <a:r>
+              <a:rPr lang="en-US" sz="1600" dirty="0">
+                <a:solidFill>
+                  <a:srgbClr val="292929"/>
+                </a:solidFill>
+                <a:latin typeface="Consolas" pitchFamily="34" charset="0"/>
+                <a:ea typeface="Consolas" pitchFamily="34" charset="-122"/>
+                <a:cs typeface="Consolas" pitchFamily="34" charset="-120"/>
+              </a:rPr>
+              <a:t> </a:t>
+            </a:r>
+            <a:endParaRPr lang="en-US" sz="1600" dirty="0"/>
+          </a:p>
+          <a:p>
+            <a:pPr marL="0" indent="0">
+              <a:buNone/>
+            </a:pPr>
+            <a:r>
               <a:rPr lang="en-US" sz="1600" b="1" dirty="0">
                 <a:solidFill>
                   <a:srgbClr val="0000FF"/>
@@ -4914,7 +5303,7 @@
                 <a:ea typeface="Consolas" pitchFamily="34" charset="-122"/>
                 <a:cs typeface="Consolas" pitchFamily="34" charset="-120"/>
               </a:rPr>
-              <a:t>var</a:t>
+              <a:t>await</a:t>
             </a:r>
             <a:r>
               <a:rPr lang="en-US" sz="1600" dirty="0">
@@ -4925,18 +5314,129 @@
                 <a:ea typeface="Consolas" pitchFamily="34" charset="-122"/>
                 <a:cs typeface="Consolas" pitchFamily="34" charset="-120"/>
               </a:rPr>
-              <a:t> album = db.</a:t>
+              <a:t> </a:t>
+            </a:r>
+            <a:r>
+              <a:rPr lang="en-US" sz="1600" dirty="0" err="1">
+                <a:solidFill>
+                  <a:srgbClr val="292929"/>
+                </a:solidFill>
+                <a:latin typeface="Consolas" pitchFamily="34" charset="0"/>
+                <a:ea typeface="Consolas" pitchFamily="34" charset="-122"/>
+                <a:cs typeface="Consolas" pitchFamily="34" charset="-120"/>
+              </a:rPr>
+              <a:t>db.</a:t>
+            </a:r>
+            <a:r>
+              <a:rPr lang="en-US" sz="1600" dirty="0" err="1">
+                <a:solidFill>
+                  <a:srgbClr val="2B91AF"/>
+                </a:solidFill>
+                <a:latin typeface="Consolas" pitchFamily="34" charset="0"/>
+                <a:ea typeface="Consolas" pitchFamily="34" charset="-122"/>
+                <a:cs typeface="Consolas" pitchFamily="34" charset="-120"/>
+              </a:rPr>
+              <a:t>SaveChangesAsync</a:t>
             </a:r>
             <a:r>
               <a:rPr lang="en-US" sz="1600" dirty="0">
                 <a:solidFill>
+                  <a:srgbClr val="292929"/>
+                </a:solidFill>
+                <a:latin typeface="Consolas" pitchFamily="34" charset="0"/>
+                <a:ea typeface="Consolas" pitchFamily="34" charset="-122"/>
+                <a:cs typeface="Consolas" pitchFamily="34" charset="-120"/>
+              </a:rPr>
+              <a:t>();   </a:t>
+            </a:r>
+            <a:r>
+              <a:rPr lang="en-US" sz="1600" dirty="0">
+                <a:solidFill>
+                  <a:srgbClr val="008000"/>
+                </a:solidFill>
+                <a:latin typeface="Consolas" pitchFamily="34" charset="0"/>
+                <a:ea typeface="Consolas" pitchFamily="34" charset="-122"/>
+                <a:cs typeface="Consolas" pitchFamily="34" charset="-120"/>
+              </a:rPr>
+              <a:t>// emits UPDATE</a:t>
+            </a:r>
+            <a:endParaRPr lang="en-US" sz="1600" dirty="0"/>
+          </a:p>
+          <a:p>
+            <a:pPr marL="0" indent="0">
+              <a:buNone/>
+            </a:pPr>
+            <a:r>
+              <a:rPr lang="en-US" sz="1600" dirty="0">
+                <a:solidFill>
+                  <a:srgbClr val="292929"/>
+                </a:solidFill>
+                <a:latin typeface="Consolas" pitchFamily="34" charset="0"/>
+                <a:ea typeface="Consolas" pitchFamily="34" charset="-122"/>
+                <a:cs typeface="Consolas" pitchFamily="34" charset="-120"/>
+              </a:rPr>
+              <a:t> </a:t>
+            </a:r>
+            <a:endParaRPr lang="en-US" sz="1600" dirty="0"/>
+          </a:p>
+          <a:p>
+            <a:pPr marL="0" indent="0">
+              <a:buNone/>
+            </a:pPr>
+            <a:r>
+              <a:rPr lang="en-US" sz="1600" b="1" dirty="0">
+                <a:solidFill>
+                  <a:srgbClr val="0000FF"/>
+                </a:solidFill>
+                <a:latin typeface="Consolas" pitchFamily="34" charset="0"/>
+                <a:ea typeface="Consolas" pitchFamily="34" charset="-122"/>
+                <a:cs typeface="Consolas" pitchFamily="34" charset="-120"/>
+              </a:rPr>
+              <a:t>static</a:t>
+            </a:r>
+            <a:r>
+              <a:rPr lang="en-US" sz="1600" dirty="0">
+                <a:solidFill>
+                  <a:srgbClr val="292929"/>
+                </a:solidFill>
+                <a:latin typeface="Consolas" pitchFamily="34" charset="0"/>
+                <a:ea typeface="Consolas" pitchFamily="34" charset="-122"/>
+                <a:cs typeface="Consolas" pitchFamily="34" charset="-120"/>
+              </a:rPr>
+              <a:t> </a:t>
+            </a:r>
+            <a:r>
+              <a:rPr lang="en-US" sz="1600" b="1" dirty="0">
+                <a:solidFill>
+                  <a:srgbClr val="0000FF"/>
+                </a:solidFill>
+                <a:latin typeface="Consolas" pitchFamily="34" charset="0"/>
+                <a:ea typeface="Consolas" pitchFamily="34" charset="-122"/>
+                <a:cs typeface="Consolas" pitchFamily="34" charset="-120"/>
+              </a:rPr>
+              <a:t>void</a:t>
+            </a:r>
+            <a:r>
+              <a:rPr lang="en-US" sz="1600" dirty="0">
+                <a:solidFill>
+                  <a:srgbClr val="292929"/>
+                </a:solidFill>
+                <a:latin typeface="Consolas" pitchFamily="34" charset="0"/>
+                <a:ea typeface="Consolas" pitchFamily="34" charset="-122"/>
+                <a:cs typeface="Consolas" pitchFamily="34" charset="-120"/>
+              </a:rPr>
+              <a:t> </a:t>
+            </a:r>
+            <a:r>
+              <a:rPr lang="en-US" sz="1600" dirty="0" err="1">
+                <a:solidFill>
                   <a:srgbClr val="2B91AF"/>
                 </a:solidFill>
                 <a:latin typeface="Consolas" pitchFamily="34" charset="0"/>
                 <a:ea typeface="Consolas" pitchFamily="34" charset="-122"/>
                 <a:cs typeface="Consolas" pitchFamily="34" charset="-120"/>
               </a:rPr>
-              <a:t>Albums</a:t>
+              <a:t>PrintTracker</a:t>
             </a:r>
             <a:r>
               <a:rPr lang="en-US" sz="1600" dirty="0">
@@ -4947,18 +5447,151 @@
                 <a:ea typeface="Consolas" pitchFamily="34" charset="-122"/>
                 <a:cs typeface="Consolas" pitchFamily="34" charset="-120"/>
               </a:rPr>
+              <a:t>(</a:t>
+            </a:r>
+            <a:r>
+              <a:rPr lang="en-US" sz="1600" dirty="0" err="1">
+                <a:solidFill>
+                  <a:srgbClr val="2B91AF"/>
+                </a:solidFill>
+                <a:latin typeface="Consolas" pitchFamily="34" charset="0"/>
+                <a:ea typeface="Consolas" pitchFamily="34" charset="-122"/>
+                <a:cs typeface="Consolas" pitchFamily="34" charset="-120"/>
+              </a:rPr>
+              <a:t>DbContext</a:t>
+            </a:r>
+            <a:r>
+              <a:rPr lang="en-US" sz="1600" dirty="0">
+                <a:solidFill>
+                  <a:srgbClr val="292929"/>
+                </a:solidFill>
+                <a:latin typeface="Consolas" pitchFamily="34" charset="0"/>
+                <a:ea typeface="Consolas" pitchFamily="34" charset="-122"/>
+                <a:cs typeface="Consolas" pitchFamily="34" charset="-120"/>
+              </a:rPr>
+              <a:t> </a:t>
+            </a:r>
+            <a:r>
+              <a:rPr lang="en-US" sz="1600" dirty="0" err="1">
+                <a:solidFill>
+                  <a:srgbClr val="292929"/>
+                </a:solidFill>
+                <a:latin typeface="Consolas" pitchFamily="34" charset="0"/>
+                <a:ea typeface="Consolas" pitchFamily="34" charset="-122"/>
+                <a:cs typeface="Consolas" pitchFamily="34" charset="-120"/>
+              </a:rPr>
+              <a:t>db</a:t>
+            </a:r>
+            <a:r>
+              <a:rPr lang="en-US" sz="1600" dirty="0">
+                <a:solidFill>
+                  <a:srgbClr val="292929"/>
+                </a:solidFill>
+                <a:latin typeface="Consolas" pitchFamily="34" charset="0"/>
+                <a:ea typeface="Consolas" pitchFamily="34" charset="-122"/>
+                <a:cs typeface="Consolas" pitchFamily="34" charset="-120"/>
+              </a:rPr>
+              <a:t>) =&gt;</a:t>
+            </a:r>
+            <a:endParaRPr lang="en-US" sz="1600" dirty="0"/>
+          </a:p>
+          <a:p>
+            <a:pPr marL="0" indent="0">
+              <a:buNone/>
+            </a:pPr>
+            <a:r>
+              <a:rPr lang="en-US" sz="1600" dirty="0">
+                <a:solidFill>
+                  <a:srgbClr val="292929"/>
+                </a:solidFill>
+                <a:latin typeface="Consolas" pitchFamily="34" charset="0"/>
+                <a:ea typeface="Consolas" pitchFamily="34" charset="-122"/>
+                <a:cs typeface="Consolas" pitchFamily="34" charset="-120"/>
+              </a:rPr>
+              <a:t>    </a:t>
+            </a:r>
+            <a:r>
+              <a:rPr lang="en-US" sz="1600" dirty="0" err="1">
+                <a:solidFill>
+                  <a:srgbClr val="292929"/>
+                </a:solidFill>
+                <a:latin typeface="Consolas" pitchFamily="34" charset="0"/>
+                <a:ea typeface="Consolas" pitchFamily="34" charset="-122"/>
+                <a:cs typeface="Consolas" pitchFamily="34" charset="-120"/>
+              </a:rPr>
+              <a:t>db.</a:t>
+            </a:r>
+            <a:r>
+              <a:rPr lang="en-US" sz="1600" dirty="0" err="1">
+                <a:solidFill>
+                  <a:srgbClr val="2B91AF"/>
+                </a:solidFill>
+                <a:latin typeface="Consolas" pitchFamily="34" charset="0"/>
+                <a:ea typeface="Consolas" pitchFamily="34" charset="-122"/>
+                <a:cs typeface="Consolas" pitchFamily="34" charset="-120"/>
+              </a:rPr>
+              <a:t>ChangeTracker</a:t>
+            </a:r>
+            <a:r>
+              <a:rPr lang="en-US" sz="1600" dirty="0" err="1">
+                <a:solidFill>
+                  <a:srgbClr val="292929"/>
+                </a:solidFill>
+                <a:latin typeface="Consolas" pitchFamily="34" charset="0"/>
+                <a:ea typeface="Consolas" pitchFamily="34" charset="-122"/>
+                <a:cs typeface="Consolas" pitchFamily="34" charset="-120"/>
+              </a:rPr>
               <a:t>.</a:t>
             </a:r>
             <a:r>
+              <a:rPr lang="en-US" sz="1600" dirty="0" err="1">
+                <a:solidFill>
+                  <a:srgbClr val="2B91AF"/>
+                </a:solidFill>
+                <a:latin typeface="Consolas" pitchFamily="34" charset="0"/>
+                <a:ea typeface="Consolas" pitchFamily="34" charset="-122"/>
+                <a:cs typeface="Consolas" pitchFamily="34" charset="-120"/>
+              </a:rPr>
+              <a:t>Entries</a:t>
+            </a:r>
+            <a:r>
               <a:rPr lang="en-US" sz="1600" dirty="0">
                 <a:solidFill>
+                  <a:srgbClr val="292929"/>
+                </a:solidFill>
+                <a:latin typeface="Consolas" pitchFamily="34" charset="0"/>
+                <a:ea typeface="Consolas" pitchFamily="34" charset="-122"/>
+                <a:cs typeface="Consolas" pitchFamily="34" charset="-120"/>
+              </a:rPr>
+              <a:t>()</a:t>
+            </a:r>
+            <a:endParaRPr lang="en-US" sz="1600" dirty="0"/>
+          </a:p>
+          <a:p>
+            <a:pPr marL="0" indent="0">
+              <a:buNone/>
+            </a:pPr>
+            <a:r>
+              <a:rPr lang="en-US" sz="1600" dirty="0">
+                <a:solidFill>
+                  <a:srgbClr val="292929"/>
+                </a:solidFill>
+                <a:latin typeface="Consolas" pitchFamily="34" charset="0"/>
+                <a:ea typeface="Consolas" pitchFamily="34" charset="-122"/>
+                <a:cs typeface="Consolas" pitchFamily="34" charset="-120"/>
+              </a:rPr>
+              <a:t>       .</a:t>
+            </a:r>
+            <a:r>
+              <a:rPr lang="en-US" sz="1600" dirty="0" err="1">
+                <a:solidFill>
                   <a:srgbClr val="2B91AF"/>
                 </a:solidFill>
                 <a:latin typeface="Consolas" pitchFamily="34" charset="0"/>
                 <a:ea typeface="Consolas" pitchFamily="34" charset="-122"/>
                 <a:cs typeface="Consolas" pitchFamily="34" charset="-120"/>
               </a:rPr>
-              <a:t>First</a:t>
+              <a:t>ToList</a:t>
             </a:r>
             <a:r>
               <a:rPr lang="en-US" sz="1600" dirty="0">
@@ -4969,18 +5602,35 @@
                 <a:ea typeface="Consolas" pitchFamily="34" charset="-122"/>
                 <a:cs typeface="Consolas" pitchFamily="34" charset="-120"/>
               </a:rPr>
-              <a:t>(a =&gt; a.</a:t>
-            </a:r>
+              <a:t>()</a:t>
+            </a:r>
+            <a:endParaRPr lang="en-US" sz="1600" dirty="0"/>
+          </a:p>
+          <a:p>
+            <a:pPr marL="0" indent="0">
+              <a:buNone/>
+            </a:pPr>
             <a:r>
               <a:rPr lang="en-US" sz="1600" dirty="0">
                 <a:solidFill>
+                  <a:srgbClr val="292929"/>
+                </a:solidFill>
+                <a:latin typeface="Consolas" pitchFamily="34" charset="0"/>
+                <a:ea typeface="Consolas" pitchFamily="34" charset="-122"/>
+                <a:cs typeface="Consolas" pitchFamily="34" charset="-120"/>
+              </a:rPr>
+              <a:t>       .</a:t>
+            </a:r>
+            <a:r>
+              <a:rPr lang="en-US" sz="1600" dirty="0" err="1">
+                <a:solidFill>
                   <a:srgbClr val="2B91AF"/>
                 </a:solidFill>
                 <a:latin typeface="Consolas" pitchFamily="34" charset="0"/>
                 <a:ea typeface="Consolas" pitchFamily="34" charset="-122"/>
                 <a:cs typeface="Consolas" pitchFamily="34" charset="-120"/>
               </a:rPr>
-              <a:t>Id</a:t>
+              <a:t>ForEach</a:t>
             </a:r>
             <a:r>
               <a:rPr lang="en-US" sz="1600" dirty="0">
@@ -4991,7 +5641,51 @@
                 <a:ea typeface="Consolas" pitchFamily="34" charset="-122"/>
                 <a:cs typeface="Consolas" pitchFamily="34" charset="-120"/>
               </a:rPr>
-              <a:t> == 1);</a:t>
+              <a:t>(e =&gt; </a:t>
+            </a:r>
+            <a:r>
+              <a:rPr lang="en-US" sz="1600" dirty="0" err="1">
+                <a:solidFill>
+                  <a:srgbClr val="2B91AF"/>
+                </a:solidFill>
+                <a:latin typeface="Consolas" pitchFamily="34" charset="0"/>
+                <a:ea typeface="Consolas" pitchFamily="34" charset="-122"/>
+                <a:cs typeface="Consolas" pitchFamily="34" charset="-120"/>
+              </a:rPr>
+              <a:t>Console</a:t>
+            </a:r>
+            <a:r>
+              <a:rPr lang="en-US" sz="1600" dirty="0" err="1">
+                <a:solidFill>
+                  <a:srgbClr val="292929"/>
+                </a:solidFill>
+                <a:latin typeface="Consolas" pitchFamily="34" charset="0"/>
+                <a:ea typeface="Consolas" pitchFamily="34" charset="-122"/>
+                <a:cs typeface="Consolas" pitchFamily="34" charset="-120"/>
+              </a:rPr>
+              <a:t>.</a:t>
+            </a:r>
+            <a:r>
+              <a:rPr lang="en-US" sz="1600" dirty="0" err="1">
+                <a:solidFill>
+                  <a:srgbClr val="2B91AF"/>
+                </a:solidFill>
+                <a:latin typeface="Consolas" pitchFamily="34" charset="0"/>
+                <a:ea typeface="Consolas" pitchFamily="34" charset="-122"/>
+                <a:cs typeface="Consolas" pitchFamily="34" charset="-120"/>
+              </a:rPr>
+              <a:t>WriteLine</a:t>
+            </a:r>
+            <a:r>
+              <a:rPr lang="en-US" sz="1600" dirty="0">
+                <a:solidFill>
+                  <a:srgbClr val="292929"/>
+                </a:solidFill>
+                <a:latin typeface="Consolas" pitchFamily="34" charset="0"/>
+                <a:ea typeface="Consolas" pitchFamily="34" charset="-122"/>
+                <a:cs typeface="Consolas" pitchFamily="34" charset="-120"/>
+              </a:rPr>
+              <a:t>(</a:t>
             </a:r>
             <a:endParaRPr lang="en-US" sz="1600" dirty="0"/>
           </a:p>
@@ -5008,580 +5702,62 @@
                 <a:ea typeface="Consolas" pitchFamily="34" charset="-122"/>
                 <a:cs typeface="Consolas" pitchFamily="34" charset="-120"/>
               </a:rPr>
-              <a:t> </a:t>
-            </a:r>
-            <a:endParaRPr lang="en-US" sz="1600" dirty="0"/>
-          </a:p>
-          <a:p>
-            <a:pPr marL="0" indent="0">
-              <a:buNone/>
-            </a:pPr>
+              <a:t>          </a:t>
+            </a:r>
             <a:r>
               <a:rPr lang="en-US" sz="1600" dirty="0">
                 <a:solidFill>
-                  <a:srgbClr val="2B91AF"/>
-                </a:solidFill>
-                <a:latin typeface="Consolas" pitchFamily="34" charset="0"/>
-                <a:ea typeface="Consolas" pitchFamily="34" charset="-122"/>
-                <a:cs typeface="Consolas" pitchFamily="34" charset="-120"/>
-              </a:rPr>
-              <a:t>PrintTracker</a:t>
+                  <a:srgbClr val="A31515"/>
+                </a:solidFill>
+                <a:latin typeface="Consolas" pitchFamily="34" charset="0"/>
+                <a:ea typeface="Consolas" pitchFamily="34" charset="-122"/>
+                <a:cs typeface="Consolas" pitchFamily="34" charset="-120"/>
+              </a:rPr>
+              <a:t>$"{</a:t>
+            </a:r>
+            <a:r>
+              <a:rPr lang="en-US" sz="1600" dirty="0" err="1">
+                <a:solidFill>
+                  <a:srgbClr val="A31515"/>
+                </a:solidFill>
+                <a:latin typeface="Consolas" pitchFamily="34" charset="0"/>
+                <a:ea typeface="Consolas" pitchFamily="34" charset="-122"/>
+                <a:cs typeface="Consolas" pitchFamily="34" charset="-120"/>
+              </a:rPr>
+              <a:t>e.Entity.GetType</a:t>
             </a:r>
             <a:r>
               <a:rPr lang="en-US" sz="1600" dirty="0">
                 <a:solidFill>
-                  <a:srgbClr val="292929"/>
-                </a:solidFill>
-                <a:latin typeface="Consolas" pitchFamily="34" charset="0"/>
-                <a:ea typeface="Consolas" pitchFamily="34" charset="-122"/>
-                <a:cs typeface="Consolas" pitchFamily="34" charset="-120"/>
-              </a:rPr>
-              <a:t>(db);   </a:t>
+                  <a:srgbClr val="A31515"/>
+                </a:solidFill>
+                <a:latin typeface="Consolas" pitchFamily="34" charset="0"/>
+                <a:ea typeface="Consolas" pitchFamily="34" charset="-122"/>
+                <a:cs typeface="Consolas" pitchFamily="34" charset="-120"/>
+              </a:rPr>
+              <a:t>().Name} : {</a:t>
+            </a:r>
+            <a:r>
+              <a:rPr lang="en-US" sz="1600" dirty="0" err="1">
+                <a:solidFill>
+                  <a:srgbClr val="A31515"/>
+                </a:solidFill>
+                <a:latin typeface="Consolas" pitchFamily="34" charset="0"/>
+                <a:ea typeface="Consolas" pitchFamily="34" charset="-122"/>
+                <a:cs typeface="Consolas" pitchFamily="34" charset="-120"/>
+              </a:rPr>
+              <a:t>e.State</a:t>
             </a:r>
             <a:r>
               <a:rPr lang="en-US" sz="1600" dirty="0">
                 <a:solidFill>
-                  <a:srgbClr val="008000"/>
-                </a:solidFill>
-                <a:latin typeface="Consolas" pitchFamily="34" charset="0"/>
-                <a:ea typeface="Consolas" pitchFamily="34" charset="-122"/>
-                <a:cs typeface="Consolas" pitchFamily="34" charset="-120"/>
-              </a:rPr>
-              <a:t>// 1 entity, state: Unchanged</a:t>
-            </a:r>
-            <a:endParaRPr lang="en-US" sz="1600" dirty="0"/>
-          </a:p>
-          <a:p>
-            <a:pPr marL="0" indent="0">
-              <a:buNone/>
-            </a:pPr>
-            <a:r>
-              <a:rPr lang="en-US" sz="1600" dirty="0">
-                <a:solidFill>
-                  <a:srgbClr val="292929"/>
-                </a:solidFill>
-                <a:latin typeface="Consolas" pitchFamily="34" charset="0"/>
-                <a:ea typeface="Consolas" pitchFamily="34" charset="-122"/>
-                <a:cs typeface="Consolas" pitchFamily="34" charset="-120"/>
-              </a:rPr>
-              <a:t> </a:t>
-            </a:r>
-            <a:endParaRPr lang="en-US" sz="1600" dirty="0"/>
-          </a:p>
-          <a:p>
-            <a:pPr marL="0" indent="0">
-              <a:buNone/>
-            </a:pPr>
-            <a:r>
-              <a:rPr lang="en-US" sz="1600" dirty="0">
-                <a:solidFill>
-                  <a:srgbClr val="292929"/>
-                </a:solidFill>
-                <a:latin typeface="Consolas" pitchFamily="34" charset="0"/>
-                <a:ea typeface="Consolas" pitchFamily="34" charset="-122"/>
-                <a:cs typeface="Consolas" pitchFamily="34" charset="-120"/>
-              </a:rPr>
-              <a:t>album.</a:t>
-            </a:r>
-            <a:r>
-              <a:rPr lang="en-US" sz="1600" dirty="0">
-                <a:solidFill>
-                  <a:srgbClr val="2B91AF"/>
-                </a:solidFill>
-                <a:latin typeface="Consolas" pitchFamily="34" charset="0"/>
-                <a:ea typeface="Consolas" pitchFamily="34" charset="-122"/>
-                <a:cs typeface="Consolas" pitchFamily="34" charset="-120"/>
-              </a:rPr>
-              <a:t>Title</a:t>
-            </a:r>
-            <a:r>
-              <a:rPr lang="en-US" sz="1600" dirty="0">
-                <a:solidFill>
-                  <a:srgbClr val="292929"/>
-                </a:solidFill>
-                <a:latin typeface="Consolas" pitchFamily="34" charset="0"/>
-                <a:ea typeface="Consolas" pitchFamily="34" charset="-122"/>
-                <a:cs typeface="Consolas" pitchFamily="34" charset="-120"/>
-              </a:rPr>
-              <a:t> = </a:t>
-            </a:r>
-            <a:r>
-              <a:rPr lang="en-US" sz="1600" dirty="0">
-                <a:solidFill>
                   <a:srgbClr val="A31515"/>
                 </a:solidFill>
                 <a:latin typeface="Consolas" pitchFamily="34" charset="0"/>
                 <a:ea typeface="Consolas" pitchFamily="34" charset="-122"/>
                 <a:cs typeface="Consolas" pitchFamily="34" charset="-120"/>
               </a:rPr>
-              <a:t>"New Title"</a:t>
-            </a:r>
-            <a:r>
-              <a:rPr lang="en-US" sz="1600" dirty="0">
-                <a:solidFill>
-                  <a:srgbClr val="292929"/>
-                </a:solidFill>
-                <a:latin typeface="Consolas" pitchFamily="34" charset="0"/>
-                <a:ea typeface="Consolas" pitchFamily="34" charset="-122"/>
-                <a:cs typeface="Consolas" pitchFamily="34" charset="-120"/>
-              </a:rPr>
-              <a:t>;</a:t>
-            </a:r>
-            <a:endParaRPr lang="en-US" sz="1600" dirty="0"/>
-          </a:p>
-          <a:p>
-            <a:pPr marL="0" indent="0">
-              <a:buNone/>
-            </a:pPr>
-            <a:r>
-              <a:rPr lang="en-US" sz="1600" dirty="0">
-                <a:solidFill>
-                  <a:srgbClr val="292929"/>
-                </a:solidFill>
-                <a:latin typeface="Consolas" pitchFamily="34" charset="0"/>
-                <a:ea typeface="Consolas" pitchFamily="34" charset="-122"/>
-                <a:cs typeface="Consolas" pitchFamily="34" charset="-120"/>
-              </a:rPr>
-              <a:t> </a:t>
-            </a:r>
-            <a:endParaRPr lang="en-US" sz="1600" dirty="0"/>
-          </a:p>
-          <a:p>
-            <a:pPr marL="0" indent="0">
-              <a:buNone/>
-            </a:pPr>
-            <a:r>
-              <a:rPr lang="en-US" sz="1600" dirty="0">
-                <a:solidFill>
-                  <a:srgbClr val="2B91AF"/>
-                </a:solidFill>
-                <a:latin typeface="Consolas" pitchFamily="34" charset="0"/>
-                <a:ea typeface="Consolas" pitchFamily="34" charset="-122"/>
-                <a:cs typeface="Consolas" pitchFamily="34" charset="-120"/>
-              </a:rPr>
-              <a:t>PrintTracker</a:t>
-            </a:r>
-            <a:r>
-              <a:rPr lang="en-US" sz="1600" dirty="0">
-                <a:solidFill>
-                  <a:srgbClr val="292929"/>
-                </a:solidFill>
-                <a:latin typeface="Consolas" pitchFamily="34" charset="0"/>
-                <a:ea typeface="Consolas" pitchFamily="34" charset="-122"/>
-                <a:cs typeface="Consolas" pitchFamily="34" charset="-120"/>
-              </a:rPr>
-              <a:t>(db);   </a:t>
-            </a:r>
-            <a:r>
-              <a:rPr lang="en-US" sz="1600" dirty="0">
-                <a:solidFill>
-                  <a:srgbClr val="008000"/>
-                </a:solidFill>
-                <a:latin typeface="Consolas" pitchFamily="34" charset="0"/>
-                <a:ea typeface="Consolas" pitchFamily="34" charset="-122"/>
-                <a:cs typeface="Consolas" pitchFamily="34" charset="-120"/>
-              </a:rPr>
-              <a:t>// 1 entity, state: Modified</a:t>
-            </a:r>
-            <a:endParaRPr lang="en-US" sz="1600" dirty="0"/>
-          </a:p>
-          <a:p>
-            <a:pPr marL="0" indent="0">
-              <a:buNone/>
-            </a:pPr>
-            <a:r>
-              <a:rPr lang="en-US" sz="1600" dirty="0">
-                <a:solidFill>
-                  <a:srgbClr val="292929"/>
-                </a:solidFill>
-                <a:latin typeface="Consolas" pitchFamily="34" charset="0"/>
-                <a:ea typeface="Consolas" pitchFamily="34" charset="-122"/>
-                <a:cs typeface="Consolas" pitchFamily="34" charset="-120"/>
-              </a:rPr>
-              <a:t> </a:t>
-            </a:r>
-            <a:endParaRPr lang="en-US" sz="1600" dirty="0"/>
-          </a:p>
-          <a:p>
-            <a:pPr marL="0" indent="0">
-              <a:buNone/>
-            </a:pPr>
-            <a:r>
-              <a:rPr lang="en-US" sz="1600" b="1" dirty="0">
-                <a:solidFill>
-                  <a:srgbClr val="0000FF"/>
-                </a:solidFill>
-                <a:latin typeface="Consolas" pitchFamily="34" charset="0"/>
-                <a:ea typeface="Consolas" pitchFamily="34" charset="-122"/>
-                <a:cs typeface="Consolas" pitchFamily="34" charset="-120"/>
-              </a:rPr>
-              <a:t>await</a:t>
-            </a:r>
-            <a:r>
-              <a:rPr lang="en-US" sz="1600" dirty="0">
-                <a:solidFill>
-                  <a:srgbClr val="292929"/>
-                </a:solidFill>
-                <a:latin typeface="Consolas" pitchFamily="34" charset="0"/>
-                <a:ea typeface="Consolas" pitchFamily="34" charset="-122"/>
-                <a:cs typeface="Consolas" pitchFamily="34" charset="-120"/>
-              </a:rPr>
-              <a:t> db.</a:t>
-            </a:r>
-            <a:r>
-              <a:rPr lang="en-US" sz="1600" dirty="0">
-                <a:solidFill>
-                  <a:srgbClr val="2B91AF"/>
-                </a:solidFill>
-                <a:latin typeface="Consolas" pitchFamily="34" charset="0"/>
-                <a:ea typeface="Consolas" pitchFamily="34" charset="-122"/>
-                <a:cs typeface="Consolas" pitchFamily="34" charset="-120"/>
-              </a:rPr>
-              <a:t>SaveChangesAsync</a:t>
-            </a:r>
-            <a:r>
-              <a:rPr lang="en-US" sz="1600" dirty="0">
-                <a:solidFill>
-                  <a:srgbClr val="292929"/>
-                </a:solidFill>
-                <a:latin typeface="Consolas" pitchFamily="34" charset="0"/>
-                <a:ea typeface="Consolas" pitchFamily="34" charset="-122"/>
-                <a:cs typeface="Consolas" pitchFamily="34" charset="-120"/>
-              </a:rPr>
-              <a:t>();   </a:t>
-            </a:r>
-            <a:r>
-              <a:rPr lang="en-US" sz="1600" dirty="0">
-                <a:solidFill>
-                  <a:srgbClr val="008000"/>
-                </a:solidFill>
-                <a:latin typeface="Consolas" pitchFamily="34" charset="0"/>
-                <a:ea typeface="Consolas" pitchFamily="34" charset="-122"/>
-                <a:cs typeface="Consolas" pitchFamily="34" charset="-120"/>
-              </a:rPr>
-              <a:t>// emits UPDATE</a:t>
-            </a:r>
-            <a:endParaRPr lang="en-US" sz="1600" dirty="0"/>
-          </a:p>
-          <a:p>
-            <a:pPr marL="0" indent="0">
-              <a:buNone/>
-            </a:pPr>
-            <a:r>
-              <a:rPr lang="en-US" sz="1600" dirty="0">
-                <a:solidFill>
-                  <a:srgbClr val="292929"/>
-                </a:solidFill>
-                <a:latin typeface="Consolas" pitchFamily="34" charset="0"/>
-                <a:ea typeface="Consolas" pitchFamily="34" charset="-122"/>
-                <a:cs typeface="Consolas" pitchFamily="34" charset="-120"/>
-              </a:rPr>
-              <a:t> </a:t>
-            </a:r>
-            <a:endParaRPr lang="en-US" sz="1600" dirty="0"/>
-          </a:p>
-          <a:p>
-            <a:pPr marL="0" indent="0">
-              <a:buNone/>
-            </a:pPr>
-            <a:r>
-              <a:rPr lang="en-US" sz="1600" b="1" dirty="0">
-                <a:solidFill>
-                  <a:srgbClr val="0000FF"/>
-                </a:solidFill>
-                <a:latin typeface="Consolas" pitchFamily="34" charset="0"/>
-                <a:ea typeface="Consolas" pitchFamily="34" charset="-122"/>
-                <a:cs typeface="Consolas" pitchFamily="34" charset="-120"/>
-              </a:rPr>
-              <a:t>static</a:t>
-            </a:r>
-            <a:r>
-              <a:rPr lang="en-US" sz="1600" dirty="0">
-                <a:solidFill>
-                  <a:srgbClr val="292929"/>
-                </a:solidFill>
-                <a:latin typeface="Consolas" pitchFamily="34" charset="0"/>
-                <a:ea typeface="Consolas" pitchFamily="34" charset="-122"/>
-                <a:cs typeface="Consolas" pitchFamily="34" charset="-120"/>
-              </a:rPr>
-              <a:t> </a:t>
-            </a:r>
-            <a:r>
-              <a:rPr lang="en-US" sz="1600" b="1" dirty="0">
-                <a:solidFill>
-                  <a:srgbClr val="0000FF"/>
-                </a:solidFill>
-                <a:latin typeface="Consolas" pitchFamily="34" charset="0"/>
-                <a:ea typeface="Consolas" pitchFamily="34" charset="-122"/>
-                <a:cs typeface="Consolas" pitchFamily="34" charset="-120"/>
-              </a:rPr>
-              <a:t>void</a:t>
-            </a:r>
-            <a:r>
-              <a:rPr lang="en-US" sz="1600" dirty="0">
-                <a:solidFill>
-                  <a:srgbClr val="292929"/>
-                </a:solidFill>
-                <a:latin typeface="Consolas" pitchFamily="34" charset="0"/>
-                <a:ea typeface="Consolas" pitchFamily="34" charset="-122"/>
-                <a:cs typeface="Consolas" pitchFamily="34" charset="-120"/>
-              </a:rPr>
-              <a:t> </a:t>
-            </a:r>
-            <a:r>
-              <a:rPr lang="en-US" sz="1600" dirty="0">
-                <a:solidFill>
-                  <a:srgbClr val="2B91AF"/>
-                </a:solidFill>
-                <a:latin typeface="Consolas" pitchFamily="34" charset="0"/>
-                <a:ea typeface="Consolas" pitchFamily="34" charset="-122"/>
-                <a:cs typeface="Consolas" pitchFamily="34" charset="-120"/>
-              </a:rPr>
-              <a:t>PrintTracker</a:t>
-            </a:r>
-            <a:r>
-              <a:rPr lang="en-US" sz="1600" dirty="0">
-                <a:solidFill>
-                  <a:srgbClr val="292929"/>
-                </a:solidFill>
-                <a:latin typeface="Consolas" pitchFamily="34" charset="0"/>
-                <a:ea typeface="Consolas" pitchFamily="34" charset="-122"/>
-                <a:cs typeface="Consolas" pitchFamily="34" charset="-120"/>
-              </a:rPr>
-              <a:t>(</a:t>
-            </a:r>
-            <a:r>
-              <a:rPr lang="en-US" sz="1600" dirty="0">
-                <a:solidFill>
-                  <a:srgbClr val="2B91AF"/>
-                </a:solidFill>
-                <a:latin typeface="Consolas" pitchFamily="34" charset="0"/>
-                <a:ea typeface="Consolas" pitchFamily="34" charset="-122"/>
-                <a:cs typeface="Consolas" pitchFamily="34" charset="-120"/>
-              </a:rPr>
-              <a:t>DbContext</a:t>
-            </a:r>
-            <a:r>
-              <a:rPr lang="en-US" sz="1600" dirty="0">
-                <a:solidFill>
-                  <a:srgbClr val="292929"/>
-                </a:solidFill>
-                <a:latin typeface="Consolas" pitchFamily="34" charset="0"/>
-                <a:ea typeface="Consolas" pitchFamily="34" charset="-122"/>
-                <a:cs typeface="Consolas" pitchFamily="34" charset="-120"/>
-              </a:rPr>
-              <a:t> db) =&gt;</a:t>
-            </a:r>
-            <a:endParaRPr lang="en-US" sz="1600" dirty="0"/>
-          </a:p>
-          <a:p>
-            <a:pPr marL="0" indent="0">
-              <a:buNone/>
-            </a:pPr>
-            <a:r>
-              <a:rPr lang="en-US" sz="1600" dirty="0">
-                <a:solidFill>
-                  <a:srgbClr val="292929"/>
-                </a:solidFill>
-                <a:latin typeface="Consolas" pitchFamily="34" charset="0"/>
-                <a:ea typeface="Consolas" pitchFamily="34" charset="-122"/>
-                <a:cs typeface="Consolas" pitchFamily="34" charset="-120"/>
-              </a:rPr>
-              <a:t>    db.</a:t>
-            </a:r>
-            <a:r>
-              <a:rPr lang="en-US" sz="1600" dirty="0">
-                <a:solidFill>
-                  <a:srgbClr val="2B91AF"/>
-                </a:solidFill>
-                <a:latin typeface="Consolas" pitchFamily="34" charset="0"/>
-                <a:ea typeface="Consolas" pitchFamily="34" charset="-122"/>
-                <a:cs typeface="Consolas" pitchFamily="34" charset="-120"/>
-              </a:rPr>
-              <a:t>ChangeTracker</a:t>
-            </a:r>
-            <a:r>
-              <a:rPr lang="en-US" sz="1600" dirty="0">
-                <a:solidFill>
-                  <a:srgbClr val="292929"/>
-                </a:solidFill>
-                <a:latin typeface="Consolas" pitchFamily="34" charset="0"/>
-                <a:ea typeface="Consolas" pitchFamily="34" charset="-122"/>
-                <a:cs typeface="Consolas" pitchFamily="34" charset="-120"/>
-              </a:rPr>
-              <a:t>.</a:t>
-            </a:r>
-            <a:r>
-              <a:rPr lang="en-US" sz="1600" dirty="0">
-                <a:solidFill>
-                  <a:srgbClr val="2B91AF"/>
-                </a:solidFill>
-                <a:latin typeface="Consolas" pitchFamily="34" charset="0"/>
-                <a:ea typeface="Consolas" pitchFamily="34" charset="-122"/>
-                <a:cs typeface="Consolas" pitchFamily="34" charset="-120"/>
-              </a:rPr>
-              <a:t>Entries</a:t>
-            </a:r>
-            <a:r>
-              <a:rPr lang="en-US" sz="1600" dirty="0">
-                <a:solidFill>
-                  <a:srgbClr val="292929"/>
-                </a:solidFill>
-                <a:latin typeface="Consolas" pitchFamily="34" charset="0"/>
-                <a:ea typeface="Consolas" pitchFamily="34" charset="-122"/>
-                <a:cs typeface="Consolas" pitchFamily="34" charset="-120"/>
-              </a:rPr>
-              <a:t>()</a:t>
-            </a:r>
-            <a:endParaRPr lang="en-US" sz="1600" dirty="0"/>
-          </a:p>
-          <a:p>
-            <a:pPr marL="0" indent="0">
-              <a:buNone/>
-            </a:pPr>
-            <a:r>
-              <a:rPr lang="en-US" sz="1600" dirty="0">
-                <a:solidFill>
-                  <a:srgbClr val="292929"/>
-                </a:solidFill>
-                <a:latin typeface="Consolas" pitchFamily="34" charset="0"/>
-                <a:ea typeface="Consolas" pitchFamily="34" charset="-122"/>
-                <a:cs typeface="Consolas" pitchFamily="34" charset="-120"/>
-              </a:rPr>
-              <a:t>       .</a:t>
-            </a:r>
-            <a:r>
-              <a:rPr lang="en-US" sz="1600" dirty="0">
-                <a:solidFill>
-                  <a:srgbClr val="2B91AF"/>
-                </a:solidFill>
-                <a:latin typeface="Consolas" pitchFamily="34" charset="0"/>
-                <a:ea typeface="Consolas" pitchFamily="34" charset="-122"/>
-                <a:cs typeface="Consolas" pitchFamily="34" charset="-120"/>
-              </a:rPr>
-              <a:t>ToList</a:t>
-            </a:r>
-            <a:r>
-              <a:rPr lang="en-US" sz="1600" dirty="0">
-                <a:solidFill>
-                  <a:srgbClr val="292929"/>
-                </a:solidFill>
-                <a:latin typeface="Consolas" pitchFamily="34" charset="0"/>
-                <a:ea typeface="Consolas" pitchFamily="34" charset="-122"/>
-                <a:cs typeface="Consolas" pitchFamily="34" charset="-120"/>
-              </a:rPr>
-              <a:t>()</a:t>
-            </a:r>
-            <a:endParaRPr lang="en-US" sz="1600" dirty="0"/>
-          </a:p>
-          <a:p>
-            <a:pPr marL="0" indent="0">
-              <a:buNone/>
-            </a:pPr>
-            <a:r>
-              <a:rPr lang="en-US" sz="1600" dirty="0">
-                <a:solidFill>
-                  <a:srgbClr val="292929"/>
-                </a:solidFill>
-                <a:latin typeface="Consolas" pitchFamily="34" charset="0"/>
-                <a:ea typeface="Consolas" pitchFamily="34" charset="-122"/>
-                <a:cs typeface="Consolas" pitchFamily="34" charset="-120"/>
-              </a:rPr>
-              <a:t>       .</a:t>
-            </a:r>
-            <a:r>
-              <a:rPr lang="en-US" sz="1600" dirty="0">
-                <a:solidFill>
-                  <a:srgbClr val="2B91AF"/>
-                </a:solidFill>
-                <a:latin typeface="Consolas" pitchFamily="34" charset="0"/>
-                <a:ea typeface="Consolas" pitchFamily="34" charset="-122"/>
-                <a:cs typeface="Consolas" pitchFamily="34" charset="-120"/>
-              </a:rPr>
-              <a:t>ForEach</a:t>
-            </a:r>
-            <a:r>
-              <a:rPr lang="en-US" sz="1600" dirty="0">
-                <a:solidFill>
-                  <a:srgbClr val="292929"/>
-                </a:solidFill>
-                <a:latin typeface="Consolas" pitchFamily="34" charset="0"/>
-                <a:ea typeface="Consolas" pitchFamily="34" charset="-122"/>
-                <a:cs typeface="Consolas" pitchFamily="34" charset="-120"/>
-              </a:rPr>
-              <a:t>(e =&gt; </a:t>
-            </a:r>
-            <a:r>
-              <a:rPr lang="en-US" sz="1600" dirty="0">
-                <a:solidFill>
-                  <a:srgbClr val="2B91AF"/>
-                </a:solidFill>
-                <a:latin typeface="Consolas" pitchFamily="34" charset="0"/>
-                <a:ea typeface="Consolas" pitchFamily="34" charset="-122"/>
-                <a:cs typeface="Consolas" pitchFamily="34" charset="-120"/>
-              </a:rPr>
-              <a:t>Console</a:t>
-            </a:r>
-            <a:r>
-              <a:rPr lang="en-US" sz="1600" dirty="0">
-                <a:solidFill>
-                  <a:srgbClr val="292929"/>
-                </a:solidFill>
-                <a:latin typeface="Consolas" pitchFamily="34" charset="0"/>
-                <a:ea typeface="Consolas" pitchFamily="34" charset="-122"/>
-                <a:cs typeface="Consolas" pitchFamily="34" charset="-120"/>
-              </a:rPr>
-              <a:t>.</a:t>
-            </a:r>
-            <a:r>
-              <a:rPr lang="en-US" sz="1600" dirty="0">
-                <a:solidFill>
-                  <a:srgbClr val="2B91AF"/>
-                </a:solidFill>
-                <a:latin typeface="Consolas" pitchFamily="34" charset="0"/>
-                <a:ea typeface="Consolas" pitchFamily="34" charset="-122"/>
-                <a:cs typeface="Consolas" pitchFamily="34" charset="-120"/>
-              </a:rPr>
-              <a:t>WriteLine</a:t>
-            </a:r>
-            <a:r>
-              <a:rPr lang="en-US" sz="1600" dirty="0">
-                <a:solidFill>
-                  <a:srgbClr val="292929"/>
-                </a:solidFill>
-                <a:latin typeface="Consolas" pitchFamily="34" charset="0"/>
-                <a:ea typeface="Consolas" pitchFamily="34" charset="-122"/>
-                <a:cs typeface="Consolas" pitchFamily="34" charset="-120"/>
-              </a:rPr>
-              <a:t>(</a:t>
-            </a:r>
-            <a:endParaRPr lang="en-US" sz="1600" dirty="0"/>
-          </a:p>
-          <a:p>
-            <a:pPr marL="0" indent="0">
-              <a:buNone/>
-            </a:pPr>
-            <a:r>
-              <a:rPr lang="en-US" sz="1600" dirty="0">
-                <a:solidFill>
-                  <a:srgbClr val="292929"/>
-                </a:solidFill>
-                <a:latin typeface="Consolas" pitchFamily="34" charset="0"/>
-                <a:ea typeface="Consolas" pitchFamily="34" charset="-122"/>
-                <a:cs typeface="Consolas" pitchFamily="34" charset="-120"/>
-              </a:rPr>
-              <a:t>          </a:t>
-            </a:r>
-            <a:r>
-              <a:rPr lang="en-US" sz="1600" dirty="0">
-                <a:solidFill>
-                  <a:srgbClr val="A31515"/>
-                </a:solidFill>
-                <a:latin typeface="Consolas" pitchFamily="34" charset="0"/>
-                <a:ea typeface="Consolas" pitchFamily="34" charset="-122"/>
-                <a:cs typeface="Consolas" pitchFamily="34" charset="-120"/>
-              </a:rPr>
-              <a:t>$"{e.Entity.GetType().Name} : {e.State}"</a:t>
+              <a:t>}"</a:t>
             </a:r>
             <a:r>
               <a:rPr lang="en-US" sz="1600" dirty="0">
@@ -20290,7 +20466,7 @@
         <p:spPr>
           <a:xfrm>
             <a:off x="1234440" y="2103120"/>
-            <a:ext cx="9144000" cy="457200"/>
+            <a:ext cx="9144000" cy="548640"/>
           </a:xfrm>
           <a:prstGeom prst="rect">
             <a:avLst/>
@@ -20303,6 +20479,9 @@
           <a:lstStyle/>
           <a:p>
             <a:pPr marL="0" indent="0">
+              <a:lnSpc>
+                <a:spcPct val="150000"/>
+              </a:lnSpc>
               <a:buNone/>
             </a:pPr>
             <a:r>
@@ -20314,7 +20493,44 @@
                 <a:ea typeface="Arial" pitchFamily="34" charset="-122"/>
                 <a:cs typeface="Arial" pitchFamily="34" charset="-120"/>
               </a:rPr>
-              <a:t>Founder &amp; Lead Instructor — intelligently.dev</a:t>
+              <a:t>Founder &amp; Lead Instructor — </a:t>
+            </a:r>
+            <a:r>
+              <a:rPr lang="en-US" sz="1800" i="1" dirty="0" err="1">
+                <a:solidFill>
+                  <a:srgbClr val="505050"/>
+                </a:solidFill>
+                <a:latin typeface="Arial" pitchFamily="34" charset="0"/>
+                <a:ea typeface="Arial" pitchFamily="34" charset="-122"/>
+                <a:cs typeface="Arial" pitchFamily="34" charset="-120"/>
+              </a:rPr>
+              <a:t>intelligently.dev</a:t>
+            </a:r>
+            <a:endParaRPr lang="en-US" sz="1800" i="1" dirty="0">
+              <a:solidFill>
+                <a:srgbClr val="505050"/>
+              </a:solidFill>
+              <a:latin typeface="Arial" pitchFamily="34" charset="0"/>
+              <a:ea typeface="Arial" pitchFamily="34" charset="-122"/>
+              <a:cs typeface="Arial" pitchFamily="34" charset="-120"/>
+            </a:endParaRPr>
+          </a:p>
+          <a:p>
+            <a:pPr marL="0" indent="0">
+              <a:lnSpc>
+                <a:spcPct val="150000"/>
+              </a:lnSpc>
+              <a:buNone/>
+            </a:pPr>
+            <a:r>
+              <a:rPr lang="en-US" i="1" dirty="0">
+                <a:solidFill>
+                  <a:srgbClr val="505050"/>
+                </a:solidFill>
+                <a:latin typeface="Arial" pitchFamily="34" charset="0"/>
+                <a:cs typeface="Arial" pitchFamily="34" charset="-120"/>
+              </a:rPr>
+              <a:t>Woody Technology Studio LLC</a:t>
             </a:r>
             <a:endParaRPr lang="en-US" sz="1800" dirty="0"/>
           </a:p>
